--- a/temp.pptx
+++ b/temp.pptx
@@ -234,7 +234,7 @@
           <a:p>
             <a:fld id="{982F7CBC-87DD-4F69-8F50-7ED68F7FF790}" type="datetimeFigureOut">
               <a:rPr lang="zh-TW" altLang="en-US" smtClean="0"/>
-              <a:t>2026/9/23</a:t>
+              <a:t>2026/9/24</a:t>
             </a:fld>
             <a:endParaRPr lang="zh-TW" altLang="en-US"/>
           </a:p>
@@ -411,7 +411,7 @@
           <a:p>
             <a:fld id="{863167AA-796B-4B6A-95ED-1C0BCB3E5802}" type="datetimeFigureOut">
               <a:rPr lang="zh-TW" altLang="en-US" smtClean="0"/>
-              <a:t>2026/9/23</a:t>
+              <a:t>2026/9/24</a:t>
             </a:fld>
             <a:endParaRPr lang="zh-TW" altLang="en-US"/>
           </a:p>
@@ -3720,14 +3720,14 @@
           <p:nvPr>
             <p:extLst>
               <p:ext uri="{D42A27DB-BD31-4B8C-83A1-F6EECF244321}">
-                <p14:modId xmlns:p14="http://schemas.microsoft.com/office/powerpoint/2010/main" val="2330300898"/>
+                <p14:modId xmlns:p14="http://schemas.microsoft.com/office/powerpoint/2010/main" val="633824488"/>
               </p:ext>
             </p:extLst>
           </p:nvPr>
         </p:nvGraphicFramePr>
         <p:xfrm>
           <a:off x="6712195" y="2403659"/>
-          <a:ext cx="380085" cy="212152"/>
+          <a:ext cx="365761" cy="212152"/>
         </p:xfrm>
         <a:graphic>
           <a:graphicData uri="http://schemas.openxmlformats.org/drawingml/2006/table">
@@ -3736,7 +3736,7 @@
                 <a:tableStyleId>{5C22544A-7EE6-4342-B048-85BDC9FD1C3A}</a:tableStyleId>
               </a:tblPr>
               <a:tblGrid>
-                <a:gridCol w="380085">
+                <a:gridCol w="365761">
                   <a:extLst>
                     <a:ext uri="{9D8B030D-6E8A-4147-A177-3AD203B41FA5}">
                       <a16:colId xmlns:a16="http://schemas.microsoft.com/office/drawing/2014/main" val="871242339"/>
@@ -7323,14 +7323,14 @@
           <p:nvPr>
             <p:extLst>
               <p:ext uri="{D42A27DB-BD31-4B8C-83A1-F6EECF244321}">
-                <p14:modId xmlns:p14="http://schemas.microsoft.com/office/powerpoint/2010/main" val="537918849"/>
+                <p14:modId xmlns:p14="http://schemas.microsoft.com/office/powerpoint/2010/main" val="233558034"/>
               </p:ext>
             </p:extLst>
           </p:nvPr>
         </p:nvGraphicFramePr>
         <p:xfrm>
-          <a:off x="2627784" y="2422709"/>
-          <a:ext cx="415216" cy="214203"/>
+          <a:off x="2627783" y="2422709"/>
+          <a:ext cx="415217" cy="214203"/>
         </p:xfrm>
         <a:graphic>
           <a:graphicData uri="http://schemas.openxmlformats.org/drawingml/2006/table">
@@ -7339,7 +7339,7 @@
                 <a:tableStyleId>{5C22544A-7EE6-4342-B048-85BDC9FD1C3A}</a:tableStyleId>
               </a:tblPr>
               <a:tblGrid>
-                <a:gridCol w="211690">
+                <a:gridCol w="211691">
                   <a:extLst>
                     <a:ext uri="{9D8B030D-6E8A-4147-A177-3AD203B41FA5}">
                       <a16:colId xmlns:a16="http://schemas.microsoft.com/office/drawing/2014/main" val="871242339"/>
@@ -7454,7 +7454,11 @@
                       <a:noFill/>
                     </a:lnL>
                     <a:lnR w="19050" cap="flat" cmpd="sng" algn="ctr">
-                      <a:noFill/>
+                      <a:solidFill>
+                        <a:schemeClr val="bg1">
+                          <a:lumMod val="65000"/>
+                        </a:schemeClr>
+                      </a:solidFill>
                       <a:prstDash val="solid"/>
                       <a:round/>
                       <a:headEnd type="none" w="med" len="med"/>
@@ -8496,8 +8500,8 @@
             <a:chExt cx="2132828" cy="446292"/>
           </a:xfrm>
         </p:grpSpPr>
-        <mc:AlternateContent xmlns:mc="http://schemas.openxmlformats.org/markup-compatibility/2006">
-          <mc:Choice xmlns:a14="http://schemas.microsoft.com/office/drawing/2010/main" Requires="a14">
+        <mc:AlternateContent xmlns:mc="http://schemas.openxmlformats.org/markup-compatibility/2006" xmlns:a14="http://schemas.microsoft.com/office/drawing/2010/main">
+          <mc:Choice Requires="a14">
             <p:sp>
               <p:nvSpPr>
                 <p:cNvPr id="212" name="文字方塊 211">
@@ -8549,7 +8553,7 @@
                         <m:d>
                           <m:dPr>
                             <m:ctrlPr>
-                              <a:rPr lang="zh-TW" altLang="en-US" sz="1200" i="1" smtClean="0">
+                              <a:rPr lang="en-US" altLang="zh-TW" sz="1200" b="1" i="1">
                                 <a:solidFill>
                                   <a:schemeClr val="accent2"/>
                                 </a:solidFill>
@@ -8597,16 +8601,7 @@
                                     </a:solidFill>
                                     <a:latin typeface="Cambria Math" panose="02040503050406030204" pitchFamily="18" charset="0"/>
                                   </a:rPr>
-                                  <m:t>(</m:t>
-                                </m:r>
-                                <m:r>
-                                  <a:rPr lang="en-US" altLang="zh-TW" sz="1200" i="1">
-                                    <a:solidFill>
-                                      <a:schemeClr val="accent2"/>
-                                    </a:solidFill>
-                                    <a:latin typeface="Cambria Math" panose="02040503050406030204" pitchFamily="18" charset="0"/>
-                                  </a:rPr>
-                                  <m:t>4</m:t>
+                                  <m:t>(4</m:t>
                                 </m:r>
                                 <m:r>
                                   <a:rPr lang="en-US" altLang="zh-TW" sz="1200" b="0" i="1" smtClean="0">
@@ -8732,7 +8727,7 @@
               </p:txBody>
             </p:sp>
           </mc:Choice>
-          <mc:Fallback>
+          <mc:Fallback xmlns="">
             <p:sp>
               <p:nvSpPr>
                 <p:cNvPr id="212" name="文字方塊 211">
@@ -8869,8 +8864,8 @@
             <a:chExt cx="2132828" cy="446292"/>
           </a:xfrm>
         </p:grpSpPr>
-        <mc:AlternateContent xmlns:mc="http://schemas.openxmlformats.org/markup-compatibility/2006">
-          <mc:Choice xmlns:a14="http://schemas.microsoft.com/office/drawing/2010/main" Requires="a14">
+        <mc:AlternateContent xmlns:mc="http://schemas.openxmlformats.org/markup-compatibility/2006" xmlns:a14="http://schemas.microsoft.com/office/drawing/2010/main">
+          <mc:Choice Requires="a14">
             <p:sp>
               <p:nvSpPr>
                 <p:cNvPr id="215" name="文字方塊 214">
@@ -8922,7 +8917,7 @@
                         <m:d>
                           <m:dPr>
                             <m:ctrlPr>
-                              <a:rPr lang="en-US" altLang="zh-TW" sz="1200" i="1" smtClean="0">
+                              <a:rPr lang="en-US" altLang="zh-TW" sz="1200" b="1" i="1">
                                 <a:solidFill>
                                   <a:schemeClr val="accent2"/>
                                 </a:solidFill>
@@ -8979,16 +8974,7 @@
                                     </a:solidFill>
                                     <a:latin typeface="Cambria Math" panose="02040503050406030204" pitchFamily="18" charset="0"/>
                                   </a:rPr>
-                                  <m:t>1</m:t>
-                                </m:r>
-                                <m:r>
-                                  <a:rPr lang="en-US" altLang="zh-TW" sz="1200" b="0" i="1" smtClean="0">
-                                    <a:solidFill>
-                                      <a:schemeClr val="accent2"/>
-                                    </a:solidFill>
-                                    <a:latin typeface="Cambria Math" panose="02040503050406030204" pitchFamily="18" charset="0"/>
-                                  </a:rPr>
-                                  <m:t>)</m:t>
+                                  <m:t>1)</m:t>
                                 </m:r>
                               </m:sub>
                             </m:sSub>
@@ -9108,7 +9094,7 @@
               </p:txBody>
             </p:sp>
           </mc:Choice>
-          <mc:Fallback>
+          <mc:Fallback xmlns="">
             <p:sp>
               <p:nvSpPr>
                 <p:cNvPr id="215" name="文字方塊 214">
@@ -11780,9 +11766,9 @@
         <p:grpSpPr>
           <a:xfrm>
             <a:off x="6300192" y="1844824"/>
-            <a:ext cx="2355645" cy="446292"/>
+            <a:ext cx="2482283" cy="446292"/>
             <a:chOff x="6047368" y="1223009"/>
-            <a:chExt cx="2355645" cy="446292"/>
+            <a:chExt cx="2482283" cy="446292"/>
           </a:xfrm>
         </p:grpSpPr>
         <mc:AlternateContent xmlns:mc="http://schemas.openxmlformats.org/markup-compatibility/2006">
@@ -11802,7 +11788,7 @@
               <p:spPr>
                 <a:xfrm>
                   <a:off x="6047368" y="1453601"/>
-                  <a:ext cx="2355645" cy="215700"/>
+                  <a:ext cx="2482283" cy="215700"/>
                 </a:xfrm>
                 <a:prstGeom prst="rect">
                   <a:avLst/>
@@ -11838,7 +11824,7 @@
                         <m:d>
                           <m:dPr>
                             <m:ctrlPr>
-                              <a:rPr lang="en-US" altLang="zh-TW" sz="1200" i="1" smtClean="0">
+                              <a:rPr lang="en-US" altLang="zh-TW" sz="1200" b="1" i="1">
                                 <a:solidFill>
                                   <a:schemeClr val="accent2"/>
                                 </a:solidFill>
@@ -11868,15 +11854,6 @@
                                   </a:rPr>
                                   <m:t>𝐡</m:t>
                                 </m:r>
-                                <m:r>
-                                  <a:rPr lang="en-US" altLang="zh-TW" sz="1200" b="1" i="0" smtClean="0">
-                                    <a:solidFill>
-                                      <a:schemeClr val="accent2"/>
-                                    </a:solidFill>
-                                    <a:latin typeface="Cambria Math" panose="02040503050406030204" pitchFamily="18" charset="0"/>
-                                  </a:rPr>
-                                  <m:t>#-1</m:t>
-                                </m:r>
                               </m:e>
                               <m:sub>
                                 <m:r>
@@ -11887,6 +11864,33 @@
                                     <a:latin typeface="Cambria Math" panose="02040503050406030204" pitchFamily="18" charset="0"/>
                                   </a:rPr>
                                   <m:t>(</m:t>
+                                </m:r>
+                                <m:r>
+                                  <a:rPr lang="en-US" altLang="zh-TW" sz="1200" b="0" i="1" smtClean="0">
+                                    <a:solidFill>
+                                      <a:schemeClr val="accent2"/>
+                                    </a:solidFill>
+                                    <a:latin typeface="Cambria Math" panose="02040503050406030204" pitchFamily="18" charset="0"/>
+                                  </a:rPr>
+                                  <m:t>#</m:t>
+                                </m:r>
+                                <m:r>
+                                  <a:rPr lang="en-US" altLang="zh-TW" sz="1200" i="1" smtClean="0">
+                                    <a:solidFill>
+                                      <a:schemeClr val="accent2"/>
+                                    </a:solidFill>
+                                    <a:latin typeface="Cambria Math" panose="02040503050406030204" pitchFamily="18" charset="0"/>
+                                  </a:rPr>
+                                  <m:t>−</m:t>
+                                </m:r>
+                                <m:r>
+                                  <a:rPr lang="en-US" altLang="zh-TW" sz="1200" b="0" i="1" smtClean="0">
+                                    <a:solidFill>
+                                      <a:schemeClr val="accent2"/>
+                                    </a:solidFill>
+                                    <a:latin typeface="Cambria Math" panose="02040503050406030204" pitchFamily="18" charset="0"/>
+                                  </a:rPr>
+                                  <m:t>1,   </m:t>
                                 </m:r>
                                 <m:r>
                                   <m:rPr>
@@ -11970,17 +11974,6 @@
                                   </a:rPr>
                                   <m:t>h</m:t>
                                 </m:r>
-                                <m:r>
-                                  <a:rPr lang="en-US" altLang="zh-TW" sz="1200" b="0" i="1" smtClean="0">
-                                    <a:solidFill>
-                                      <a:schemeClr val="accent5">
-                                        <a:lumMod val="75000"/>
-                                      </a:schemeClr>
-                                    </a:solidFill>
-                                    <a:latin typeface="Cambria Math" panose="02040503050406030204" pitchFamily="18" charset="0"/>
-                                  </a:rPr>
-                                  <m:t>#</m:t>
-                                </m:r>
                               </m:e>
                               <m:sub>
                                 <m:r>
@@ -11993,6 +11986,50 @@
                                     <a:latin typeface="Cambria Math" panose="02040503050406030204" pitchFamily="18" charset="0"/>
                                   </a:rPr>
                                   <m:t>(</m:t>
+                                </m:r>
+                                <m:r>
+                                  <a:rPr lang="en-US" altLang="zh-TW" sz="1200" i="1">
+                                    <a:solidFill>
+                                      <a:schemeClr val="accent5">
+                                        <a:lumMod val="75000"/>
+                                      </a:schemeClr>
+                                    </a:solidFill>
+                                    <a:latin typeface="Cambria Math" panose="02040503050406030204" pitchFamily="18" charset="0"/>
+                                  </a:rPr>
+                                  <m:t>#</m:t>
+                                </m:r>
+                                <m:r>
+                                  <a:rPr lang="en-US" altLang="zh-TW" sz="1200" i="1" smtClean="0">
+                                    <a:solidFill>
+                                      <a:schemeClr val="accent5">
+                                        <a:lumMod val="75000"/>
+                                      </a:schemeClr>
+                                    </a:solidFill>
+                                    <a:latin typeface="Cambria Math" panose="02040503050406030204" pitchFamily="18" charset="0"/>
+                                  </a:rPr>
+                                  <m:t>,</m:t>
+                                </m:r>
+                                <m:r>
+                                  <a:rPr lang="zh-TW" altLang="en-US" sz="1200" i="1">
+                                    <a:solidFill>
+                                      <a:schemeClr val="accent5">
+                                        <a:lumMod val="75000"/>
+                                      </a:schemeClr>
+                                    </a:solidFill>
+                                    <a:latin typeface="Cambria Math" panose="02040503050406030204" pitchFamily="18" charset="0"/>
+                                  </a:rPr>
+                                  <m:t> </m:t>
+                                </m:r>
+                                <m:r>
+                                  <a:rPr lang="en-US" altLang="zh-TW" sz="1200" b="0" i="1" smtClean="0">
+                                    <a:solidFill>
+                                      <a:schemeClr val="accent5">
+                                        <a:lumMod val="75000"/>
+                                      </a:schemeClr>
+                                    </a:solidFill>
+                                    <a:latin typeface="Cambria Math" panose="02040503050406030204" pitchFamily="18" charset="0"/>
+                                  </a:rPr>
+                                  <m:t> </m:t>
                                 </m:r>
                                 <m:r>
                                   <m:rPr>
@@ -12017,7 +12054,7 @@
                                     </a:solidFill>
                                     <a:latin typeface="Cambria Math" panose="02040503050406030204" pitchFamily="18" charset="0"/>
                                   </a:rPr>
-                                  <m:t>-1)</m:t>
+                                  <m:t>−1)</m:t>
                                 </m:r>
                               </m:sub>
                             </m:sSub>
@@ -12086,7 +12123,7 @@
               <p:spPr>
                 <a:xfrm>
                   <a:off x="6047368" y="1453601"/>
-                  <a:ext cx="2355645" cy="215700"/>
+                  <a:ext cx="2482283" cy="215700"/>
                 </a:xfrm>
                 <a:prstGeom prst="rect">
                   <a:avLst/>
@@ -12094,7 +12131,7 @@
                 <a:blipFill>
                   <a:blip r:embed="rId6"/>
                   <a:stretch>
-                    <a:fillRect l="-2326" b="-22222"/>
+                    <a:fillRect l="-2206" b="-22222"/>
                   </a:stretch>
                 </a:blipFill>
               </p:spPr>
@@ -12279,8 +12316,8 @@
             </a:p>
           </p:txBody>
         </p:sp>
-        <mc:AlternateContent xmlns:mc="http://schemas.openxmlformats.org/markup-compatibility/2006">
-          <mc:Choice xmlns:a14="http://schemas.microsoft.com/office/drawing/2010/main" Requires="a14">
+        <mc:AlternateContent xmlns:mc="http://schemas.openxmlformats.org/markup-compatibility/2006" xmlns:a14="http://schemas.microsoft.com/office/drawing/2010/main">
+          <mc:Choice Requires="a14">
             <p:sp>
               <p:nvSpPr>
                 <p:cNvPr id="42" name="文字方塊 41">
@@ -12336,7 +12373,7 @@
                         <m:f>
                           <m:fPr>
                             <m:ctrlPr>
-                              <a:rPr lang="en-US" altLang="zh-TW" sz="1200" b="0" smtClean="0">
+                              <a:rPr lang="en-US" altLang="zh-TW" sz="1200" b="0" i="1" smtClean="0">
                                 <a:latin typeface="Cambria Math" panose="02040503050406030204" pitchFamily="18" charset="0"/>
                                 <a:ea typeface="Cambria Math" panose="02040503050406030204" pitchFamily="18" charset="0"/>
                               </a:rPr>
@@ -12521,7 +12558,7 @@
               </p:txBody>
             </p:sp>
           </mc:Choice>
-          <mc:Fallback>
+          <mc:Fallback xmlns="">
             <p:sp>
               <p:nvSpPr>
                 <p:cNvPr id="42" name="文字方塊 41">
@@ -12774,13 +12811,13 @@
           <p:nvPr>
             <p:extLst>
               <p:ext uri="{D42A27DB-BD31-4B8C-83A1-F6EECF244321}">
-                <p14:modId xmlns:p14="http://schemas.microsoft.com/office/powerpoint/2010/main" val="4202175510"/>
+                <p14:modId xmlns:p14="http://schemas.microsoft.com/office/powerpoint/2010/main" val="1289529618"/>
               </p:ext>
             </p:extLst>
           </p:nvPr>
         </p:nvGraphicFramePr>
         <p:xfrm>
-          <a:off x="738344" y="2865683"/>
+          <a:off x="738344" y="2504260"/>
           <a:ext cx="597080" cy="1499421"/>
         </p:xfrm>
         <a:graphic>
@@ -12822,7 +12859,9 @@
                       <a:r>
                         <a:rPr lang="en-US" altLang="zh-TW" sz="1000" b="0" dirty="0">
                           <a:solidFill>
-                            <a:schemeClr val="tx1"/>
+                            <a:schemeClr val="bg1">
+                              <a:lumMod val="75000"/>
+                            </a:schemeClr>
                           </a:solidFill>
                           <a:latin typeface="ADLaM Display" panose="02010000000000000000" pitchFamily="2" charset="0"/>
                           <a:cs typeface="ADLaM Display" panose="02010000000000000000" pitchFamily="2" charset="0"/>
@@ -12831,7 +12870,9 @@
                       </a:r>
                       <a:endParaRPr lang="zh-TW" altLang="en-US" sz="1000" b="0" dirty="0">
                         <a:solidFill>
-                          <a:schemeClr val="tx1"/>
+                          <a:schemeClr val="bg1">
+                            <a:lumMod val="75000"/>
+                          </a:schemeClr>
                         </a:solidFill>
                         <a:latin typeface="ADLaM Display" panose="02010000000000000000" pitchFamily="2" charset="0"/>
                         <a:cs typeface="ADLaM Display" panose="02010000000000000000" pitchFamily="2" charset="0"/>
@@ -12883,7 +12924,9 @@
                       <a:r>
                         <a:rPr lang="en-US" altLang="zh-TW" sz="1000" b="0" dirty="0">
                           <a:solidFill>
-                            <a:schemeClr val="tx1"/>
+                            <a:schemeClr val="bg1">
+                              <a:lumMod val="75000"/>
+                            </a:schemeClr>
                           </a:solidFill>
                           <a:latin typeface="ADLaM Display" panose="02010000000000000000" pitchFamily="2" charset="0"/>
                           <a:cs typeface="ADLaM Display" panose="02010000000000000000" pitchFamily="2" charset="0"/>
@@ -12892,7 +12935,9 @@
                       </a:r>
                       <a:endParaRPr lang="zh-TW" altLang="en-US" sz="1000" b="0" dirty="0">
                         <a:solidFill>
-                          <a:schemeClr val="tx1"/>
+                          <a:schemeClr val="bg1">
+                            <a:lumMod val="75000"/>
+                          </a:schemeClr>
                         </a:solidFill>
                         <a:latin typeface="ADLaM Display" panose="02010000000000000000" pitchFamily="2" charset="0"/>
                         <a:cs typeface="ADLaM Display" panose="02010000000000000000" pitchFamily="2" charset="0"/>
@@ -12936,7 +12981,9 @@
                       <a:r>
                         <a:rPr lang="en-US" altLang="zh-TW" sz="1000" b="0" dirty="0">
                           <a:solidFill>
-                            <a:schemeClr val="tx1"/>
+                            <a:schemeClr val="bg1">
+                              <a:lumMod val="75000"/>
+                            </a:schemeClr>
                           </a:solidFill>
                           <a:latin typeface="ADLaM Display" panose="02010000000000000000" pitchFamily="2" charset="0"/>
                           <a:cs typeface="ADLaM Display" panose="02010000000000000000" pitchFamily="2" charset="0"/>
@@ -12945,7 +12992,9 @@
                       </a:r>
                       <a:endParaRPr lang="zh-TW" altLang="en-US" sz="1000" b="0" dirty="0">
                         <a:solidFill>
-                          <a:schemeClr val="tx1"/>
+                          <a:schemeClr val="bg1">
+                            <a:lumMod val="75000"/>
+                          </a:schemeClr>
                         </a:solidFill>
                         <a:latin typeface="ADLaM Display" panose="02010000000000000000" pitchFamily="2" charset="0"/>
                         <a:cs typeface="ADLaM Display" panose="02010000000000000000" pitchFamily="2" charset="0"/>
@@ -13003,7 +13052,9 @@
                       <a:pPr algn="ctr"/>
                       <a:endParaRPr lang="zh-TW" altLang="en-US" sz="1000" b="0" dirty="0">
                         <a:solidFill>
-                          <a:schemeClr val="tx1"/>
+                          <a:schemeClr val="bg1">
+                            <a:lumMod val="75000"/>
+                          </a:schemeClr>
                         </a:solidFill>
                         <a:latin typeface="ADLaM Display" panose="02010000000000000000" pitchFamily="2" charset="0"/>
                         <a:cs typeface="ADLaM Display" panose="02010000000000000000" pitchFamily="2" charset="0"/>
@@ -13048,7 +13099,9 @@
                       <a:pPr algn="ctr"/>
                       <a:endParaRPr lang="zh-TW" altLang="en-US" sz="1000" b="0" dirty="0">
                         <a:solidFill>
-                          <a:schemeClr val="tx1"/>
+                          <a:schemeClr val="bg1">
+                            <a:lumMod val="75000"/>
+                          </a:schemeClr>
                         </a:solidFill>
                         <a:latin typeface="ADLaM Display" panose="02010000000000000000" pitchFamily="2" charset="0"/>
                         <a:cs typeface="ADLaM Display" panose="02010000000000000000" pitchFamily="2" charset="0"/>
@@ -13089,7 +13142,9 @@
                       <a:pPr algn="ctr"/>
                       <a:endParaRPr lang="zh-TW" altLang="en-US" sz="1000" b="0" dirty="0">
                         <a:solidFill>
-                          <a:schemeClr val="tx1"/>
+                          <a:schemeClr val="bg1">
+                            <a:lumMod val="75000"/>
+                          </a:schemeClr>
                         </a:solidFill>
                         <a:latin typeface="ADLaM Display" panose="02010000000000000000" pitchFamily="2" charset="0"/>
                         <a:cs typeface="ADLaM Display" panose="02010000000000000000" pitchFamily="2" charset="0"/>
@@ -13142,7 +13197,9 @@
                       <a:r>
                         <a:rPr lang="en-US" altLang="zh-TW" sz="1000" b="0" dirty="0">
                           <a:solidFill>
-                            <a:schemeClr val="tx1"/>
+                            <a:schemeClr val="bg1">
+                              <a:lumMod val="75000"/>
+                            </a:schemeClr>
                           </a:solidFill>
                           <a:latin typeface="ADLaM Display" panose="02010000000000000000" pitchFamily="2" charset="0"/>
                           <a:cs typeface="ADLaM Display" panose="02010000000000000000" pitchFamily="2" charset="0"/>
@@ -13151,7 +13208,9 @@
                       </a:r>
                       <a:endParaRPr lang="zh-TW" altLang="en-US" sz="1000" b="0" dirty="0">
                         <a:solidFill>
-                          <a:schemeClr val="tx1"/>
+                          <a:schemeClr val="bg1">
+                            <a:lumMod val="75000"/>
+                          </a:schemeClr>
                         </a:solidFill>
                         <a:latin typeface="ADLaM Display" panose="02010000000000000000" pitchFamily="2" charset="0"/>
                         <a:cs typeface="ADLaM Display" panose="02010000000000000000" pitchFamily="2" charset="0"/>
@@ -13203,7 +13262,9 @@
                       <a:r>
                         <a:rPr lang="en-US" altLang="zh-TW" sz="1000" b="0" dirty="0">
                           <a:solidFill>
-                            <a:schemeClr val="tx1"/>
+                            <a:schemeClr val="bg1">
+                              <a:lumMod val="75000"/>
+                            </a:schemeClr>
                           </a:solidFill>
                           <a:latin typeface="ADLaM Display" panose="02010000000000000000" pitchFamily="2" charset="0"/>
                           <a:cs typeface="ADLaM Display" panose="02010000000000000000" pitchFamily="2" charset="0"/>
@@ -13212,7 +13273,9 @@
                       </a:r>
                       <a:endParaRPr lang="zh-TW" altLang="en-US" sz="1000" b="0" dirty="0">
                         <a:solidFill>
-                          <a:schemeClr val="tx1"/>
+                          <a:schemeClr val="bg1">
+                            <a:lumMod val="75000"/>
+                          </a:schemeClr>
                         </a:solidFill>
                         <a:latin typeface="ADLaM Display" panose="02010000000000000000" pitchFamily="2" charset="0"/>
                         <a:cs typeface="ADLaM Display" panose="02010000000000000000" pitchFamily="2" charset="0"/>
@@ -13256,7 +13319,9 @@
                       <a:r>
                         <a:rPr lang="en-US" altLang="zh-TW" sz="1000" b="0" dirty="0">
                           <a:solidFill>
-                            <a:schemeClr val="tx1"/>
+                            <a:schemeClr val="bg1">
+                              <a:lumMod val="75000"/>
+                            </a:schemeClr>
                           </a:solidFill>
                           <a:latin typeface="ADLaM Display" panose="02010000000000000000" pitchFamily="2" charset="0"/>
                           <a:cs typeface="ADLaM Display" panose="02010000000000000000" pitchFamily="2" charset="0"/>
@@ -13265,7 +13330,9 @@
                       </a:r>
                       <a:endParaRPr lang="zh-TW" altLang="en-US" sz="1000" b="0" dirty="0">
                         <a:solidFill>
-                          <a:schemeClr val="tx1"/>
+                          <a:schemeClr val="bg1">
+                            <a:lumMod val="75000"/>
+                          </a:schemeClr>
                         </a:solidFill>
                         <a:latin typeface="ADLaM Display" panose="02010000000000000000" pitchFamily="2" charset="0"/>
                         <a:cs typeface="ADLaM Display" panose="02010000000000000000" pitchFamily="2" charset="0"/>
@@ -13323,7 +13390,9 @@
                       <a:pPr algn="ctr"/>
                       <a:endParaRPr lang="zh-TW" altLang="en-US" sz="1000" b="0" dirty="0">
                         <a:solidFill>
-                          <a:schemeClr val="tx1"/>
+                          <a:schemeClr val="bg1">
+                            <a:lumMod val="75000"/>
+                          </a:schemeClr>
                         </a:solidFill>
                         <a:latin typeface="ADLaM Display" panose="02010000000000000000" pitchFamily="2" charset="0"/>
                         <a:cs typeface="ADLaM Display" panose="02010000000000000000" pitchFamily="2" charset="0"/>
@@ -13368,7 +13437,9 @@
                       <a:pPr algn="ctr"/>
                       <a:endParaRPr lang="zh-TW" altLang="en-US" sz="1000" b="0" dirty="0">
                         <a:solidFill>
-                          <a:schemeClr val="tx1"/>
+                          <a:schemeClr val="bg1">
+                            <a:lumMod val="75000"/>
+                          </a:schemeClr>
                         </a:solidFill>
                         <a:latin typeface="ADLaM Display" panose="02010000000000000000" pitchFamily="2" charset="0"/>
                         <a:cs typeface="ADLaM Display" panose="02010000000000000000" pitchFamily="2" charset="0"/>
@@ -13409,7 +13480,9 @@
                       <a:pPr algn="ctr"/>
                       <a:endParaRPr lang="zh-TW" altLang="en-US" sz="1000" b="0" dirty="0">
                         <a:solidFill>
-                          <a:schemeClr val="tx1"/>
+                          <a:schemeClr val="bg1">
+                            <a:lumMod val="75000"/>
+                          </a:schemeClr>
                         </a:solidFill>
                         <a:latin typeface="ADLaM Display" panose="02010000000000000000" pitchFamily="2" charset="0"/>
                         <a:cs typeface="ADLaM Display" panose="02010000000000000000" pitchFamily="2" charset="0"/>
@@ -13462,7 +13535,9 @@
                       <a:r>
                         <a:rPr lang="en-US" altLang="zh-TW" sz="1000" b="0" dirty="0">
                           <a:solidFill>
-                            <a:schemeClr val="tx1"/>
+                            <a:schemeClr val="bg1">
+                              <a:lumMod val="75000"/>
+                            </a:schemeClr>
                           </a:solidFill>
                           <a:latin typeface="ADLaM Display" panose="02010000000000000000" pitchFamily="2" charset="0"/>
                           <a:cs typeface="ADLaM Display" panose="02010000000000000000" pitchFamily="2" charset="0"/>
@@ -13471,7 +13546,9 @@
                       </a:r>
                       <a:endParaRPr lang="zh-TW" altLang="en-US" sz="1000" b="0" dirty="0">
                         <a:solidFill>
-                          <a:schemeClr val="tx1"/>
+                          <a:schemeClr val="bg1">
+                            <a:lumMod val="75000"/>
+                          </a:schemeClr>
                         </a:solidFill>
                         <a:latin typeface="ADLaM Display" panose="02010000000000000000" pitchFamily="2" charset="0"/>
                         <a:cs typeface="ADLaM Display" panose="02010000000000000000" pitchFamily="2" charset="0"/>
@@ -13523,7 +13600,9 @@
                       <a:r>
                         <a:rPr lang="en-US" altLang="zh-TW" sz="1000" b="0" dirty="0">
                           <a:solidFill>
-                            <a:schemeClr val="tx1"/>
+                            <a:schemeClr val="bg1">
+                              <a:lumMod val="75000"/>
+                            </a:schemeClr>
                           </a:solidFill>
                           <a:latin typeface="ADLaM Display" panose="02010000000000000000" pitchFamily="2" charset="0"/>
                           <a:cs typeface="ADLaM Display" panose="02010000000000000000" pitchFamily="2" charset="0"/>
@@ -13532,7 +13611,9 @@
                       </a:r>
                       <a:endParaRPr lang="zh-TW" altLang="en-US" sz="1000" b="0" dirty="0">
                         <a:solidFill>
-                          <a:schemeClr val="tx1"/>
+                          <a:schemeClr val="bg1">
+                            <a:lumMod val="75000"/>
+                          </a:schemeClr>
                         </a:solidFill>
                         <a:latin typeface="ADLaM Display" panose="02010000000000000000" pitchFamily="2" charset="0"/>
                         <a:cs typeface="ADLaM Display" panose="02010000000000000000" pitchFamily="2" charset="0"/>
@@ -13576,7 +13657,9 @@
                       <a:r>
                         <a:rPr lang="en-US" altLang="zh-TW" sz="1000" b="0" dirty="0">
                           <a:solidFill>
-                            <a:schemeClr val="tx1"/>
+                            <a:schemeClr val="bg1">
+                              <a:lumMod val="75000"/>
+                            </a:schemeClr>
                           </a:solidFill>
                           <a:latin typeface="ADLaM Display" panose="02010000000000000000" pitchFamily="2" charset="0"/>
                           <a:cs typeface="ADLaM Display" panose="02010000000000000000" pitchFamily="2" charset="0"/>
@@ -13585,7 +13668,9 @@
                       </a:r>
                       <a:endParaRPr lang="zh-TW" altLang="en-US" sz="1000" b="0" dirty="0">
                         <a:solidFill>
-                          <a:schemeClr val="tx1"/>
+                          <a:schemeClr val="bg1">
+                            <a:lumMod val="75000"/>
+                          </a:schemeClr>
                         </a:solidFill>
                         <a:latin typeface="ADLaM Display" panose="02010000000000000000" pitchFamily="2" charset="0"/>
                         <a:cs typeface="ADLaM Display" panose="02010000000000000000" pitchFamily="2" charset="0"/>
@@ -13643,7 +13728,9 @@
                       <a:pPr algn="ctr"/>
                       <a:endParaRPr lang="zh-TW" altLang="en-US" sz="1000" b="0" dirty="0">
                         <a:solidFill>
-                          <a:schemeClr val="tx1"/>
+                          <a:schemeClr val="bg1">
+                            <a:lumMod val="75000"/>
+                          </a:schemeClr>
                         </a:solidFill>
                         <a:latin typeface="ADLaM Display" panose="02010000000000000000" pitchFamily="2" charset="0"/>
                         <a:cs typeface="ADLaM Display" panose="02010000000000000000" pitchFamily="2" charset="0"/>
@@ -13688,7 +13775,9 @@
                       <a:pPr algn="ctr"/>
                       <a:endParaRPr lang="zh-TW" altLang="en-US" sz="1000" b="0" dirty="0">
                         <a:solidFill>
-                          <a:schemeClr val="tx1"/>
+                          <a:schemeClr val="bg1">
+                            <a:lumMod val="75000"/>
+                          </a:schemeClr>
                         </a:solidFill>
                         <a:latin typeface="ADLaM Display" panose="02010000000000000000" pitchFamily="2" charset="0"/>
                         <a:cs typeface="ADLaM Display" panose="02010000000000000000" pitchFamily="2" charset="0"/>
@@ -13729,7 +13818,9 @@
                       <a:pPr algn="ctr"/>
                       <a:endParaRPr lang="zh-TW" altLang="en-US" sz="1000" b="0" dirty="0">
                         <a:solidFill>
-                          <a:schemeClr val="tx1"/>
+                          <a:schemeClr val="bg1">
+                            <a:lumMod val="75000"/>
+                          </a:schemeClr>
                         </a:solidFill>
                         <a:latin typeface="ADLaM Display" panose="02010000000000000000" pitchFamily="2" charset="0"/>
                         <a:cs typeface="ADLaM Display" panose="02010000000000000000" pitchFamily="2" charset="0"/>
@@ -13782,7 +13873,9 @@
                       <a:r>
                         <a:rPr lang="en-US" altLang="zh-TW" sz="1000" b="0" dirty="0">
                           <a:solidFill>
-                            <a:schemeClr val="tx1"/>
+                            <a:schemeClr val="bg1">
+                              <a:lumMod val="75000"/>
+                            </a:schemeClr>
                           </a:solidFill>
                           <a:latin typeface="ADLaM Display" panose="02010000000000000000" pitchFamily="2" charset="0"/>
                           <a:cs typeface="ADLaM Display" panose="02010000000000000000" pitchFamily="2" charset="0"/>
@@ -13791,7 +13884,9 @@
                       </a:r>
                       <a:endParaRPr lang="zh-TW" altLang="en-US" sz="1000" b="0" dirty="0">
                         <a:solidFill>
-                          <a:schemeClr val="tx1"/>
+                          <a:schemeClr val="bg1">
+                            <a:lumMod val="75000"/>
+                          </a:schemeClr>
                         </a:solidFill>
                         <a:latin typeface="ADLaM Display" panose="02010000000000000000" pitchFamily="2" charset="0"/>
                         <a:cs typeface="ADLaM Display" panose="02010000000000000000" pitchFamily="2" charset="0"/>
@@ -13843,7 +13938,9 @@
                       <a:r>
                         <a:rPr lang="en-US" altLang="zh-TW" sz="1000" b="0" dirty="0">
                           <a:solidFill>
-                            <a:schemeClr val="tx1"/>
+                            <a:schemeClr val="bg1">
+                              <a:lumMod val="75000"/>
+                            </a:schemeClr>
                           </a:solidFill>
                           <a:latin typeface="ADLaM Display" panose="02010000000000000000" pitchFamily="2" charset="0"/>
                           <a:cs typeface="ADLaM Display" panose="02010000000000000000" pitchFamily="2" charset="0"/>
@@ -13852,7 +13949,9 @@
                       </a:r>
                       <a:endParaRPr lang="zh-TW" altLang="en-US" sz="1000" b="0" dirty="0">
                         <a:solidFill>
-                          <a:schemeClr val="tx1"/>
+                          <a:schemeClr val="bg1">
+                            <a:lumMod val="75000"/>
+                          </a:schemeClr>
                         </a:solidFill>
                         <a:latin typeface="ADLaM Display" panose="02010000000000000000" pitchFamily="2" charset="0"/>
                         <a:cs typeface="ADLaM Display" panose="02010000000000000000" pitchFamily="2" charset="0"/>
@@ -13896,7 +13995,9 @@
                       <a:r>
                         <a:rPr lang="en-US" altLang="zh-TW" sz="1000" b="0" dirty="0">
                           <a:solidFill>
-                            <a:schemeClr val="tx1"/>
+                            <a:schemeClr val="bg1">
+                              <a:lumMod val="75000"/>
+                            </a:schemeClr>
                           </a:solidFill>
                           <a:latin typeface="ADLaM Display" panose="02010000000000000000" pitchFamily="2" charset="0"/>
                           <a:cs typeface="ADLaM Display" panose="02010000000000000000" pitchFamily="2" charset="0"/>
@@ -13905,7 +14006,9 @@
                       </a:r>
                       <a:endParaRPr lang="zh-TW" altLang="en-US" sz="1000" b="0" dirty="0">
                         <a:solidFill>
-                          <a:schemeClr val="tx1"/>
+                          <a:schemeClr val="bg1">
+                            <a:lumMod val="75000"/>
+                          </a:schemeClr>
                         </a:solidFill>
                         <a:latin typeface="ADLaM Display" panose="02010000000000000000" pitchFamily="2" charset="0"/>
                         <a:cs typeface="ADLaM Display" panose="02010000000000000000" pitchFamily="2" charset="0"/>
@@ -13972,7 +14075,7 @@
         </p:nvSpPr>
         <p:spPr>
           <a:xfrm>
-            <a:off x="2810438" y="4528131"/>
+            <a:off x="307700" y="5070157"/>
             <a:ext cx="1257506" cy="190663"/>
           </a:xfrm>
           <a:prstGeom prst="rect">
@@ -14050,13 +14153,13 @@
           <p:nvPr>
             <p:extLst>
               <p:ext uri="{D42A27DB-BD31-4B8C-83A1-F6EECF244321}">
-                <p14:modId xmlns:p14="http://schemas.microsoft.com/office/powerpoint/2010/main" val="3449519269"/>
+                <p14:modId xmlns:p14="http://schemas.microsoft.com/office/powerpoint/2010/main" val="3200697330"/>
               </p:ext>
             </p:extLst>
           </p:nvPr>
         </p:nvGraphicFramePr>
         <p:xfrm>
-          <a:off x="300959" y="2437277"/>
+          <a:off x="300959" y="2075854"/>
           <a:ext cx="365377" cy="1927827"/>
         </p:xfrm>
         <a:graphic>
@@ -14691,13 +14794,13 @@
           <p:nvPr>
             <p:extLst>
               <p:ext uri="{D42A27DB-BD31-4B8C-83A1-F6EECF244321}">
-                <p14:modId xmlns:p14="http://schemas.microsoft.com/office/powerpoint/2010/main" val="247658823"/>
+                <p14:modId xmlns:p14="http://schemas.microsoft.com/office/powerpoint/2010/main" val="3620497425"/>
               </p:ext>
             </p:extLst>
           </p:nvPr>
         </p:nvGraphicFramePr>
         <p:xfrm>
-          <a:off x="740801" y="2422709"/>
+          <a:off x="740801" y="2061286"/>
           <a:ext cx="594018" cy="214203"/>
         </p:xfrm>
         <a:graphic>
@@ -14931,47 +15034,6 @@
           </a:graphicData>
         </a:graphic>
       </p:graphicFrame>
-      <p:sp>
-        <p:nvSpPr>
-          <p:cNvPr id="59" name="文字方塊 58">
-            <a:extLst>
-              <a:ext uri="{FF2B5EF4-FFF2-40B4-BE49-F238E27FC236}">
-                <a16:creationId xmlns:a16="http://schemas.microsoft.com/office/drawing/2014/main" id="{8FA8A036-E723-ACE3-83F7-E5FEE6A72CED}"/>
-              </a:ext>
-            </a:extLst>
-          </p:cNvPr>
-          <p:cNvSpPr txBox="1"/>
-          <p:nvPr/>
-        </p:nvSpPr>
-        <p:spPr>
-          <a:xfrm>
-            <a:off x="850003" y="4086215"/>
-            <a:ext cx="365760" cy="91440"/>
-          </a:xfrm>
-          <a:prstGeom prst="rect">
-            <a:avLst/>
-          </a:prstGeom>
-          <a:noFill/>
-        </p:spPr>
-        <p:txBody>
-          <a:bodyPr wrap="none" lIns="0" tIns="0" rIns="0" bIns="0" rtlCol="0" anchor="ctr" anchorCtr="1">
-            <a:noAutofit/>
-          </a:bodyPr>
-          <a:lstStyle/>
-          <a:p>
-            <a:pPr algn="ctr">
-              <a:lnSpc>
-                <a:spcPts val="1200"/>
-              </a:lnSpc>
-            </a:pPr>
-            <a:r>
-              <a:rPr lang="en-US" altLang="zh-TW" sz="1200" b="1" dirty="0"/>
-              <a:t>1*3</a:t>
-            </a:r>
-            <a:endParaRPr lang="zh-TW" altLang="en-US" sz="1200" b="1" dirty="0"/>
-          </a:p>
-        </p:txBody>
-      </p:sp>
       <p:cxnSp>
         <p:nvCxnSpPr>
           <p:cNvPr id="65" name="接點: 肘形 64">
@@ -14990,8 +15052,8 @@
         </p:nvCxnSpPr>
         <p:spPr>
           <a:xfrm flipV="1">
-            <a:off x="1362321" y="2135056"/>
-            <a:ext cx="549724" cy="2126795"/>
+            <a:off x="1382257" y="2048075"/>
+            <a:ext cx="462809" cy="1831183"/>
           </a:xfrm>
           <a:prstGeom prst="bentConnector3">
             <a:avLst>
@@ -15080,7 +15142,7 @@
         </p:nvSpPr>
         <p:spPr>
           <a:xfrm>
-            <a:off x="3717028" y="4134717"/>
+            <a:off x="3073002" y="6260765"/>
             <a:ext cx="296842" cy="249729"/>
           </a:xfrm>
           <a:prstGeom prst="rect">
@@ -15170,85 +15232,6 @@
           </a:p>
         </p:txBody>
       </p:sp>
-      <p:sp>
-        <p:nvSpPr>
-          <p:cNvPr id="80" name="矩形 79">
-            <a:extLst>
-              <a:ext uri="{FF2B5EF4-FFF2-40B4-BE49-F238E27FC236}">
-                <a16:creationId xmlns:a16="http://schemas.microsoft.com/office/drawing/2014/main" id="{45D15400-0AD2-169A-6F71-5FB3C845F9A3}"/>
-              </a:ext>
-            </a:extLst>
-          </p:cNvPr>
-          <p:cNvSpPr/>
-          <p:nvPr/>
-        </p:nvSpPr>
-        <p:spPr>
-          <a:xfrm>
-            <a:off x="714484" y="4131087"/>
-            <a:ext cx="647837" cy="261528"/>
-          </a:xfrm>
-          <a:prstGeom prst="rect">
-            <a:avLst/>
-          </a:prstGeom>
-          <a:solidFill>
-            <a:schemeClr val="accent2">
-              <a:lumMod val="20000"/>
-              <a:lumOff val="80000"/>
-              <a:alpha val="20000"/>
-            </a:schemeClr>
-          </a:solidFill>
-          <a:ln w="15875">
-            <a:solidFill>
-              <a:schemeClr val="accent2">
-                <a:lumMod val="75000"/>
-              </a:schemeClr>
-            </a:solidFill>
-            <a:prstDash val="sysDot"/>
-            <a:extLst>
-              <a:ext uri="{C807C97D-BFC1-408E-A445-0C87EB9F89A2}">
-                <ask:lineSketchStyleProps xmlns:ask="http://schemas.microsoft.com/office/drawing/2018/sketchyshapes">
-                  <ask:type>
-                    <ask:lineSketchNone/>
-                  </ask:type>
-                </ask:lineSketchStyleProps>
-              </a:ext>
-            </a:extLst>
-          </a:ln>
-        </p:spPr>
-        <p:style>
-          <a:lnRef idx="2">
-            <a:schemeClr val="accent1">
-              <a:shade val="15000"/>
-            </a:schemeClr>
-          </a:lnRef>
-          <a:fillRef idx="1">
-            <a:schemeClr val="accent1"/>
-          </a:fillRef>
-          <a:effectRef idx="0">
-            <a:schemeClr val="accent1"/>
-          </a:effectRef>
-          <a:fontRef idx="minor">
-            <a:schemeClr val="lt1"/>
-          </a:fontRef>
-        </p:style>
-        <p:txBody>
-          <a:bodyPr wrap="none" lIns="0" tIns="0" rIns="0" bIns="0" rtlCol="0" anchor="ctr" anchorCtr="1"/>
-          <a:lstStyle/>
-          <a:p>
-            <a:pPr algn="ctr">
-              <a:lnSpc>
-                <a:spcPts val="1500"/>
-              </a:lnSpc>
-            </a:pPr>
-            <a:endParaRPr lang="en-US" altLang="zh-TW" sz="1400" b="1" baseline="-25000" dirty="0">
-              <a:solidFill>
-                <a:schemeClr val="tx2"/>
-              </a:solidFill>
-              <a:ea typeface="微軟正黑體" panose="020B0604030504040204" pitchFamily="34" charset="-120"/>
-            </a:endParaRPr>
-          </a:p>
-        </p:txBody>
-      </p:sp>
       <p:grpSp>
         <p:nvGrpSpPr>
           <p:cNvPr id="83" name="群組 82">
@@ -15263,7 +15246,7 @@
         </p:nvGrpSpPr>
         <p:grpSpPr>
           <a:xfrm>
-            <a:off x="2188192" y="3429769"/>
+            <a:off x="1840869" y="2829652"/>
             <a:ext cx="293061" cy="359271"/>
             <a:chOff x="1851922" y="1748433"/>
             <a:chExt cx="293061" cy="359271"/>
@@ -15335,7 +15318,7 @@
                   </a:solidFill>
                   <a:ea typeface="微軟正黑體" panose="020B0604030504040204" pitchFamily="34" charset="-120"/>
                 </a:rPr>
-                <a:t>Wc1</a:t>
+                <a:t>Wc</a:t>
               </a:r>
               <a:endParaRPr lang="en-US" altLang="zh-TW" sz="1200" b="1" baseline="-25000" dirty="0">
                 <a:solidFill>
@@ -15402,7 +15385,7 @@
         </p:nvGrpSpPr>
         <p:grpSpPr>
           <a:xfrm>
-            <a:off x="3779912" y="3438291"/>
+            <a:off x="4062915" y="2829652"/>
             <a:ext cx="293061" cy="359271"/>
             <a:chOff x="1842397" y="1748433"/>
             <a:chExt cx="293061" cy="359271"/>
@@ -15474,7 +15457,7 @@
                   </a:solidFill>
                   <a:ea typeface="微軟正黑體" panose="020B0604030504040204" pitchFamily="34" charset="-120"/>
                 </a:rPr>
-                <a:t>Uc1</a:t>
+                <a:t>Uc</a:t>
               </a:r>
               <a:endParaRPr lang="en-US" altLang="zh-TW" sz="1200" b="1" baseline="-25000" dirty="0">
                 <a:solidFill>
@@ -15527,143 +15510,6 @@
           </p:txBody>
         </p:sp>
       </p:grpSp>
-      <p:sp>
-        <p:nvSpPr>
-          <p:cNvPr id="94" name="矩形 93">
-            <a:extLst>
-              <a:ext uri="{FF2B5EF4-FFF2-40B4-BE49-F238E27FC236}">
-                <a16:creationId xmlns:a16="http://schemas.microsoft.com/office/drawing/2014/main" id="{E51D5A35-EEA2-F10A-C7F7-CE4BD3EE800C}"/>
-              </a:ext>
-            </a:extLst>
-          </p:cNvPr>
-          <p:cNvSpPr/>
-          <p:nvPr/>
-        </p:nvSpPr>
-        <p:spPr>
-          <a:xfrm>
-            <a:off x="4051048" y="4124900"/>
-            <a:ext cx="754910" cy="249729"/>
-          </a:xfrm>
-          <a:prstGeom prst="rect">
-            <a:avLst/>
-          </a:prstGeom>
-          <a:solidFill>
-            <a:schemeClr val="bg1">
-              <a:alpha val="60000"/>
-            </a:schemeClr>
-          </a:solidFill>
-          <a:ln w="19050">
-            <a:noFill/>
-            <a:prstDash val="sysDot"/>
-            <a:extLst>
-              <a:ext uri="{C807C97D-BFC1-408E-A445-0C87EB9F89A2}">
-                <ask:lineSketchStyleProps xmlns:ask="http://schemas.microsoft.com/office/drawing/2018/sketchyshapes">
-                  <ask:type>
-                    <ask:lineSketchNone/>
-                  </ask:type>
-                </ask:lineSketchStyleProps>
-              </a:ext>
-            </a:extLst>
-          </a:ln>
-        </p:spPr>
-        <p:style>
-          <a:lnRef idx="2">
-            <a:schemeClr val="accent1">
-              <a:shade val="15000"/>
-            </a:schemeClr>
-          </a:lnRef>
-          <a:fillRef idx="1">
-            <a:schemeClr val="accent1"/>
-          </a:fillRef>
-          <a:effectRef idx="0">
-            <a:schemeClr val="accent1"/>
-          </a:effectRef>
-          <a:fontRef idx="minor">
-            <a:schemeClr val="lt1"/>
-          </a:fontRef>
-        </p:style>
-        <p:txBody>
-          <a:bodyPr wrap="none" lIns="0" tIns="0" rIns="0" bIns="0" rtlCol="0" anchor="ctr" anchorCtr="1"/>
-          <a:lstStyle/>
-          <a:p>
-            <a:pPr lvl="0" algn="ctr"/>
-            <a:r>
-              <a:rPr lang="zh-TW" altLang="en-US" sz="1200" b="1" dirty="0">
-                <a:solidFill>
-                  <a:schemeClr val="accent4"/>
-                </a:solidFill>
-              </a:rPr>
-              <a:t> </a:t>
-            </a:r>
-            <a:r>
-              <a:rPr lang="zh-TW" altLang="zh-TW" sz="1200" b="1" dirty="0">
-                <a:solidFill>
-                  <a:schemeClr val="accent4"/>
-                </a:solidFill>
-              </a:rPr>
-              <a:t>➔</a:t>
-            </a:r>
-            <a:r>
-              <a:rPr lang="en-US" altLang="zh-TW" sz="1200" b="1" dirty="0">
-                <a:solidFill>
-                  <a:schemeClr val="accent4"/>
-                </a:solidFill>
-              </a:rPr>
-              <a:t> </a:t>
-            </a:r>
-            <a:r>
-              <a:rPr lang="el-GR" altLang="zh-TW" b="1" dirty="0">
-                <a:solidFill>
-                  <a:schemeClr val="accent4"/>
-                </a:solidFill>
-                <a:cs typeface="Calibri" panose="020F0502020204030204" pitchFamily="34" charset="0"/>
-              </a:rPr>
-              <a:t>σ</a:t>
-            </a:r>
-            <a:r>
-              <a:rPr lang="en-US" altLang="zh-TW" b="1" dirty="0">
-                <a:solidFill>
-                  <a:schemeClr val="accent4"/>
-                </a:solidFill>
-                <a:cs typeface="Calibri" panose="020F0502020204030204" pitchFamily="34" charset="0"/>
-              </a:rPr>
-              <a:t> </a:t>
-            </a:r>
-            <a:r>
-              <a:rPr lang="en-US" altLang="zh-TW" sz="1200" b="1" dirty="0">
-                <a:solidFill>
-                  <a:schemeClr val="accent4"/>
-                </a:solidFill>
-                <a:cs typeface="Calibri" panose="020F0502020204030204" pitchFamily="34" charset="0"/>
-              </a:rPr>
-              <a:t>=</a:t>
-            </a:r>
-            <a:r>
-              <a:rPr lang="zh-TW" altLang="en-US" sz="1200" b="1" dirty="0">
-                <a:solidFill>
-                  <a:schemeClr val="accent4"/>
-                </a:solidFill>
-                <a:cs typeface="Calibri" panose="020F0502020204030204" pitchFamily="34" charset="0"/>
-              </a:rPr>
-              <a:t> </a:t>
-            </a:r>
-            <a:r>
-              <a:rPr lang="en-US" altLang="zh-TW" sz="1200" b="1" dirty="0">
-                <a:solidFill>
-                  <a:schemeClr val="accent4"/>
-                </a:solidFill>
-                <a:cs typeface="Calibri" panose="020F0502020204030204" pitchFamily="34" charset="0"/>
-              </a:rPr>
-              <a:t>h1(4)</a:t>
-            </a:r>
-            <a:endParaRPr lang="en-US" altLang="zh-TW" sz="1200" b="1" baseline="-25000" dirty="0">
-              <a:solidFill>
-                <a:schemeClr val="accent4"/>
-              </a:solidFill>
-            </a:endParaRPr>
-          </a:p>
-        </p:txBody>
-      </p:sp>
       <p:graphicFrame>
         <p:nvGraphicFramePr>
           <p:cNvPr id="104" name="表格 103">
@@ -15679,13 +15525,13 @@
           <p:nvPr>
             <p:extLst>
               <p:ext uri="{D42A27DB-BD31-4B8C-83A1-F6EECF244321}">
-                <p14:modId xmlns:p14="http://schemas.microsoft.com/office/powerpoint/2010/main" val="3615558407"/>
+                <p14:modId xmlns:p14="http://schemas.microsoft.com/office/powerpoint/2010/main" val="169044756"/>
               </p:ext>
             </p:extLst>
           </p:nvPr>
         </p:nvGraphicFramePr>
         <p:xfrm>
-          <a:off x="5273030" y="2865683"/>
+          <a:off x="4867338" y="2518782"/>
           <a:ext cx="415217" cy="1499421"/>
         </p:xfrm>
         <a:graphic>
@@ -16584,13 +16430,13 @@
           <p:nvPr>
             <p:extLst>
               <p:ext uri="{D42A27DB-BD31-4B8C-83A1-F6EECF244321}">
-                <p14:modId xmlns:p14="http://schemas.microsoft.com/office/powerpoint/2010/main" val="2891893154"/>
+                <p14:modId xmlns:p14="http://schemas.microsoft.com/office/powerpoint/2010/main" val="1651193322"/>
               </p:ext>
             </p:extLst>
           </p:nvPr>
         </p:nvGraphicFramePr>
         <p:xfrm>
-          <a:off x="5273030" y="2422709"/>
+          <a:off x="4867339" y="2075808"/>
           <a:ext cx="415216" cy="214203"/>
         </p:xfrm>
         <a:graphic>
@@ -16715,7 +16561,11 @@
                       <a:noFill/>
                     </a:lnL>
                     <a:lnR w="19050" cap="flat" cmpd="sng" algn="ctr">
-                      <a:noFill/>
+                      <a:solidFill>
+                        <a:schemeClr val="bg1">
+                          <a:lumMod val="65000"/>
+                        </a:schemeClr>
+                      </a:solidFill>
                       <a:prstDash val="solid"/>
                       <a:round/>
                       <a:headEnd type="none" w="med" len="med"/>
@@ -16766,8 +16616,8 @@
         </p:nvSpPr>
         <p:spPr>
           <a:xfrm>
-            <a:off x="5239446" y="3680261"/>
-            <a:ext cx="484682" cy="302600"/>
+            <a:off x="4788024" y="3284984"/>
+            <a:ext cx="569295" cy="365371"/>
           </a:xfrm>
           <a:prstGeom prst="rect">
             <a:avLst/>
@@ -16776,13 +16626,14 @@
             <a:schemeClr val="accent5">
               <a:lumMod val="20000"/>
               <a:lumOff val="80000"/>
-              <a:alpha val="20000"/>
+              <a:alpha val="40000"/>
             </a:schemeClr>
           </a:solidFill>
           <a:ln w="15875">
             <a:solidFill>
               <a:schemeClr val="tx2">
-                <a:alpha val="20000"/>
+                <a:lumMod val="40000"/>
+                <a:lumOff val="60000"/>
               </a:schemeClr>
             </a:solidFill>
             <a:prstDash val="sysDot"/>
@@ -16822,12 +16673,18 @@
                 <a:spcPts val="1500"/>
               </a:lnSpc>
             </a:pPr>
-            <a:endParaRPr lang="en-US" altLang="zh-TW" sz="1400" b="1" baseline="-25000" dirty="0">
-              <a:solidFill>
-                <a:schemeClr val="tx2"/>
-              </a:solidFill>
-              <a:ea typeface="微軟正黑體" panose="020B0604030504040204" pitchFamily="34" charset="-120"/>
-            </a:endParaRPr>
+            <a:r>
+              <a:rPr lang="en-US" altLang="zh-TW" sz="1200" b="1" dirty="0">
+                <a:solidFill>
+                  <a:schemeClr val="tx2">
+                    <a:lumMod val="60000"/>
+                    <a:lumOff val="40000"/>
+                  </a:schemeClr>
+                </a:solidFill>
+                <a:ea typeface="微軟正黑體" panose="020B0604030504040204" pitchFamily="34" charset="-120"/>
+              </a:rPr>
+              <a:t>h3</a:t>
+            </a:r>
           </a:p>
         </p:txBody>
       </p:sp>
@@ -16845,7 +16702,7 @@
         </p:nvGrpSpPr>
         <p:grpSpPr>
           <a:xfrm>
-            <a:off x="2200232" y="2962954"/>
+            <a:off x="1835696" y="3932457"/>
             <a:ext cx="293061" cy="368796"/>
             <a:chOff x="1861447" y="1748433"/>
             <a:chExt cx="293061" cy="368796"/>
@@ -16917,7 +16774,7 @@
                   </a:solidFill>
                   <a:ea typeface="微軟正黑體" panose="020B0604030504040204" pitchFamily="34" charset="-120"/>
                 </a:rPr>
-                <a:t>Wo1</a:t>
+                <a:t>Wo</a:t>
               </a:r>
               <a:endParaRPr lang="en-US" altLang="zh-TW" sz="1200" b="1" baseline="-25000" dirty="0">
                 <a:solidFill>
@@ -16984,7 +16841,7 @@
         </p:nvGrpSpPr>
         <p:grpSpPr>
           <a:xfrm>
-            <a:off x="1902675" y="2421657"/>
+            <a:off x="1835696" y="2335122"/>
             <a:ext cx="293061" cy="359271"/>
             <a:chOff x="1851922" y="1748433"/>
             <a:chExt cx="293061" cy="359271"/>
@@ -17056,7 +16913,7 @@
                   </a:solidFill>
                   <a:ea typeface="微軟正黑體" panose="020B0604030504040204" pitchFamily="34" charset="-120"/>
                 </a:rPr>
-                <a:t>Wi1</a:t>
+                <a:t>Wi</a:t>
               </a:r>
               <a:endParaRPr lang="en-US" altLang="zh-TW" sz="1200" b="1" baseline="-25000" dirty="0">
                 <a:solidFill>
@@ -17123,7 +16980,7 @@
         </p:nvGrpSpPr>
         <p:grpSpPr>
           <a:xfrm>
-            <a:off x="1902675" y="1913819"/>
+            <a:off x="1835696" y="1826838"/>
             <a:ext cx="293061" cy="358397"/>
             <a:chOff x="1851922" y="1748433"/>
             <a:chExt cx="293061" cy="358397"/>
@@ -17195,7 +17052,7 @@
                   </a:solidFill>
                   <a:ea typeface="微軟正黑體" panose="020B0604030504040204" pitchFamily="34" charset="-120"/>
                 </a:rPr>
-                <a:t>Wf1</a:t>
+                <a:t>Wf</a:t>
               </a:r>
               <a:endParaRPr lang="en-US" altLang="zh-TW" sz="1200" b="1" baseline="-25000" dirty="0">
                 <a:solidFill>
@@ -17262,10 +17119,10 @@
         </p:nvGrpSpPr>
         <p:grpSpPr>
           <a:xfrm>
-            <a:off x="3779912" y="2970623"/>
-            <a:ext cx="293061" cy="368796"/>
+            <a:off x="4062915" y="3940895"/>
+            <a:ext cx="293061" cy="361362"/>
             <a:chOff x="1842397" y="1748433"/>
-            <a:chExt cx="293061" cy="368796"/>
+            <a:chExt cx="293061" cy="361362"/>
           </a:xfrm>
         </p:grpSpPr>
         <p:sp>
@@ -17282,7 +17139,7 @@
           </p:nvSpPr>
           <p:spPr>
             <a:xfrm>
-              <a:off x="1851922" y="1842909"/>
+              <a:off x="1851922" y="1835475"/>
               <a:ext cx="274320" cy="274320"/>
             </a:xfrm>
             <a:prstGeom prst="rect">
@@ -17334,7 +17191,7 @@
                   </a:solidFill>
                   <a:ea typeface="微軟正黑體" panose="020B0604030504040204" pitchFamily="34" charset="-120"/>
                 </a:rPr>
-                <a:t>Uo1</a:t>
+                <a:t>Uo</a:t>
               </a:r>
               <a:endParaRPr lang="en-US" altLang="zh-TW" sz="1200" b="1" baseline="-25000" dirty="0">
                 <a:solidFill>
@@ -17401,7 +17258,7 @@
         </p:nvGrpSpPr>
         <p:grpSpPr>
           <a:xfrm>
-            <a:off x="4134923" y="2421657"/>
+            <a:off x="4062915" y="2325597"/>
             <a:ext cx="293061" cy="359271"/>
             <a:chOff x="1842397" y="1748433"/>
             <a:chExt cx="293061" cy="359271"/>
@@ -17473,7 +17330,7 @@
                   </a:solidFill>
                   <a:ea typeface="微軟正黑體" panose="020B0604030504040204" pitchFamily="34" charset="-120"/>
                 </a:rPr>
-                <a:t>Ui1</a:t>
+                <a:t>Ui</a:t>
               </a:r>
               <a:endParaRPr lang="en-US" altLang="zh-TW" sz="1200" b="1" baseline="-25000" dirty="0">
                 <a:solidFill>
@@ -17540,7 +17397,7 @@
         </p:nvGrpSpPr>
         <p:grpSpPr>
           <a:xfrm>
-            <a:off x="4134923" y="1916832"/>
+            <a:off x="4062915" y="1820326"/>
             <a:ext cx="293061" cy="359271"/>
             <a:chOff x="1842397" y="1748433"/>
             <a:chExt cx="293061" cy="359271"/>
@@ -17612,7 +17469,7 @@
                   </a:solidFill>
                   <a:ea typeface="微軟正黑體" panose="020B0604030504040204" pitchFamily="34" charset="-120"/>
                 </a:rPr>
-                <a:t>Uf1</a:t>
+                <a:t>Uf</a:t>
               </a:r>
               <a:endParaRPr lang="en-US" altLang="zh-TW" sz="1200" b="1" baseline="-25000" dirty="0">
                 <a:solidFill>
@@ -17665,54 +17522,6 @@
           </p:txBody>
         </p:sp>
       </p:grpSp>
-      <p:sp>
-        <p:nvSpPr>
-          <p:cNvPr id="128" name="文字方塊 127">
-            <a:extLst>
-              <a:ext uri="{FF2B5EF4-FFF2-40B4-BE49-F238E27FC236}">
-                <a16:creationId xmlns:a16="http://schemas.microsoft.com/office/drawing/2014/main" id="{8D43CAEA-40CF-2EDA-E037-73D30440A186}"/>
-              </a:ext>
-            </a:extLst>
-          </p:cNvPr>
-          <p:cNvSpPr txBox="1"/>
-          <p:nvPr/>
-        </p:nvSpPr>
-        <p:spPr>
-          <a:xfrm>
-            <a:off x="611560" y="2092206"/>
-            <a:ext cx="782767" cy="184666"/>
-          </a:xfrm>
-          <a:prstGeom prst="rect">
-            <a:avLst/>
-          </a:prstGeom>
-          <a:noFill/>
-        </p:spPr>
-        <p:txBody>
-          <a:bodyPr wrap="square" lIns="0" tIns="0" rIns="0" bIns="0" rtlCol="0" anchor="t">
-            <a:spAutoFit/>
-          </a:bodyPr>
-          <a:lstStyle/>
-          <a:p>
-            <a:r>
-              <a:rPr lang="en-US" altLang="zh-TW" sz="1200" dirty="0">
-                <a:latin typeface="ADLaM Display" panose="02010000000000000000" pitchFamily="2" charset="0"/>
-                <a:ea typeface="ADLaM Display" panose="02010000000000000000" pitchFamily="2" charset="0"/>
-                <a:cs typeface="ADLaM Display" panose="02010000000000000000" pitchFamily="2" charset="0"/>
-              </a:rPr>
-              <a:t>I</a:t>
-            </a:r>
-            <a:r>
-              <a:rPr lang="en-US" altLang="zh-TW" sz="1200" b="0" dirty="0">
-                <a:latin typeface="ADLaM Display" panose="02010000000000000000" pitchFamily="2" charset="0"/>
-                <a:ea typeface="ADLaM Display" panose="02010000000000000000" pitchFamily="2" charset="0"/>
-                <a:cs typeface="ADLaM Display" panose="02010000000000000000" pitchFamily="2" charset="0"/>
-              </a:rPr>
-              <a:t>nput x(t)</a:t>
-            </a:r>
-            <a:endParaRPr lang="zh-TW" altLang="en-US" sz="1200" dirty="0"/>
-          </a:p>
-        </p:txBody>
-      </p:sp>
       <p:grpSp>
         <p:nvGrpSpPr>
           <p:cNvPr id="129" name="群組 128">
@@ -17727,14 +17536,14 @@
         </p:nvGrpSpPr>
         <p:grpSpPr>
           <a:xfrm>
-            <a:off x="6000843" y="257220"/>
+            <a:off x="6386403" y="1501598"/>
             <a:ext cx="1781129" cy="353943"/>
             <a:chOff x="5916347" y="715731"/>
             <a:chExt cx="1781129" cy="353943"/>
           </a:xfrm>
         </p:grpSpPr>
-        <mc:AlternateContent xmlns:mc="http://schemas.openxmlformats.org/markup-compatibility/2006">
-          <mc:Choice xmlns:a14="http://schemas.microsoft.com/office/drawing/2010/main" Requires="a14">
+        <mc:AlternateContent xmlns:mc="http://schemas.openxmlformats.org/markup-compatibility/2006" xmlns:a14="http://schemas.microsoft.com/office/drawing/2010/main">
+          <mc:Choice Requires="a14">
             <p:sp>
               <p:nvSpPr>
                 <p:cNvPr id="130" name="文字方塊 129">
@@ -18008,7 +17817,7 @@
               </p:txBody>
             </p:sp>
           </mc:Choice>
-          <mc:Fallback>
+          <mc:Fallback xmlns="">
             <p:sp>
               <p:nvSpPr>
                 <p:cNvPr id="130" name="文字方塊 129">
@@ -18133,14 +17942,14 @@
         </p:nvGrpSpPr>
         <p:grpSpPr>
           <a:xfrm>
-            <a:off x="6000843" y="651862"/>
+            <a:off x="6386403" y="1942654"/>
             <a:ext cx="1768305" cy="351032"/>
             <a:chOff x="5916347" y="715731"/>
             <a:chExt cx="1768305" cy="351032"/>
           </a:xfrm>
         </p:grpSpPr>
-        <mc:AlternateContent xmlns:mc="http://schemas.openxmlformats.org/markup-compatibility/2006">
-          <mc:Choice xmlns:a14="http://schemas.microsoft.com/office/drawing/2010/main" Requires="a14">
+        <mc:AlternateContent xmlns:mc="http://schemas.openxmlformats.org/markup-compatibility/2006" xmlns:a14="http://schemas.microsoft.com/office/drawing/2010/main">
+          <mc:Choice Requires="a14">
             <p:sp>
               <p:nvSpPr>
                 <p:cNvPr id="133" name="文字方塊 132">
@@ -18222,7 +18031,7 @@
                         <m:d>
                           <m:dPr>
                             <m:ctrlPr>
-                              <a:rPr lang="en-US" altLang="zh-TW" sz="1200" b="0" i="1" smtClean="0">
+                              <a:rPr lang="en-US" altLang="zh-TW" sz="1200" i="1">
                                 <a:latin typeface="Cambria Math" panose="02040503050406030204" pitchFamily="18" charset="0"/>
                               </a:rPr>
                             </m:ctrlPr>
@@ -18411,7 +18220,7 @@
               </p:txBody>
             </p:sp>
           </mc:Choice>
-          <mc:Fallback>
+          <mc:Fallback xmlns="">
             <p:sp>
               <p:nvSpPr>
                 <p:cNvPr id="133" name="文字方塊 132">
@@ -18536,10 +18345,10 @@
         </p:nvGrpSpPr>
         <p:grpSpPr>
           <a:xfrm>
-            <a:off x="6000843" y="1431826"/>
-            <a:ext cx="2073901" cy="355919"/>
+            <a:off x="6386403" y="2348880"/>
+            <a:ext cx="2137355" cy="389474"/>
             <a:chOff x="5916347" y="715731"/>
-            <a:chExt cx="2073901" cy="355919"/>
+            <a:chExt cx="2155145" cy="389474"/>
           </a:xfrm>
         </p:grpSpPr>
         <mc:AlternateContent xmlns:mc="http://schemas.openxmlformats.org/markup-compatibility/2006">
@@ -18558,8 +18367,8 @@
               </p:nvSpPr>
               <p:spPr>
                 <a:xfrm>
-                  <a:off x="5916347" y="882496"/>
-                  <a:ext cx="2073901" cy="189154"/>
+                  <a:off x="6176614" y="920539"/>
+                  <a:ext cx="1894878" cy="184666"/>
                 </a:xfrm>
                 <a:prstGeom prst="rect">
                   <a:avLst/>
@@ -18579,49 +18388,6 @@
                         <m:jc m:val="left"/>
                       </m:oMathParaPr>
                       <m:oMath>
-                        <m:sSub>
-                          <m:sSubPr>
-                            <m:ctrlPr>
-                              <a:rPr lang="en-US" altLang="zh-TW" sz="1200" i="1">
-                                <a:latin typeface="Cambria Math" panose="02040503050406030204" pitchFamily="18" charset="0"/>
-                              </a:rPr>
-                            </m:ctrlPr>
-                          </m:sSubPr>
-                          <m:e>
-                            <m:acc>
-                              <m:accPr>
-                                <m:chr m:val="̃"/>
-                                <m:ctrlPr>
-                                  <a:rPr lang="en-US" altLang="zh-TW" sz="1200" i="1">
-                                    <a:latin typeface="Cambria Math" panose="02040503050406030204" pitchFamily="18" charset="0"/>
-                                  </a:rPr>
-                                </m:ctrlPr>
-                              </m:accPr>
-                              <m:e>
-                                <m:r>
-                                  <m:rPr>
-                                    <m:sty m:val="p"/>
-                                  </m:rPr>
-                                  <a:rPr lang="en-US" altLang="zh-TW" sz="1200" i="1">
-                                    <a:latin typeface="Cambria Math" panose="02040503050406030204" pitchFamily="18" charset="0"/>
-                                  </a:rPr>
-                                  <m:t>C</m:t>
-                                </m:r>
-                              </m:e>
-                            </m:acc>
-                          </m:e>
-                          <m:sub>
-                            <m:r>
-                              <m:rPr>
-                                <m:sty m:val="p"/>
-                              </m:rPr>
-                              <a:rPr lang="en-US" altLang="zh-TW" sz="1200" b="0" i="1" smtClean="0">
-                                <a:latin typeface="Cambria Math" panose="02040503050406030204" pitchFamily="18" charset="0"/>
-                              </a:rPr>
-                              <m:t>t</m:t>
-                            </m:r>
-                          </m:sub>
-                        </m:sSub>
                         <m:r>
                           <a:rPr lang="en-US" altLang="zh-TW" sz="1200" b="0" i="0" smtClean="0">
                             <a:latin typeface="Cambria Math" panose="02040503050406030204" pitchFamily="18" charset="0"/>
@@ -18846,8 +18612,8 @@
               </p:nvSpPr>
               <p:spPr>
                 <a:xfrm>
-                  <a:off x="5916347" y="882496"/>
-                  <a:ext cx="2073901" cy="189154"/>
+                  <a:off x="6176614" y="920539"/>
+                  <a:ext cx="1894878" cy="184666"/>
                 </a:xfrm>
                 <a:prstGeom prst="rect">
                   <a:avLst/>
@@ -18855,7 +18621,7 @@
                 <a:blipFill>
                   <a:blip r:embed="rId5"/>
                   <a:stretch>
-                    <a:fillRect l="-2639" t="-38710" b="-12903"/>
+                    <a:fillRect l="-1948" b="-13333"/>
                   </a:stretch>
                 </a:blipFill>
               </p:spPr>
@@ -18932,10 +18698,44 @@
                   <a:solidFill>
                     <a:schemeClr val="tx2"/>
                   </a:solidFill>
+                  <a:ea typeface="ADLaM Display" panose="02010000000000000000" pitchFamily="2" charset="0"/>
+                  <a:cs typeface="ADLaM Display" panose="02010000000000000000" pitchFamily="2" charset="0"/>
+                </a:rPr>
+                <a:t>C</a:t>
+              </a:r>
+              <a:r>
+                <a:rPr lang="en-US" altLang="zh-TW" sz="1200" b="1" dirty="0">
+                  <a:solidFill>
+                    <a:schemeClr val="tx2"/>
+                  </a:solidFill>
                   <a:ea typeface="微軟正黑體" panose="020B0604030504040204" pitchFamily="34" charset="-120"/>
                 </a:rPr>
-                <a:t>Candidate Cell State</a:t>
+                <a:t>andidate Cell Status</a:t>
               </a:r>
+            </a:p>
+            <a:p>
+              <a:pPr>
+                <a:lnSpc>
+                  <a:spcPts val="1600"/>
+                </a:lnSpc>
+              </a:pPr>
+              <a:r>
+                <a:rPr lang="en-US" altLang="zh-TW" sz="1200" dirty="0">
+                  <a:solidFill>
+                    <a:schemeClr val="tx1"/>
+                  </a:solidFill>
+                  <a:latin typeface="Calibri" panose="020F0502020204030204" pitchFamily="34" charset="0"/>
+                  <a:ea typeface="Calibri" panose="020F0502020204030204" pitchFamily="34" charset="0"/>
+                  <a:cs typeface="Calibri" panose="020F0502020204030204" pitchFamily="34" charset="0"/>
+                </a:rPr>
+                <a:t>€(t)</a:t>
+              </a:r>
+              <a:endParaRPr lang="en-US" altLang="zh-TW" sz="1200" dirty="0">
+                <a:solidFill>
+                  <a:schemeClr val="tx1"/>
+                </a:solidFill>
+                <a:ea typeface="微軟正黑體" panose="020B0604030504040204" pitchFamily="34" charset="-120"/>
+              </a:endParaRPr>
             </a:p>
           </p:txBody>
         </p:sp>
@@ -18954,10 +18754,10 @@
         </p:nvGrpSpPr>
         <p:grpSpPr>
           <a:xfrm>
-            <a:off x="6025401" y="2081637"/>
-            <a:ext cx="1511632" cy="362030"/>
+            <a:off x="6834999" y="2810296"/>
+            <a:ext cx="1532505" cy="402680"/>
             <a:chOff x="5916347" y="715731"/>
-            <a:chExt cx="1511632" cy="362030"/>
+            <a:chExt cx="1532505" cy="402680"/>
           </a:xfrm>
         </p:grpSpPr>
         <mc:AlternateContent xmlns:mc="http://schemas.openxmlformats.org/markup-compatibility/2006">
@@ -18976,8 +18776,8 @@
               </p:nvSpPr>
               <p:spPr>
                 <a:xfrm>
-                  <a:off x="5916347" y="888607"/>
-                  <a:ext cx="1511632" cy="189154"/>
+                  <a:off x="6193187" y="933745"/>
+                  <a:ext cx="1255665" cy="184666"/>
                 </a:xfrm>
                 <a:prstGeom prst="rect">
                   <a:avLst/>
@@ -18997,46 +18797,6 @@
                         <m:jc m:val="left"/>
                       </m:oMathParaPr>
                       <m:oMath>
-                        <m:sSub>
-                          <m:sSubPr>
-                            <m:ctrlPr>
-                              <a:rPr lang="en-US" altLang="zh-TW" sz="1200" b="0" i="1" smtClean="0">
-                                <a:latin typeface="Cambria Math" panose="02040503050406030204" pitchFamily="18" charset="0"/>
-                              </a:rPr>
-                            </m:ctrlPr>
-                          </m:sSubPr>
-                          <m:e>
-                            <m:r>
-                              <m:rPr>
-                                <m:sty m:val="p"/>
-                              </m:rPr>
-                              <a:rPr lang="en-US" altLang="zh-TW" sz="1200" b="0" i="1" smtClean="0">
-                                <a:latin typeface="Cambria Math" panose="02040503050406030204" pitchFamily="18" charset="0"/>
-                              </a:rPr>
-                              <m:t>C</m:t>
-                            </m:r>
-                            <m:r>
-                              <m:rPr>
-                                <m:sty m:val="p"/>
-                              </m:rPr>
-                              <a:rPr lang="en-US" altLang="zh-TW" sz="1200" b="0" i="1" smtClean="0">
-                                <a:latin typeface="Cambria Math" panose="02040503050406030204" pitchFamily="18" charset="0"/>
-                              </a:rPr>
-                              <m:t>S</m:t>
-                            </m:r>
-                          </m:e>
-                          <m:sub>
-                            <m:r>
-                              <m:rPr>
-                                <m:sty m:val="p"/>
-                              </m:rPr>
-                              <a:rPr lang="en-US" altLang="zh-TW" sz="1200" b="0" i="1" smtClean="0">
-                                <a:latin typeface="Cambria Math" panose="02040503050406030204" pitchFamily="18" charset="0"/>
-                              </a:rPr>
-                              <m:t>t</m:t>
-                            </m:r>
-                          </m:sub>
-                        </m:sSub>
                         <m:r>
                           <a:rPr lang="en-US" altLang="zh-TW" sz="1200" b="0" i="0" smtClean="0">
                             <a:latin typeface="Cambria Math" panose="02040503050406030204" pitchFamily="18" charset="0"/>
@@ -19083,7 +18843,7 @@
                         <m:sSub>
                           <m:sSubPr>
                             <m:ctrlPr>
-                              <a:rPr lang="en-US" altLang="zh-TW" sz="1200" i="1">
+                              <a:rPr lang="en-US" altLang="zh-TW" sz="1200" b="0" i="1" smtClean="0">
                                 <a:latin typeface="Cambria Math" panose="02040503050406030204" pitchFamily="18" charset="0"/>
                               </a:rPr>
                             </m:ctrlPr>
@@ -19093,7 +18853,7 @@
                               <m:rPr>
                                 <m:sty m:val="p"/>
                               </m:rPr>
-                              <a:rPr lang="en-US" altLang="zh-TW" sz="1200" i="1">
+                              <a:rPr lang="en-US" altLang="zh-TW" sz="1200" b="0" i="1" smtClean="0">
                                 <a:latin typeface="Cambria Math" panose="02040503050406030204" pitchFamily="18" charset="0"/>
                               </a:rPr>
                               <m:t>C</m:t>
@@ -19174,33 +18934,21 @@
                         <m:sSub>
                           <m:sSubPr>
                             <m:ctrlPr>
-                              <a:rPr lang="en-US" altLang="zh-TW" sz="1200" i="1">
+                              <a:rPr lang="en-US" altLang="zh-TW" sz="1200" b="0" i="1" smtClean="0">
                                 <a:latin typeface="Cambria Math" panose="02040503050406030204" pitchFamily="18" charset="0"/>
                               </a:rPr>
                             </m:ctrlPr>
                           </m:sSubPr>
                           <m:e>
-                            <m:acc>
-                              <m:accPr>
-                                <m:chr m:val="̃"/>
-                                <m:ctrlPr>
-                                  <a:rPr lang="en-US" altLang="zh-TW" sz="1200" i="1">
-                                    <a:latin typeface="Cambria Math" panose="02040503050406030204" pitchFamily="18" charset="0"/>
-                                  </a:rPr>
-                                </m:ctrlPr>
-                              </m:accPr>
-                              <m:e>
-                                <m:r>
-                                  <m:rPr>
-                                    <m:sty m:val="p"/>
-                                  </m:rPr>
-                                  <a:rPr lang="en-US" altLang="zh-TW" sz="1200" i="1">
-                                    <a:latin typeface="Cambria Math" panose="02040503050406030204" pitchFamily="18" charset="0"/>
-                                  </a:rPr>
-                                  <m:t>C</m:t>
-                                </m:r>
-                              </m:e>
-                            </m:acc>
+                            <m:r>
+                              <m:rPr>
+                                <m:sty m:val="p"/>
+                              </m:rPr>
+                              <a:rPr lang="en-US" altLang="zh-TW" sz="1200" b="0" i="1" smtClean="0">
+                                <a:latin typeface="Cambria Math" panose="02040503050406030204" pitchFamily="18" charset="0"/>
+                              </a:rPr>
+                              <m:t>C</m:t>
+                            </m:r>
                           </m:e>
                           <m:sub>
                             <m:r>
@@ -19239,8 +18987,8 @@
               </p:nvSpPr>
               <p:spPr>
                 <a:xfrm>
-                  <a:off x="5916347" y="888607"/>
-                  <a:ext cx="1511632" cy="189154"/>
+                  <a:off x="6193187" y="933745"/>
+                  <a:ext cx="1255665" cy="184666"/>
                 </a:xfrm>
                 <a:prstGeom prst="rect">
                   <a:avLst/>
@@ -19248,7 +18996,7 @@
                 <a:blipFill>
                   <a:blip r:embed="rId6"/>
                   <a:stretch>
-                    <a:fillRect l="-3629" t="-41935" r="-9274" b="-16129"/>
+                    <a:fillRect l="-2913" b="-16667"/>
                   </a:stretch>
                 </a:blipFill>
               </p:spPr>
@@ -19323,12 +19071,34 @@
               <a:r>
                 <a:rPr lang="en-US" altLang="zh-TW" sz="1200" b="1" dirty="0">
                   <a:solidFill>
-                    <a:schemeClr val="tx2"/>
+                    <a:schemeClr val="accent4"/>
                   </a:solidFill>
                   <a:ea typeface="微軟正黑體" panose="020B0604030504040204" pitchFamily="34" charset="-120"/>
                 </a:rPr>
-                <a:t>Cell State Update</a:t>
+                <a:t>Cell Status Update</a:t>
               </a:r>
+            </a:p>
+            <a:p>
+              <a:pPr>
+                <a:lnSpc>
+                  <a:spcPts val="1600"/>
+                </a:lnSpc>
+              </a:pPr>
+              <a:r>
+                <a:rPr lang="en-US" altLang="zh-TW" sz="1200" dirty="0">
+                  <a:solidFill>
+                    <a:schemeClr val="tx1"/>
+                  </a:solidFill>
+                  <a:ea typeface="微軟正黑體" panose="020B0604030504040204" pitchFamily="34" charset="-120"/>
+                </a:rPr>
+                <a:t>C(t) </a:t>
+              </a:r>
+              <a:endParaRPr lang="en-US" altLang="zh-TW" sz="1200" baseline="-25000" dirty="0">
+                <a:solidFill>
+                  <a:schemeClr val="tx1"/>
+                </a:solidFill>
+                <a:ea typeface="微軟正黑體" panose="020B0604030504040204" pitchFamily="34" charset="-120"/>
+              </a:endParaRPr>
             </a:p>
           </p:txBody>
         </p:sp>
@@ -19347,10 +19117,10 @@
         </p:nvGrpSpPr>
         <p:grpSpPr>
           <a:xfrm>
-            <a:off x="6000757" y="1042295"/>
-            <a:ext cx="2198935" cy="351431"/>
+            <a:off x="6386403" y="3645024"/>
+            <a:ext cx="1939826" cy="351431"/>
             <a:chOff x="5916347" y="715731"/>
-            <a:chExt cx="2198935" cy="351431"/>
+            <a:chExt cx="1939826" cy="351431"/>
           </a:xfrm>
         </p:grpSpPr>
         <mc:AlternateContent xmlns:mc="http://schemas.openxmlformats.org/markup-compatibility/2006">
@@ -19370,7 +19140,7 @@
               <p:spPr>
                 <a:xfrm>
                   <a:off x="5916347" y="882496"/>
-                  <a:ext cx="2198935" cy="184666"/>
+                  <a:ext cx="1939826" cy="184666"/>
                 </a:xfrm>
                 <a:prstGeom prst="rect">
                   <a:avLst/>
@@ -19428,19 +19198,20 @@
                           <m:t>=</m:t>
                         </m:r>
                         <m:r>
-                          <m:rPr>
-                            <m:sty m:val="p"/>
-                          </m:rPr>
-                          <a:rPr lang="en-US" altLang="zh-TW" sz="1200" b="0" i="0" smtClean="0">
+                          <a:rPr lang="zh-TW" altLang="en-US" sz="1200" i="1">
+                            <a:solidFill>
+                              <a:prstClr val="black"/>
+                            </a:solidFill>
                             <a:latin typeface="Cambria Math" panose="02040503050406030204" pitchFamily="18" charset="0"/>
                           </a:rPr>
-                          <m:t>tanh</m:t>
+                          <m:t>𝜎</m:t>
                         </m:r>
                         <m:d>
                           <m:dPr>
                             <m:ctrlPr>
                               <a:rPr lang="en-US" altLang="zh-TW" sz="1200" i="1">
                                 <a:latin typeface="Cambria Math" panose="02040503050406030204" pitchFamily="18" charset="0"/>
+                                <a:ea typeface="Cambria Math" panose="02040503050406030204" pitchFamily="18" charset="0"/>
                               </a:rPr>
                             </m:ctrlPr>
                           </m:dPr>
@@ -19448,8 +19219,9 @@
                             <m:sSub>
                               <m:sSubPr>
                                 <m:ctrlPr>
-                                  <a:rPr lang="en-US" altLang="zh-TW" sz="1200" i="1">
+                                  <a:rPr lang="en-US" altLang="zh-TW" sz="1200" b="0" i="1" smtClean="0">
                                     <a:latin typeface="Cambria Math" panose="02040503050406030204" pitchFamily="18" charset="0"/>
+                                    <a:ea typeface="Cambria Math" panose="02040503050406030204" pitchFamily="18" charset="0"/>
                                   </a:rPr>
                                 </m:ctrlPr>
                               </m:sSubPr>
@@ -19458,19 +19230,27 @@
                                   <m:rPr>
                                     <m:sty m:val="p"/>
                                   </m:rPr>
-                                  <a:rPr lang="en-US" altLang="zh-TW" sz="1200" i="1">
+                                  <a:rPr lang="en-US" altLang="zh-TW" sz="1200" b="0" i="1" smtClean="0">
                                     <a:latin typeface="Cambria Math" panose="02040503050406030204" pitchFamily="18" charset="0"/>
+                                    <a:ea typeface="Cambria Math" panose="02040503050406030204" pitchFamily="18" charset="0"/>
                                   </a:rPr>
                                   <m:t>x</m:t>
                                 </m:r>
                               </m:e>
                               <m:sub>
                                 <m:r>
+                                  <a:rPr lang="zh-TW" altLang="en-US" sz="1200" i="1">
+                                    <a:latin typeface="Cambria Math" panose="02040503050406030204" pitchFamily="18" charset="0"/>
+                                  </a:rPr>
+                                  <m:t> </m:t>
+                                </m:r>
+                                <m:r>
                                   <m:rPr>
                                     <m:sty m:val="p"/>
                                   </m:rPr>
                                   <a:rPr lang="en-US" altLang="zh-TW" sz="1200" i="1">
                                     <a:latin typeface="Cambria Math" panose="02040503050406030204" pitchFamily="18" charset="0"/>
+                                    <a:ea typeface="Cambria Math" panose="02040503050406030204" pitchFamily="18" charset="0"/>
                                   </a:rPr>
                                   <m:t>t</m:t>
                                 </m:r>
@@ -19481,6 +19261,7 @@
                                 <m:ctrlPr>
                                   <a:rPr lang="en-US" altLang="zh-TW" sz="1200" b="0" i="1" smtClean="0">
                                     <a:latin typeface="Cambria Math" panose="02040503050406030204" pitchFamily="18" charset="0"/>
+                                    <a:ea typeface="Cambria Math" panose="02040503050406030204" pitchFamily="18" charset="0"/>
                                   </a:rPr>
                                 </m:ctrlPr>
                               </m:sSubPr>
@@ -19491,6 +19272,7 @@
                                   </m:rPr>
                                   <a:rPr lang="en-US" altLang="zh-TW" sz="1200" b="0" i="1" smtClean="0">
                                     <a:latin typeface="Cambria Math" panose="02040503050406030204" pitchFamily="18" charset="0"/>
+                                    <a:ea typeface="Cambria Math" panose="02040503050406030204" pitchFamily="18" charset="0"/>
                                   </a:rPr>
                                   <m:t>W</m:t>
                                 </m:r>
@@ -19502,14 +19284,16 @@
                                   </m:rPr>
                                   <a:rPr lang="en-US" altLang="zh-TW" sz="1200" b="0" i="1" smtClean="0">
                                     <a:latin typeface="Cambria Math" panose="02040503050406030204" pitchFamily="18" charset="0"/>
+                                    <a:ea typeface="Cambria Math" panose="02040503050406030204" pitchFamily="18" charset="0"/>
                                   </a:rPr>
-                                  <m:t>h</m:t>
+                                  <m:t>o</m:t>
                                 </m:r>
                               </m:sub>
                             </m:sSub>
                             <m:r>
                               <a:rPr lang="en-US" altLang="zh-TW" sz="1200" b="0" i="1" smtClean="0">
                                 <a:latin typeface="Cambria Math" panose="02040503050406030204" pitchFamily="18" charset="0"/>
+                                <a:ea typeface="Cambria Math" panose="02040503050406030204" pitchFamily="18" charset="0"/>
                               </a:rPr>
                               <m:t>+</m:t>
                             </m:r>
@@ -19518,6 +19302,7 @@
                                 <m:ctrlPr>
                                   <a:rPr lang="en-US" altLang="zh-TW" sz="1200" b="0" i="1" smtClean="0">
                                     <a:latin typeface="Cambria Math" panose="02040503050406030204" pitchFamily="18" charset="0"/>
+                                    <a:ea typeface="Cambria Math" panose="02040503050406030204" pitchFamily="18" charset="0"/>
                                   </a:rPr>
                                 </m:ctrlPr>
                               </m:sSubPr>
@@ -19528,6 +19313,7 @@
                                   </m:rPr>
                                   <a:rPr lang="en-US" altLang="zh-TW" sz="1200" b="0" i="1" smtClean="0">
                                     <a:latin typeface="Cambria Math" panose="02040503050406030204" pitchFamily="18" charset="0"/>
+                                    <a:ea typeface="Cambria Math" panose="02040503050406030204" pitchFamily="18" charset="0"/>
                                   </a:rPr>
                                   <m:t>h</m:t>
                                 </m:r>
@@ -19539,12 +19325,14 @@
                                   </m:rPr>
                                   <a:rPr lang="en-US" altLang="zh-TW" sz="1200" i="1">
                                     <a:latin typeface="Cambria Math" panose="02040503050406030204" pitchFamily="18" charset="0"/>
+                                    <a:ea typeface="Cambria Math" panose="02040503050406030204" pitchFamily="18" charset="0"/>
                                   </a:rPr>
                                   <m:t>t</m:t>
                                 </m:r>
                                 <m:r>
                                   <a:rPr lang="en-US" altLang="zh-TW" sz="1200" b="0" i="1" smtClean="0">
                                     <a:latin typeface="Cambria Math" panose="02040503050406030204" pitchFamily="18" charset="0"/>
+                                    <a:ea typeface="Cambria Math" panose="02040503050406030204" pitchFamily="18" charset="0"/>
                                   </a:rPr>
                                   <m:t>−1</m:t>
                                 </m:r>
@@ -19555,6 +19343,7 @@
                                 <m:ctrlPr>
                                   <a:rPr lang="en-US" altLang="zh-TW" sz="1200" i="1">
                                     <a:latin typeface="Cambria Math" panose="02040503050406030204" pitchFamily="18" charset="0"/>
+                                    <a:ea typeface="Cambria Math" panose="02040503050406030204" pitchFamily="18" charset="0"/>
                                   </a:rPr>
                                 </m:ctrlPr>
                               </m:sSubPr>
@@ -19565,6 +19354,7 @@
                                   </m:rPr>
                                   <a:rPr lang="en-US" altLang="zh-TW" sz="1200" i="1">
                                     <a:latin typeface="Cambria Math" panose="02040503050406030204" pitchFamily="18" charset="0"/>
+                                    <a:ea typeface="Cambria Math" panose="02040503050406030204" pitchFamily="18" charset="0"/>
                                   </a:rPr>
                                   <m:t>U</m:t>
                                 </m:r>
@@ -19576,6 +19366,7 @@
                                   </m:rPr>
                                   <a:rPr lang="en-US" altLang="zh-TW" sz="1200" b="0" i="1" smtClean="0">
                                     <a:latin typeface="Cambria Math" panose="02040503050406030204" pitchFamily="18" charset="0"/>
+                                    <a:ea typeface="Cambria Math" panose="02040503050406030204" pitchFamily="18" charset="0"/>
                                   </a:rPr>
                                   <m:t>o</m:t>
                                 </m:r>
@@ -19584,6 +19375,7 @@
                             <m:r>
                               <a:rPr lang="en-US" altLang="zh-TW" sz="1200" b="0" i="1" smtClean="0">
                                 <a:latin typeface="Cambria Math" panose="02040503050406030204" pitchFamily="18" charset="0"/>
+                                <a:ea typeface="Cambria Math" panose="02040503050406030204" pitchFamily="18" charset="0"/>
                               </a:rPr>
                               <m:t>+</m:t>
                             </m:r>
@@ -19592,6 +19384,7 @@
                                 <m:ctrlPr>
                                   <a:rPr lang="en-US" altLang="zh-TW" sz="1200" b="0" i="1" smtClean="0">
                                     <a:latin typeface="Cambria Math" panose="02040503050406030204" pitchFamily="18" charset="0"/>
+                                    <a:ea typeface="Cambria Math" panose="02040503050406030204" pitchFamily="18" charset="0"/>
                                   </a:rPr>
                                 </m:ctrlPr>
                               </m:sSubPr>
@@ -19602,6 +19395,7 @@
                                   </m:rPr>
                                   <a:rPr lang="en-US" altLang="zh-TW" sz="1200" b="0" i="1" smtClean="0">
                                     <a:latin typeface="Cambria Math" panose="02040503050406030204" pitchFamily="18" charset="0"/>
+                                    <a:ea typeface="Cambria Math" panose="02040503050406030204" pitchFamily="18" charset="0"/>
                                   </a:rPr>
                                   <m:t>b</m:t>
                                 </m:r>
@@ -19611,10 +19405,11 @@
                                   <m:rPr>
                                     <m:sty m:val="p"/>
                                   </m:rPr>
-                                  <a:rPr lang="en-US" altLang="zh-TW" sz="1200" i="1">
+                                  <a:rPr lang="en-US" altLang="zh-TW" sz="1200" b="0" i="1" smtClean="0">
                                     <a:latin typeface="Cambria Math" panose="02040503050406030204" pitchFamily="18" charset="0"/>
+                                    <a:ea typeface="Cambria Math" panose="02040503050406030204" pitchFamily="18" charset="0"/>
                                   </a:rPr>
-                                  <m:t>h</m:t>
+                                  <m:t>o</m:t>
                                 </m:r>
                               </m:sub>
                             </m:sSub>
@@ -19623,7 +19418,9 @@
                       </m:oMath>
                     </m:oMathPara>
                   </a14:m>
-                  <a:endParaRPr lang="zh-TW" altLang="en-US" sz="1200" dirty="0"/>
+                  <a:endParaRPr lang="zh-TW" altLang="en-US" sz="1200" dirty="0">
+                    <a:latin typeface="Cambria Math" panose="02040503050406030204" pitchFamily="18" charset="0"/>
+                  </a:endParaRPr>
                 </a:p>
               </p:txBody>
             </p:sp>
@@ -19646,7 +19443,7 @@
               <p:spPr>
                 <a:xfrm>
                   <a:off x="5916347" y="882496"/>
-                  <a:ext cx="2198935" cy="184666"/>
+                  <a:ext cx="1939826" cy="184666"/>
                 </a:xfrm>
                 <a:prstGeom prst="rect">
                   <a:avLst/>
@@ -19654,7 +19451,7 @@
                 <a:blipFill>
                   <a:blip r:embed="rId7"/>
                   <a:stretch>
-                    <a:fillRect l="-2493" b="-12903"/>
+                    <a:fillRect l="-2830" b="-12903"/>
                   </a:stretch>
                 </a:blipFill>
               </p:spPr>
@@ -19753,10 +19550,10 @@
         </p:nvGrpSpPr>
         <p:grpSpPr>
           <a:xfrm>
-            <a:off x="6040778" y="2492896"/>
-            <a:ext cx="1339534" cy="357542"/>
+            <a:off x="6844524" y="4033946"/>
+            <a:ext cx="1490319" cy="445282"/>
             <a:chOff x="5916347" y="715731"/>
-            <a:chExt cx="1339534" cy="357542"/>
+            <a:chExt cx="1490319" cy="402156"/>
           </a:xfrm>
         </p:grpSpPr>
         <mc:AlternateContent xmlns:mc="http://schemas.openxmlformats.org/markup-compatibility/2006">
@@ -19775,8 +19572,8 @@
               </p:nvSpPr>
               <p:spPr>
                 <a:xfrm>
-                  <a:off x="5916347" y="888607"/>
-                  <a:ext cx="1295291" cy="184666"/>
+                  <a:off x="6168570" y="933221"/>
+                  <a:ext cx="1238096" cy="184666"/>
                 </a:xfrm>
                 <a:prstGeom prst="rect">
                   <a:avLst/>
@@ -19796,39 +19593,8 @@
                         <m:jc m:val="left"/>
                       </m:oMathParaPr>
                       <m:oMath>
-                        <m:sSub>
-                          <m:sSubPr>
-                            <m:ctrlPr>
-                              <a:rPr lang="en-US" altLang="zh-TW" sz="1200" b="0" i="1" smtClean="0">
-                                <a:latin typeface="Cambria Math" panose="02040503050406030204" pitchFamily="18" charset="0"/>
-                              </a:rPr>
-                            </m:ctrlPr>
-                          </m:sSubPr>
-                          <m:e>
-                            <m:r>
-                              <m:rPr>
-                                <m:sty m:val="p"/>
-                              </m:rPr>
-                              <a:rPr lang="en-US" altLang="zh-TW" sz="1200" b="0" i="1" smtClean="0">
-                                <a:latin typeface="Cambria Math" panose="02040503050406030204" pitchFamily="18" charset="0"/>
-                              </a:rPr>
-                              <m:t>h</m:t>
-                            </m:r>
-                          </m:e>
-                          <m:sub>
-                            <m:r>
-                              <m:rPr>
-                                <m:sty m:val="p"/>
-                              </m:rPr>
-                              <a:rPr lang="en-US" altLang="zh-TW" sz="1200" b="0" i="1" smtClean="0">
-                                <a:latin typeface="Cambria Math" panose="02040503050406030204" pitchFamily="18" charset="0"/>
-                              </a:rPr>
-                              <m:t>t</m:t>
-                            </m:r>
-                          </m:sub>
-                        </m:sSub>
                         <m:r>
-                          <a:rPr lang="en-US" altLang="zh-TW" sz="1200" b="0" i="0" smtClean="0">
+                          <a:rPr lang="en-US" altLang="zh-TW" sz="1200" b="0" i="1" smtClean="0">
                             <a:latin typeface="Cambria Math" panose="02040503050406030204" pitchFamily="18" charset="0"/>
                           </a:rPr>
                           <m:t>=</m:t>
@@ -19889,46 +19655,42 @@
                             </m:ctrlPr>
                           </m:dPr>
                           <m:e>
-                            <m:sSub>
-                              <m:sSubPr>
-                                <m:ctrlPr>
-                                  <a:rPr lang="en-US" altLang="zh-TW" sz="1200" b="0" i="1" smtClean="0">
-                                    <a:latin typeface="Cambria Math" panose="02040503050406030204" pitchFamily="18" charset="0"/>
-                                  </a:rPr>
-                                </m:ctrlPr>
-                              </m:sSubPr>
-                              <m:e>
-                                <m:r>
-                                  <m:rPr>
-                                    <m:sty m:val="p"/>
-                                  </m:rPr>
-                                  <a:rPr lang="en-US" altLang="zh-TW" sz="1200" b="0" i="1" smtClean="0">
-                                    <a:latin typeface="Cambria Math" panose="02040503050406030204" pitchFamily="18" charset="0"/>
-                                  </a:rPr>
-                                  <m:t>C</m:t>
-                                </m:r>
-                                <m:r>
-                                  <m:rPr>
-                                    <m:sty m:val="p"/>
-                                  </m:rPr>
-                                  <a:rPr lang="en-US" altLang="zh-TW" sz="1200" b="0" i="1" smtClean="0">
-                                    <a:latin typeface="Cambria Math" panose="02040503050406030204" pitchFamily="18" charset="0"/>
-                                  </a:rPr>
-                                  <m:t>S</m:t>
-                                </m:r>
-                              </m:e>
-                              <m:sub>
-                                <m:r>
-                                  <m:rPr>
-                                    <m:sty m:val="p"/>
-                                  </m:rPr>
-                                  <a:rPr lang="en-US" altLang="zh-TW" sz="1200" b="0" i="1" smtClean="0">
-                                    <a:latin typeface="Cambria Math" panose="02040503050406030204" pitchFamily="18" charset="0"/>
-                                  </a:rPr>
-                                  <m:t>t</m:t>
-                                </m:r>
-                              </m:sub>
-                            </m:sSub>
+                            <m:r>
+                              <a:rPr lang="en-US" altLang="zh-TW" sz="1200" b="0" i="1" smtClean="0">
+                                <a:latin typeface="Cambria Math" panose="02040503050406030204" pitchFamily="18" charset="0"/>
+                              </a:rPr>
+                              <m:t> </m:t>
+                            </m:r>
+                            <m:r>
+                              <m:rPr>
+                                <m:sty m:val="p"/>
+                              </m:rPr>
+                              <a:rPr lang="en-US" altLang="zh-TW" sz="1200" b="0" i="1" smtClean="0">
+                                <a:latin typeface="Cambria Math" panose="02040503050406030204" pitchFamily="18" charset="0"/>
+                              </a:rPr>
+                              <m:t>C</m:t>
+                            </m:r>
+                            <m:r>
+                              <a:rPr lang="en-US" altLang="zh-TW" sz="1200" b="0" i="1" smtClean="0">
+                                <a:latin typeface="Cambria Math" panose="02040503050406030204" pitchFamily="18" charset="0"/>
+                              </a:rPr>
+                              <m:t>(</m:t>
+                            </m:r>
+                            <m:r>
+                              <m:rPr>
+                                <m:sty m:val="p"/>
+                              </m:rPr>
+                              <a:rPr lang="en-US" altLang="zh-TW" sz="1200" b="0" i="1" smtClean="0">
+                                <a:latin typeface="Cambria Math" panose="02040503050406030204" pitchFamily="18" charset="0"/>
+                              </a:rPr>
+                              <m:t>t</m:t>
+                            </m:r>
+                            <m:r>
+                              <a:rPr lang="en-US" altLang="zh-TW" sz="1200" b="0" i="1" smtClean="0">
+                                <a:latin typeface="Cambria Math" panose="02040503050406030204" pitchFamily="18" charset="0"/>
+                              </a:rPr>
+                              <m:t>) </m:t>
+                            </m:r>
                           </m:e>
                         </m:d>
                       </m:oMath>
@@ -19956,8 +19718,8 @@
               </p:nvSpPr>
               <p:spPr>
                 <a:xfrm>
-                  <a:off x="5916347" y="888607"/>
-                  <a:ext cx="1295291" cy="184666"/>
+                  <a:off x="6168570" y="933221"/>
+                  <a:ext cx="1238096" cy="184666"/>
                 </a:xfrm>
                 <a:prstGeom prst="rect">
                   <a:avLst/>
@@ -19965,7 +19727,7 @@
                 <a:blipFill>
                   <a:blip r:embed="rId8"/>
                   <a:stretch>
-                    <a:fillRect l="-4717" b="-12903"/>
+                    <a:fillRect l="-2956" t="-2941" b="-23529"/>
                   </a:stretch>
                 </a:blipFill>
               </p:spPr>
@@ -20040,11 +19802,27 @@
               <a:r>
                 <a:rPr lang="en-US" altLang="zh-TW" sz="1200" b="1" dirty="0">
                   <a:solidFill>
-                    <a:schemeClr val="tx2"/>
+                    <a:schemeClr val="accent4"/>
                   </a:solidFill>
                   <a:ea typeface="微軟正黑體" panose="020B0604030504040204" pitchFamily="34" charset="-120"/>
                 </a:rPr>
                 <a:t>Hidden State</a:t>
+              </a:r>
+            </a:p>
+            <a:p>
+              <a:pPr>
+                <a:lnSpc>
+                  <a:spcPts val="1600"/>
+                </a:lnSpc>
+              </a:pPr>
+              <a:r>
+                <a:rPr lang="en-US" altLang="zh-TW" sz="1200" dirty="0">
+                  <a:solidFill>
+                    <a:schemeClr val="tx1"/>
+                  </a:solidFill>
+                  <a:ea typeface="微軟正黑體" panose="020B0604030504040204" pitchFamily="34" charset="-120"/>
+                </a:rPr>
+                <a:t>h(t)</a:t>
               </a:r>
             </a:p>
           </p:txBody>
@@ -20068,8 +19846,8 @@
         </p:nvCxnSpPr>
         <p:spPr>
           <a:xfrm rot="10800000">
-            <a:off x="4418768" y="2643769"/>
-            <a:ext cx="820678" cy="1187793"/>
+            <a:off x="4346760" y="2547708"/>
+            <a:ext cx="441264" cy="919962"/>
           </a:xfrm>
           <a:prstGeom prst="bentConnector3">
             <a:avLst>
@@ -20117,8 +19895,8 @@
         </p:nvCxnSpPr>
         <p:spPr>
           <a:xfrm rot="10800000">
-            <a:off x="4418768" y="2138943"/>
-            <a:ext cx="820678" cy="1692618"/>
+            <a:off x="4346760" y="2042438"/>
+            <a:ext cx="441264" cy="1425233"/>
           </a:xfrm>
           <a:prstGeom prst="bentConnector3">
             <a:avLst>
@@ -20165,9 +19943,9 @@
           <p:nvPr/>
         </p:nvCxnSpPr>
         <p:spPr>
-          <a:xfrm rot="10800000">
-            <a:off x="4063758" y="3202259"/>
-            <a:ext cx="1175689" cy="629302"/>
+          <a:xfrm rot="10800000" flipV="1">
+            <a:off x="4346760" y="3467669"/>
+            <a:ext cx="441264" cy="697427"/>
           </a:xfrm>
           <a:prstGeom prst="bentConnector3">
             <a:avLst>
@@ -20211,7 +19989,7 @@
         </p:nvSpPr>
         <p:spPr>
           <a:xfrm>
-            <a:off x="5229830" y="4857090"/>
+            <a:off x="6624392" y="6105578"/>
             <a:ext cx="484682" cy="302600"/>
           </a:xfrm>
           <a:prstGeom prst="rect">
@@ -20276,220 +20054,6 @@
           </a:p>
         </p:txBody>
       </p:sp>
-      <p:sp>
-        <p:nvSpPr>
-          <p:cNvPr id="161" name="矩形 160">
-            <a:extLst>
-              <a:ext uri="{FF2B5EF4-FFF2-40B4-BE49-F238E27FC236}">
-                <a16:creationId xmlns:a16="http://schemas.microsoft.com/office/drawing/2014/main" id="{7534D29D-AAD4-DD29-848B-7182801E1441}"/>
-              </a:ext>
-            </a:extLst>
-          </p:cNvPr>
-          <p:cNvSpPr/>
-          <p:nvPr/>
-        </p:nvSpPr>
-        <p:spPr>
-          <a:xfrm>
-            <a:off x="3647218" y="5148501"/>
-            <a:ext cx="754910" cy="249729"/>
-          </a:xfrm>
-          <a:prstGeom prst="rect">
-            <a:avLst/>
-          </a:prstGeom>
-          <a:solidFill>
-            <a:schemeClr val="bg1">
-              <a:alpha val="60000"/>
-            </a:schemeClr>
-          </a:solidFill>
-          <a:ln w="19050">
-            <a:noFill/>
-            <a:prstDash val="sysDot"/>
-            <a:extLst>
-              <a:ext uri="{C807C97D-BFC1-408E-A445-0C87EB9F89A2}">
-                <ask:lineSketchStyleProps xmlns:ask="http://schemas.microsoft.com/office/drawing/2018/sketchyshapes">
-                  <ask:type>
-                    <ask:lineSketchNone/>
-                  </ask:type>
-                </ask:lineSketchStyleProps>
-              </a:ext>
-            </a:extLst>
-          </a:ln>
-        </p:spPr>
-        <p:style>
-          <a:lnRef idx="2">
-            <a:schemeClr val="accent1">
-              <a:shade val="15000"/>
-            </a:schemeClr>
-          </a:lnRef>
-          <a:fillRef idx="1">
-            <a:schemeClr val="accent1"/>
-          </a:fillRef>
-          <a:effectRef idx="0">
-            <a:schemeClr val="accent1"/>
-          </a:effectRef>
-          <a:fontRef idx="minor">
-            <a:schemeClr val="lt1"/>
-          </a:fontRef>
-        </p:style>
-        <p:txBody>
-          <a:bodyPr wrap="none" lIns="0" tIns="0" rIns="0" bIns="0" rtlCol="0" anchor="ctr" anchorCtr="1"/>
-          <a:lstStyle/>
-          <a:p>
-            <a:pPr lvl="0" algn="ctr"/>
-            <a:r>
-              <a:rPr lang="zh-TW" altLang="en-US" sz="1200" b="1" dirty="0">
-                <a:solidFill>
-                  <a:schemeClr val="accent4"/>
-                </a:solidFill>
-              </a:rPr>
-              <a:t> </a:t>
-            </a:r>
-            <a:r>
-              <a:rPr lang="zh-TW" altLang="zh-TW" sz="1200" b="1" dirty="0">
-                <a:solidFill>
-                  <a:schemeClr val="accent4"/>
-                </a:solidFill>
-              </a:rPr>
-              <a:t>➔</a:t>
-            </a:r>
-            <a:r>
-              <a:rPr lang="en-US" altLang="zh-TW" sz="1200" b="1" dirty="0">
-                <a:solidFill>
-                  <a:schemeClr val="accent4"/>
-                </a:solidFill>
-              </a:rPr>
-              <a:t> </a:t>
-            </a:r>
-            <a:r>
-              <a:rPr lang="el-GR" altLang="zh-TW" b="1" dirty="0">
-                <a:solidFill>
-                  <a:schemeClr val="accent4"/>
-                </a:solidFill>
-                <a:cs typeface="Calibri" panose="020F0502020204030204" pitchFamily="34" charset="0"/>
-              </a:rPr>
-              <a:t>σ</a:t>
-            </a:r>
-            <a:r>
-              <a:rPr lang="en-US" altLang="zh-TW" b="1" dirty="0">
-                <a:solidFill>
-                  <a:schemeClr val="accent4"/>
-                </a:solidFill>
-                <a:cs typeface="Calibri" panose="020F0502020204030204" pitchFamily="34" charset="0"/>
-              </a:rPr>
-              <a:t> </a:t>
-            </a:r>
-            <a:r>
-              <a:rPr lang="en-US" altLang="zh-TW" sz="1200" b="1" dirty="0">
-                <a:solidFill>
-                  <a:schemeClr val="accent4"/>
-                </a:solidFill>
-                <a:cs typeface="Calibri" panose="020F0502020204030204" pitchFamily="34" charset="0"/>
-              </a:rPr>
-              <a:t>=</a:t>
-            </a:r>
-            <a:r>
-              <a:rPr lang="zh-TW" altLang="en-US" sz="1200" b="1" dirty="0">
-                <a:solidFill>
-                  <a:schemeClr val="accent4"/>
-                </a:solidFill>
-                <a:cs typeface="Calibri" panose="020F0502020204030204" pitchFamily="34" charset="0"/>
-              </a:rPr>
-              <a:t> </a:t>
-            </a:r>
-            <a:r>
-              <a:rPr lang="en-US" altLang="zh-TW" sz="1200" b="1" dirty="0">
-                <a:solidFill>
-                  <a:schemeClr val="accent4"/>
-                </a:solidFill>
-                <a:cs typeface="Calibri" panose="020F0502020204030204" pitchFamily="34" charset="0"/>
-              </a:rPr>
-              <a:t>h1(4)</a:t>
-            </a:r>
-            <a:endParaRPr lang="en-US" altLang="zh-TW" sz="1200" b="1" baseline="-25000" dirty="0">
-              <a:solidFill>
-                <a:schemeClr val="accent4"/>
-              </a:solidFill>
-            </a:endParaRPr>
-          </a:p>
-        </p:txBody>
-      </p:sp>
-      <p:sp>
-        <p:nvSpPr>
-          <p:cNvPr id="163" name="矩形 162">
-            <a:extLst>
-              <a:ext uri="{FF2B5EF4-FFF2-40B4-BE49-F238E27FC236}">
-                <a16:creationId xmlns:a16="http://schemas.microsoft.com/office/drawing/2014/main" id="{0B8B1C45-9CD3-D4C2-FCB8-ACA0949D5C0B}"/>
-              </a:ext>
-            </a:extLst>
-          </p:cNvPr>
-          <p:cNvSpPr/>
-          <p:nvPr/>
-        </p:nvSpPr>
-        <p:spPr>
-          <a:xfrm>
-            <a:off x="3288387" y="3533067"/>
-            <a:ext cx="438267" cy="192822"/>
-          </a:xfrm>
-          <a:prstGeom prst="rect">
-            <a:avLst/>
-          </a:prstGeom>
-          <a:solidFill>
-            <a:schemeClr val="bg1">
-              <a:alpha val="60000"/>
-            </a:schemeClr>
-          </a:solidFill>
-          <a:ln w="19050">
-            <a:noFill/>
-            <a:prstDash val="sysDot"/>
-            <a:extLst>
-              <a:ext uri="{C807C97D-BFC1-408E-A445-0C87EB9F89A2}">
-                <ask:lineSketchStyleProps xmlns:ask="http://schemas.microsoft.com/office/drawing/2018/sketchyshapes">
-                  <ask:type>
-                    <ask:lineSketchNone/>
-                  </ask:type>
-                </ask:lineSketchStyleProps>
-              </a:ext>
-            </a:extLst>
-          </a:ln>
-        </p:spPr>
-        <p:style>
-          <a:lnRef idx="2">
-            <a:schemeClr val="accent1">
-              <a:shade val="15000"/>
-            </a:schemeClr>
-          </a:lnRef>
-          <a:fillRef idx="1">
-            <a:schemeClr val="accent1"/>
-          </a:fillRef>
-          <a:effectRef idx="0">
-            <a:schemeClr val="accent1"/>
-          </a:effectRef>
-          <a:fontRef idx="minor">
-            <a:schemeClr val="lt1"/>
-          </a:fontRef>
-        </p:style>
-        <p:txBody>
-          <a:bodyPr wrap="none" lIns="0" tIns="0" rIns="0" bIns="0" rtlCol="0" anchor="ctr" anchorCtr="1"/>
-          <a:lstStyle/>
-          <a:p>
-            <a:pPr lvl="0" algn="ctr"/>
-            <a:r>
-              <a:rPr lang="en-US" altLang="zh-TW" sz="1200" b="1" dirty="0">
-                <a:solidFill>
-                  <a:schemeClr val="tx2"/>
-                </a:solidFill>
-                <a:cs typeface="Calibri" panose="020F0502020204030204" pitchFamily="34" charset="0"/>
-              </a:rPr>
-              <a:t>tanh</a:t>
-            </a:r>
-            <a:endParaRPr lang="en-US" altLang="zh-TW" sz="1200" b="1" baseline="-25000" dirty="0">
-              <a:solidFill>
-                <a:schemeClr val="tx2"/>
-              </a:solidFill>
-            </a:endParaRPr>
-          </a:p>
-        </p:txBody>
-      </p:sp>
       <p:cxnSp>
         <p:nvCxnSpPr>
           <p:cNvPr id="164" name="直線單箭頭接點 163">
@@ -20501,14 +20065,12 @@
           </p:cNvPr>
           <p:cNvCxnSpPr>
             <a:cxnSpLocks/>
-            <a:stCxn id="122" idx="1"/>
-            <a:endCxn id="181" idx="3"/>
           </p:cNvCxnSpPr>
           <p:nvPr/>
         </p:nvCxnSpPr>
         <p:spPr>
           <a:xfrm flipH="1" flipV="1">
-            <a:off x="3256640" y="2643258"/>
+            <a:off x="1775256" y="6260765"/>
             <a:ext cx="887808" cy="510"/>
           </a:xfrm>
           <a:prstGeom prst="straightConnector1">
@@ -20539,299 +20101,6 @@
       </p:cxnSp>
       <p:sp>
         <p:nvSpPr>
-          <p:cNvPr id="173" name="矩形 172">
-            <a:extLst>
-              <a:ext uri="{FF2B5EF4-FFF2-40B4-BE49-F238E27FC236}">
-                <a16:creationId xmlns:a16="http://schemas.microsoft.com/office/drawing/2014/main" id="{97DCFD38-F72A-D670-18E9-C3CABE022EB4}"/>
-              </a:ext>
-            </a:extLst>
-          </p:cNvPr>
-          <p:cNvSpPr/>
-          <p:nvPr/>
-        </p:nvSpPr>
-        <p:spPr>
-          <a:xfrm>
-            <a:off x="3498364" y="2463807"/>
-            <a:ext cx="196994" cy="173105"/>
-          </a:xfrm>
-          <a:prstGeom prst="rect">
-            <a:avLst/>
-          </a:prstGeom>
-          <a:solidFill>
-            <a:schemeClr val="bg1">
-              <a:alpha val="60000"/>
-            </a:schemeClr>
-          </a:solidFill>
-          <a:ln w="19050">
-            <a:noFill/>
-            <a:prstDash val="sysDot"/>
-            <a:extLst>
-              <a:ext uri="{C807C97D-BFC1-408E-A445-0C87EB9F89A2}">
-                <ask:lineSketchStyleProps xmlns:ask="http://schemas.microsoft.com/office/drawing/2018/sketchyshapes">
-                  <ask:type>
-                    <ask:lineSketchNone/>
-                  </ask:type>
-                </ask:lineSketchStyleProps>
-              </a:ext>
-            </a:extLst>
-          </a:ln>
-        </p:spPr>
-        <p:style>
-          <a:lnRef idx="2">
-            <a:schemeClr val="accent1">
-              <a:shade val="15000"/>
-            </a:schemeClr>
-          </a:lnRef>
-          <a:fillRef idx="1">
-            <a:schemeClr val="accent1"/>
-          </a:fillRef>
-          <a:effectRef idx="0">
-            <a:schemeClr val="accent1"/>
-          </a:effectRef>
-          <a:fontRef idx="minor">
-            <a:schemeClr val="lt1"/>
-          </a:fontRef>
-        </p:style>
-        <p:txBody>
-          <a:bodyPr wrap="none" lIns="0" tIns="0" rIns="0" bIns="0" rtlCol="0" anchor="ctr" anchorCtr="1"/>
-          <a:lstStyle/>
-          <a:p>
-            <a:pPr lvl="0" algn="ctr"/>
-            <a:r>
-              <a:rPr lang="el-GR" altLang="zh-TW" sz="1400" b="1" dirty="0">
-                <a:solidFill>
-                  <a:schemeClr val="tx2"/>
-                </a:solidFill>
-                <a:latin typeface="Calibri" panose="020F0502020204030204" pitchFamily="34" charset="0"/>
-                <a:ea typeface="Calibri" panose="020F0502020204030204" pitchFamily="34" charset="0"/>
-                <a:cs typeface="Calibri" panose="020F0502020204030204" pitchFamily="34" charset="0"/>
-              </a:rPr>
-              <a:t>σ</a:t>
-            </a:r>
-            <a:endParaRPr lang="en-US" altLang="zh-TW" sz="1400" b="1" baseline="-25000" dirty="0">
-              <a:solidFill>
-                <a:schemeClr val="tx2"/>
-              </a:solidFill>
-            </a:endParaRPr>
-          </a:p>
-        </p:txBody>
-      </p:sp>
-      <p:sp>
-        <p:nvSpPr>
-          <p:cNvPr id="175" name="矩形 174">
-            <a:extLst>
-              <a:ext uri="{FF2B5EF4-FFF2-40B4-BE49-F238E27FC236}">
-                <a16:creationId xmlns:a16="http://schemas.microsoft.com/office/drawing/2014/main" id="{0F5DD2D5-B59B-6A22-A399-C05F131B588E}"/>
-              </a:ext>
-            </a:extLst>
-          </p:cNvPr>
-          <p:cNvSpPr/>
-          <p:nvPr/>
-        </p:nvSpPr>
-        <p:spPr>
-          <a:xfrm>
-            <a:off x="3507520" y="1905571"/>
-            <a:ext cx="206210" cy="227285"/>
-          </a:xfrm>
-          <a:prstGeom prst="rect">
-            <a:avLst/>
-          </a:prstGeom>
-          <a:solidFill>
-            <a:schemeClr val="bg1">
-              <a:alpha val="60000"/>
-            </a:schemeClr>
-          </a:solidFill>
-          <a:ln w="19050">
-            <a:noFill/>
-            <a:prstDash val="sysDot"/>
-            <a:extLst>
-              <a:ext uri="{C807C97D-BFC1-408E-A445-0C87EB9F89A2}">
-                <ask:lineSketchStyleProps xmlns:ask="http://schemas.microsoft.com/office/drawing/2018/sketchyshapes">
-                  <ask:type>
-                    <ask:lineSketchNone/>
-                  </ask:type>
-                </ask:lineSketchStyleProps>
-              </a:ext>
-            </a:extLst>
-          </a:ln>
-        </p:spPr>
-        <p:style>
-          <a:lnRef idx="2">
-            <a:schemeClr val="accent1">
-              <a:shade val="15000"/>
-            </a:schemeClr>
-          </a:lnRef>
-          <a:fillRef idx="1">
-            <a:schemeClr val="accent1"/>
-          </a:fillRef>
-          <a:effectRef idx="0">
-            <a:schemeClr val="accent1"/>
-          </a:effectRef>
-          <a:fontRef idx="minor">
-            <a:schemeClr val="lt1"/>
-          </a:fontRef>
-        </p:style>
-        <p:txBody>
-          <a:bodyPr wrap="none" lIns="0" tIns="0" rIns="0" bIns="0" rtlCol="0" anchor="ctr" anchorCtr="1"/>
-          <a:lstStyle/>
-          <a:p>
-            <a:pPr lvl="0" algn="ctr"/>
-            <a:r>
-              <a:rPr lang="el-GR" altLang="zh-TW" sz="1400" b="1" dirty="0">
-                <a:solidFill>
-                  <a:schemeClr val="tx2"/>
-                </a:solidFill>
-                <a:latin typeface="Calibri" panose="020F0502020204030204" pitchFamily="34" charset="0"/>
-                <a:ea typeface="Calibri" panose="020F0502020204030204" pitchFamily="34" charset="0"/>
-                <a:cs typeface="Calibri" panose="020F0502020204030204" pitchFamily="34" charset="0"/>
-              </a:rPr>
-              <a:t>σ</a:t>
-            </a:r>
-            <a:endParaRPr lang="en-US" altLang="zh-TW" sz="1400" b="1" baseline="-25000" dirty="0">
-              <a:solidFill>
-                <a:schemeClr val="tx2"/>
-              </a:solidFill>
-            </a:endParaRPr>
-          </a:p>
-        </p:txBody>
-      </p:sp>
-      <p:sp>
-        <p:nvSpPr>
-          <p:cNvPr id="177" name="文字方塊 176">
-            <a:extLst>
-              <a:ext uri="{FF2B5EF4-FFF2-40B4-BE49-F238E27FC236}">
-                <a16:creationId xmlns:a16="http://schemas.microsoft.com/office/drawing/2014/main" id="{84DBD70E-B8C0-89B1-F630-AF61FF591373}"/>
-              </a:ext>
-            </a:extLst>
-          </p:cNvPr>
-          <p:cNvSpPr txBox="1"/>
-          <p:nvPr/>
-        </p:nvSpPr>
-        <p:spPr>
-          <a:xfrm>
-            <a:off x="3103815" y="2021014"/>
-            <a:ext cx="152825" cy="232156"/>
-          </a:xfrm>
-          <a:prstGeom prst="rect">
-            <a:avLst/>
-          </a:prstGeom>
-          <a:noFill/>
-        </p:spPr>
-        <p:txBody>
-          <a:bodyPr wrap="none" lIns="0" tIns="0" rIns="0" bIns="0" rtlCol="0" anchor="ctr" anchorCtr="1">
-            <a:noAutofit/>
-          </a:bodyPr>
-          <a:lstStyle/>
-          <a:p>
-            <a:pPr algn="ctr">
-              <a:lnSpc>
-                <a:spcPts val="1600"/>
-              </a:lnSpc>
-            </a:pPr>
-            <a:r>
-              <a:rPr lang="en-US" altLang="zh-TW" sz="1400" b="1" dirty="0"/>
-              <a:t>f</a:t>
-            </a:r>
-            <a:r>
-              <a:rPr lang="en-US" altLang="zh-TW" sz="1400" b="1" baseline="-25000" dirty="0"/>
-              <a:t>t</a:t>
-            </a:r>
-            <a:endParaRPr lang="zh-TW" altLang="en-US" sz="1400" b="1" baseline="-25000" dirty="0"/>
-          </a:p>
-        </p:txBody>
-      </p:sp>
-      <p:sp>
-        <p:nvSpPr>
-          <p:cNvPr id="181" name="文字方塊 180">
-            <a:extLst>
-              <a:ext uri="{FF2B5EF4-FFF2-40B4-BE49-F238E27FC236}">
-                <a16:creationId xmlns:a16="http://schemas.microsoft.com/office/drawing/2014/main" id="{F791E53A-18A6-0A6D-3693-0357D8A4A939}"/>
-              </a:ext>
-            </a:extLst>
-          </p:cNvPr>
-          <p:cNvSpPr txBox="1"/>
-          <p:nvPr/>
-        </p:nvSpPr>
-        <p:spPr>
-          <a:xfrm>
-            <a:off x="3103815" y="2527180"/>
-            <a:ext cx="152825" cy="232156"/>
-          </a:xfrm>
-          <a:prstGeom prst="rect">
-            <a:avLst/>
-          </a:prstGeom>
-          <a:noFill/>
-        </p:spPr>
-        <p:txBody>
-          <a:bodyPr wrap="none" lIns="0" tIns="0" rIns="0" bIns="0" rtlCol="0" anchor="ctr" anchorCtr="1">
-            <a:noAutofit/>
-          </a:bodyPr>
-          <a:lstStyle/>
-          <a:p>
-            <a:pPr algn="ctr">
-              <a:lnSpc>
-                <a:spcPts val="1600"/>
-              </a:lnSpc>
-            </a:pPr>
-            <a:r>
-              <a:rPr lang="en-US" altLang="zh-TW" sz="1400" b="1" dirty="0"/>
-              <a:t>i</a:t>
-            </a:r>
-            <a:r>
-              <a:rPr lang="en-US" altLang="zh-TW" sz="1400" b="1" baseline="-25000" dirty="0"/>
-              <a:t>t</a:t>
-            </a:r>
-            <a:endParaRPr lang="zh-TW" altLang="en-US" sz="1400" b="1" baseline="-25000" dirty="0"/>
-          </a:p>
-        </p:txBody>
-      </p:sp>
-      <p:sp>
-        <p:nvSpPr>
-          <p:cNvPr id="183" name="文字方塊 182">
-            <a:extLst>
-              <a:ext uri="{FF2B5EF4-FFF2-40B4-BE49-F238E27FC236}">
-                <a16:creationId xmlns:a16="http://schemas.microsoft.com/office/drawing/2014/main" id="{59989102-336F-8D07-7A99-274DFFF2ED7B}"/>
-              </a:ext>
-            </a:extLst>
-          </p:cNvPr>
-          <p:cNvSpPr txBox="1"/>
-          <p:nvPr/>
-        </p:nvSpPr>
-        <p:spPr>
-          <a:xfrm>
-            <a:off x="2829563" y="3080419"/>
-            <a:ext cx="206230" cy="232156"/>
-          </a:xfrm>
-          <a:prstGeom prst="rect">
-            <a:avLst/>
-          </a:prstGeom>
-          <a:noFill/>
-        </p:spPr>
-        <p:txBody>
-          <a:bodyPr wrap="none" lIns="0" tIns="0" rIns="0" bIns="0" rtlCol="0" anchor="ctr" anchorCtr="1">
-            <a:noAutofit/>
-          </a:bodyPr>
-          <a:lstStyle/>
-          <a:p>
-            <a:pPr algn="ctr">
-              <a:lnSpc>
-                <a:spcPts val="1600"/>
-              </a:lnSpc>
-            </a:pPr>
-            <a:r>
-              <a:rPr lang="en-US" altLang="zh-TW" sz="1400" b="1" dirty="0"/>
-              <a:t>O</a:t>
-            </a:r>
-            <a:r>
-              <a:rPr lang="en-US" altLang="zh-TW" sz="1400" b="1" baseline="-25000" dirty="0"/>
-              <a:t>t</a:t>
-            </a:r>
-            <a:endParaRPr lang="zh-TW" altLang="en-US" sz="1400" b="1" baseline="-25000" dirty="0"/>
-          </a:p>
-        </p:txBody>
-      </p:sp>
-      <p:sp>
-        <p:nvSpPr>
           <p:cNvPr id="185" name="文字方塊 184">
             <a:extLst>
               <a:ext uri="{FF2B5EF4-FFF2-40B4-BE49-F238E27FC236}">
@@ -20844,7 +20113,7 @@
         </p:nvSpPr>
         <p:spPr>
           <a:xfrm>
-            <a:off x="3180228" y="1033545"/>
+            <a:off x="1912045" y="5614340"/>
             <a:ext cx="152825" cy="232156"/>
           </a:xfrm>
           <a:prstGeom prst="rect">
@@ -20875,136 +20144,6 @@
           </a:p>
         </p:txBody>
       </p:sp>
-      <mc:AlternateContent xmlns:mc="http://schemas.openxmlformats.org/markup-compatibility/2006">
-        <mc:Choice xmlns:a14="http://schemas.microsoft.com/office/drawing/2010/main" Requires="a14">
-          <p:sp>
-            <p:nvSpPr>
-              <p:cNvPr id="206" name="文字方塊 205">
-                <a:extLst>
-                  <a:ext uri="{FF2B5EF4-FFF2-40B4-BE49-F238E27FC236}">
-                    <a16:creationId xmlns:a16="http://schemas.microsoft.com/office/drawing/2014/main" id="{D7160AE8-7A03-0531-A60B-836455A6276D}"/>
-                  </a:ext>
-                </a:extLst>
-              </p:cNvPr>
-              <p:cNvSpPr txBox="1"/>
-              <p:nvPr/>
-            </p:nvSpPr>
-            <p:spPr>
-              <a:xfrm>
-                <a:off x="2864857" y="3573706"/>
-                <a:ext cx="152825" cy="189154"/>
-              </a:xfrm>
-              <a:prstGeom prst="rect">
-                <a:avLst/>
-              </a:prstGeom>
-              <a:noFill/>
-            </p:spPr>
-            <p:txBody>
-              <a:bodyPr wrap="square" lIns="0" tIns="0" rIns="0" bIns="0" rtlCol="0">
-                <a:spAutoFit/>
-              </a:bodyPr>
-              <a:lstStyle/>
-              <a:p>
-                <a:pPr/>
-                <a14:m>
-                  <m:oMathPara xmlns:m="http://schemas.openxmlformats.org/officeDocument/2006/math">
-                    <m:oMathParaPr>
-                      <m:jc m:val="center"/>
-                    </m:oMathParaPr>
-                    <m:oMath>
-                      <m:sSub>
-                        <m:sSubPr>
-                          <m:ctrlPr>
-                            <a:rPr lang="en-US" altLang="zh-TW" sz="1200">
-                              <a:latin typeface="Cambria Math" panose="02040503050406030204" pitchFamily="18" charset="0"/>
-                            </a:rPr>
-                          </m:ctrlPr>
-                        </m:sSubPr>
-                        <m:e>
-                          <m:acc>
-                            <m:accPr>
-                              <m:chr m:val="̃"/>
-                              <m:ctrlPr>
-                                <a:rPr lang="en-US" altLang="zh-TW" sz="1200" b="1" i="0">
-                                  <a:latin typeface="Cambria Math" panose="02040503050406030204" pitchFamily="18" charset="0"/>
-                                </a:rPr>
-                              </m:ctrlPr>
-                            </m:accPr>
-                            <m:e>
-                              <m:r>
-                                <a:rPr lang="en-US" altLang="zh-TW" sz="1200" b="1" i="0">
-                                  <a:latin typeface="Cambria Math" panose="02040503050406030204" pitchFamily="18" charset="0"/>
-                                </a:rPr>
-                                <m:t>𝐂</m:t>
-                              </m:r>
-                            </m:e>
-                          </m:acc>
-                        </m:e>
-                        <m:sub>
-                          <m:r>
-                            <m:rPr>
-                              <m:sty m:val="p"/>
-                            </m:rPr>
-                            <a:rPr lang="en-US" altLang="zh-TW" sz="1200" b="0" i="0" smtClean="0">
-                              <a:latin typeface="Cambria Math" panose="02040503050406030204" pitchFamily="18" charset="0"/>
-                            </a:rPr>
-                            <m:t>t</m:t>
-                          </m:r>
-                        </m:sub>
-                      </m:sSub>
-                    </m:oMath>
-                  </m:oMathPara>
-                </a14:m>
-                <a:endParaRPr lang="zh-TW" altLang="en-US" sz="1200" dirty="0"/>
-              </a:p>
-            </p:txBody>
-          </p:sp>
-        </mc:Choice>
-        <mc:Fallback>
-          <p:sp>
-            <p:nvSpPr>
-              <p:cNvPr id="206" name="文字方塊 205">
-                <a:extLst>
-                  <a:ext uri="{FF2B5EF4-FFF2-40B4-BE49-F238E27FC236}">
-                    <a16:creationId xmlns:a16="http://schemas.microsoft.com/office/drawing/2014/main" id="{D7160AE8-7A03-0531-A60B-836455A6276D}"/>
-                  </a:ext>
-                </a:extLst>
-              </p:cNvPr>
-              <p:cNvSpPr txBox="1">
-                <a:spLocks noRot="1" noChangeAspect="1" noMove="1" noResize="1" noEditPoints="1" noAdjustHandles="1" noChangeArrowheads="1" noChangeShapeType="1" noTextEdit="1"/>
-              </p:cNvSpPr>
-              <p:nvPr/>
-            </p:nvSpPr>
-            <p:spPr>
-              <a:xfrm>
-                <a:off x="2864857" y="3573706"/>
-                <a:ext cx="152825" cy="189154"/>
-              </a:xfrm>
-              <a:prstGeom prst="rect">
-                <a:avLst/>
-              </a:prstGeom>
-              <a:blipFill>
-                <a:blip r:embed="rId9"/>
-                <a:stretch>
-                  <a:fillRect l="-32000" t="-38710" r="-60000" b="-12903"/>
-                </a:stretch>
-              </a:blipFill>
-            </p:spPr>
-            <p:txBody>
-              <a:bodyPr/>
-              <a:lstStyle/>
-              <a:p>
-                <a:r>
-                  <a:rPr lang="zh-TW" altLang="en-US">
-                    <a:noFill/>
-                  </a:rPr>
-                  <a:t> </a:t>
-                </a:r>
-              </a:p>
-            </p:txBody>
-          </p:sp>
-        </mc:Fallback>
-      </mc:AlternateContent>
       <p:cxnSp>
         <p:nvCxnSpPr>
           <p:cNvPr id="211" name="接點: 肘形 210">
@@ -21022,9 +20161,9 @@
           <p:nvPr/>
         </p:nvCxnSpPr>
         <p:spPr>
-          <a:xfrm flipV="1">
-            <a:off x="1362321" y="3194590"/>
-            <a:ext cx="837911" cy="1067261"/>
+          <a:xfrm>
+            <a:off x="1382257" y="3879258"/>
+            <a:ext cx="453439" cy="284835"/>
           </a:xfrm>
           <a:prstGeom prst="bentConnector3">
             <a:avLst>
@@ -21057,83 +20196,6 @@
           </a:fontRef>
         </p:style>
       </p:cxnSp>
-      <p:sp>
-        <p:nvSpPr>
-          <p:cNvPr id="213" name="矩形 212">
-            <a:extLst>
-              <a:ext uri="{FF2B5EF4-FFF2-40B4-BE49-F238E27FC236}">
-                <a16:creationId xmlns:a16="http://schemas.microsoft.com/office/drawing/2014/main" id="{D2AE10F7-BCB8-BBCA-777D-B0B53990D42E}"/>
-              </a:ext>
-            </a:extLst>
-          </p:cNvPr>
-          <p:cNvSpPr/>
-          <p:nvPr/>
-        </p:nvSpPr>
-        <p:spPr>
-          <a:xfrm>
-            <a:off x="3197629" y="2974576"/>
-            <a:ext cx="438267" cy="226925"/>
-          </a:xfrm>
-          <a:prstGeom prst="rect">
-            <a:avLst/>
-          </a:prstGeom>
-          <a:solidFill>
-            <a:schemeClr val="bg1">
-              <a:alpha val="60000"/>
-            </a:schemeClr>
-          </a:solidFill>
-          <a:ln w="19050">
-            <a:noFill/>
-            <a:prstDash val="sysDot"/>
-            <a:extLst>
-              <a:ext uri="{C807C97D-BFC1-408E-A445-0C87EB9F89A2}">
-                <ask:lineSketchStyleProps xmlns:ask="http://schemas.microsoft.com/office/drawing/2018/sketchyshapes">
-                  <ask:type>
-                    <ask:lineSketchNone/>
-                  </ask:type>
-                </ask:lineSketchStyleProps>
-              </a:ext>
-            </a:extLst>
-          </a:ln>
-        </p:spPr>
-        <p:style>
-          <a:lnRef idx="2">
-            <a:schemeClr val="accent1">
-              <a:shade val="15000"/>
-            </a:schemeClr>
-          </a:lnRef>
-          <a:fillRef idx="1">
-            <a:schemeClr val="accent1"/>
-          </a:fillRef>
-          <a:effectRef idx="0">
-            <a:schemeClr val="accent1"/>
-          </a:effectRef>
-          <a:fontRef idx="minor">
-            <a:schemeClr val="lt1"/>
-          </a:fontRef>
-        </p:style>
-        <p:txBody>
-          <a:bodyPr wrap="none" lIns="0" tIns="0" rIns="0" bIns="0" rtlCol="0" anchor="ctr" anchorCtr="1"/>
-          <a:lstStyle/>
-          <a:p>
-            <a:pPr lvl="0" algn="ctr"/>
-            <a:r>
-              <a:rPr lang="en-US" altLang="zh-TW" sz="1200" b="1" dirty="0">
-                <a:solidFill>
-                  <a:schemeClr val="tx2"/>
-                </a:solidFill>
-                <a:cs typeface="Calibri" panose="020F0502020204030204" pitchFamily="34" charset="0"/>
-              </a:rPr>
-              <a:t>tanh</a:t>
-            </a:r>
-            <a:endParaRPr lang="en-US" altLang="zh-TW" sz="1200" b="1" baseline="-25000" dirty="0">
-              <a:solidFill>
-                <a:schemeClr val="tx2"/>
-              </a:solidFill>
-            </a:endParaRPr>
-          </a:p>
-        </p:txBody>
-      </p:sp>
       <p:cxnSp>
         <p:nvCxnSpPr>
           <p:cNvPr id="214" name="直線單箭頭接點 213">
@@ -21151,9 +20213,9 @@
           <p:nvPr/>
         </p:nvCxnSpPr>
         <p:spPr>
-          <a:xfrm flipH="1" flipV="1">
-            <a:off x="3256640" y="2137092"/>
-            <a:ext cx="887808" cy="1851"/>
+          <a:xfrm flipH="1">
+            <a:off x="2907957" y="2042437"/>
+            <a:ext cx="1164483" cy="3657"/>
           </a:xfrm>
           <a:prstGeom prst="straightConnector1">
             <a:avLst/>
@@ -21199,8 +20261,8 @@
         </p:nvCxnSpPr>
         <p:spPr>
           <a:xfrm flipV="1">
-            <a:off x="1362321" y="2643768"/>
-            <a:ext cx="540354" cy="1618083"/>
+            <a:off x="1382257" y="2557233"/>
+            <a:ext cx="453439" cy="1322025"/>
           </a:xfrm>
           <a:prstGeom prst="bentConnector3">
             <a:avLst>
@@ -21250,8 +20312,8 @@
             <a:chExt cx="2132828" cy="446292"/>
           </a:xfrm>
         </p:grpSpPr>
-        <mc:AlternateContent xmlns:mc="http://schemas.openxmlformats.org/markup-compatibility/2006">
-          <mc:Choice xmlns:a14="http://schemas.microsoft.com/office/drawing/2010/main" Requires="a14">
+        <mc:AlternateContent xmlns:mc="http://schemas.openxmlformats.org/markup-compatibility/2006" xmlns:a14="http://schemas.microsoft.com/office/drawing/2010/main">
+          <mc:Choice Requires="a14">
             <p:sp>
               <p:nvSpPr>
                 <p:cNvPr id="226" name="文字方塊 225">
@@ -21303,7 +20365,7 @@
                         <m:d>
                           <m:dPr>
                             <m:ctrlPr>
-                              <a:rPr lang="zh-TW" altLang="en-US" sz="1200" i="1" smtClean="0">
+                              <a:rPr lang="en-US" altLang="zh-TW" sz="1200" b="1" i="1">
                                 <a:solidFill>
                                   <a:schemeClr val="accent2"/>
                                 </a:solidFill>
@@ -21351,16 +20413,7 @@
                                     </a:solidFill>
                                     <a:latin typeface="Cambria Math" panose="02040503050406030204" pitchFamily="18" charset="0"/>
                                   </a:rPr>
-                                  <m:t>(</m:t>
-                                </m:r>
-                                <m:r>
-                                  <a:rPr lang="en-US" altLang="zh-TW" sz="1200" i="1">
-                                    <a:solidFill>
-                                      <a:schemeClr val="accent2"/>
-                                    </a:solidFill>
-                                    <a:latin typeface="Cambria Math" panose="02040503050406030204" pitchFamily="18" charset="0"/>
-                                  </a:rPr>
-                                  <m:t>4</m:t>
+                                  <m:t>(4</m:t>
                                 </m:r>
                                 <m:r>
                                   <a:rPr lang="en-US" altLang="zh-TW" sz="1200" b="0" i="1" smtClean="0">
@@ -21486,7 +20539,7 @@
               </p:txBody>
             </p:sp>
           </mc:Choice>
-          <mc:Fallback>
+          <mc:Fallback xmlns="">
             <p:sp>
               <p:nvSpPr>
                 <p:cNvPr id="226" name="文字方塊 225">
@@ -21620,9 +20673,9 @@
           <p:nvPr/>
         </p:nvCxnSpPr>
         <p:spPr>
-          <a:xfrm>
-            <a:off x="2186365" y="2135056"/>
-            <a:ext cx="917450" cy="2036"/>
+          <a:xfrm flipV="1">
+            <a:off x="2119386" y="2046094"/>
+            <a:ext cx="253754" cy="1981"/>
           </a:xfrm>
           <a:prstGeom prst="straightConnector1">
             <a:avLst/>
@@ -21662,14 +20715,14 @@
           <p:cNvCxnSpPr>
             <a:cxnSpLocks/>
             <a:stCxn id="113" idx="3"/>
-            <a:endCxn id="181" idx="1"/>
+            <a:endCxn id="27" idx="1"/>
           </p:cNvCxnSpPr>
           <p:nvPr/>
         </p:nvCxnSpPr>
         <p:spPr>
           <a:xfrm flipV="1">
-            <a:off x="2176995" y="2643258"/>
-            <a:ext cx="926820" cy="510"/>
+            <a:off x="2110016" y="2551953"/>
+            <a:ext cx="595438" cy="5280"/>
           </a:xfrm>
           <a:prstGeom prst="straightConnector1">
             <a:avLst/>
@@ -21709,14 +20762,14 @@
           <p:cNvCxnSpPr>
             <a:cxnSpLocks/>
             <a:stCxn id="110" idx="3"/>
-            <a:endCxn id="183" idx="1"/>
+            <a:endCxn id="37" idx="1"/>
           </p:cNvCxnSpPr>
           <p:nvPr/>
         </p:nvCxnSpPr>
         <p:spPr>
-          <a:xfrm>
-            <a:off x="2474552" y="3194590"/>
-            <a:ext cx="355011" cy="1907"/>
+          <a:xfrm flipV="1">
+            <a:off x="2110016" y="4163222"/>
+            <a:ext cx="586828" cy="871"/>
           </a:xfrm>
           <a:prstGeom prst="straightConnector1">
             <a:avLst/>
@@ -21759,14 +20812,14 @@
           <p:cNvCxnSpPr>
             <a:cxnSpLocks/>
             <a:stCxn id="119" idx="1"/>
-            <a:endCxn id="183" idx="3"/>
+            <a:endCxn id="37" idx="3"/>
           </p:cNvCxnSpPr>
           <p:nvPr/>
         </p:nvCxnSpPr>
         <p:spPr>
           <a:xfrm flipH="1" flipV="1">
-            <a:off x="3035793" y="3196497"/>
-            <a:ext cx="753644" cy="5762"/>
+            <a:off x="3430048" y="4163222"/>
+            <a:ext cx="642392" cy="1875"/>
           </a:xfrm>
           <a:prstGeom prst="straightConnector1">
             <a:avLst/>
@@ -21805,13 +20858,15 @@
           </p:cNvPr>
           <p:cNvCxnSpPr>
             <a:cxnSpLocks/>
+            <a:stCxn id="122" idx="1"/>
+            <a:endCxn id="27" idx="3"/>
           </p:cNvCxnSpPr>
           <p:nvPr/>
         </p:nvCxnSpPr>
         <p:spPr>
           <a:xfrm flipH="1">
-            <a:off x="3419872" y="2643768"/>
-            <a:ext cx="724576" cy="3605"/>
+            <a:off x="3203848" y="2547708"/>
+            <a:ext cx="868592" cy="4245"/>
           </a:xfrm>
           <a:prstGeom prst="straightConnector1">
             <a:avLst/>
@@ -21857,8 +20912,8 @@
         </p:nvCxnSpPr>
         <p:spPr>
           <a:xfrm flipV="1">
-            <a:off x="1362321" y="3651880"/>
-            <a:ext cx="825871" cy="609971"/>
+            <a:off x="1382257" y="3051763"/>
+            <a:ext cx="458612" cy="827495"/>
           </a:xfrm>
           <a:prstGeom prst="bentConnector3">
             <a:avLst>
@@ -21867,10 +20922,7 @@
           </a:prstGeom>
           <a:ln w="15875">
             <a:solidFill>
-              <a:schemeClr val="accent2">
-                <a:lumMod val="60000"/>
-                <a:lumOff val="40000"/>
-              </a:schemeClr>
+              <a:schemeClr val="accent2"/>
             </a:solidFill>
             <a:prstDash val="sysDot"/>
             <a:tailEnd type="triangle" w="sm" len="med"/>
@@ -21908,9 +20960,478 @@
           <p:nvPr/>
         </p:nvCxnSpPr>
         <p:spPr>
+          <a:xfrm flipV="1">
+            <a:off x="2115189" y="3048570"/>
+            <a:ext cx="956286" cy="3193"/>
+          </a:xfrm>
+          <a:prstGeom prst="straightConnector1">
+            <a:avLst/>
+          </a:prstGeom>
+          <a:ln w="15875">
+            <a:solidFill>
+              <a:schemeClr val="accent2"/>
+            </a:solidFill>
+            <a:prstDash val="sysDot"/>
+            <a:tailEnd type="triangle" w="sm" len="med"/>
+          </a:ln>
+        </p:spPr>
+        <p:style>
+          <a:lnRef idx="1">
+            <a:schemeClr val="accent1"/>
+          </a:lnRef>
+          <a:fillRef idx="0">
+            <a:schemeClr val="accent1"/>
+          </a:fillRef>
+          <a:effectRef idx="0">
+            <a:schemeClr val="accent1"/>
+          </a:effectRef>
+          <a:fontRef idx="minor">
+            <a:schemeClr val="tx1"/>
+          </a:fontRef>
+        </p:style>
+      </p:cxnSp>
+      <p:cxnSp>
+        <p:nvCxnSpPr>
+          <p:cNvPr id="2" name="直線單箭頭接點 1">
+            <a:extLst>
+              <a:ext uri="{FF2B5EF4-FFF2-40B4-BE49-F238E27FC236}">
+                <a16:creationId xmlns:a16="http://schemas.microsoft.com/office/drawing/2014/main" id="{ED28A4CC-FA8C-9F29-6518-AE25490AB870}"/>
+              </a:ext>
+            </a:extLst>
+          </p:cNvPr>
+          <p:cNvCxnSpPr>
+            <a:cxnSpLocks/>
+            <a:stCxn id="88" idx="1"/>
+            <a:endCxn id="206" idx="3"/>
+          </p:cNvCxnSpPr>
+          <p:nvPr/>
+        </p:nvCxnSpPr>
+        <p:spPr>
+          <a:xfrm flipH="1" flipV="1">
+            <a:off x="3779912" y="3048570"/>
+            <a:ext cx="292528" cy="3193"/>
+          </a:xfrm>
+          <a:prstGeom prst="straightConnector1">
+            <a:avLst/>
+          </a:prstGeom>
+          <a:ln w="15875">
+            <a:solidFill>
+              <a:schemeClr val="tx2"/>
+            </a:solidFill>
+            <a:prstDash val="sysDot"/>
+            <a:tailEnd type="triangle" w="sm" len="med"/>
+          </a:ln>
+        </p:spPr>
+        <p:style>
+          <a:lnRef idx="1">
+            <a:schemeClr val="accent1"/>
+          </a:lnRef>
+          <a:fillRef idx="0">
+            <a:schemeClr val="accent1"/>
+          </a:fillRef>
+          <a:effectRef idx="0">
+            <a:schemeClr val="accent1"/>
+          </a:effectRef>
+          <a:fontRef idx="minor">
+            <a:schemeClr val="tx1"/>
+          </a:fontRef>
+        </p:style>
+      </p:cxnSp>
+      <p:sp>
+        <p:nvSpPr>
+          <p:cNvPr id="12" name="矩形 11">
+            <a:extLst>
+              <a:ext uri="{FF2B5EF4-FFF2-40B4-BE49-F238E27FC236}">
+                <a16:creationId xmlns:a16="http://schemas.microsoft.com/office/drawing/2014/main" id="{D4C4E142-C657-8251-FE86-BC7B17631D19}"/>
+              </a:ext>
+            </a:extLst>
+          </p:cNvPr>
+          <p:cNvSpPr/>
+          <p:nvPr/>
+        </p:nvSpPr>
+        <p:spPr>
           <a:xfrm>
-            <a:off x="2462512" y="3651880"/>
-            <a:ext cx="402345" cy="16403"/>
+            <a:off x="1331002" y="5307778"/>
+            <a:ext cx="196994" cy="173105"/>
+          </a:xfrm>
+          <a:prstGeom prst="rect">
+            <a:avLst/>
+          </a:prstGeom>
+          <a:solidFill>
+            <a:schemeClr val="bg1">
+              <a:alpha val="60000"/>
+            </a:schemeClr>
+          </a:solidFill>
+          <a:ln w="19050">
+            <a:noFill/>
+            <a:prstDash val="sysDot"/>
+            <a:extLst>
+              <a:ext uri="{C807C97D-BFC1-408E-A445-0C87EB9F89A2}">
+                <ask:lineSketchStyleProps xmlns:ask="http://schemas.microsoft.com/office/drawing/2018/sketchyshapes">
+                  <ask:type>
+                    <ask:lineSketchNone/>
+                  </ask:type>
+                </ask:lineSketchStyleProps>
+              </a:ext>
+            </a:extLst>
+          </a:ln>
+        </p:spPr>
+        <p:style>
+          <a:lnRef idx="2">
+            <a:schemeClr val="accent1">
+              <a:shade val="15000"/>
+            </a:schemeClr>
+          </a:lnRef>
+          <a:fillRef idx="1">
+            <a:schemeClr val="accent1"/>
+          </a:fillRef>
+          <a:effectRef idx="0">
+            <a:schemeClr val="accent1"/>
+          </a:effectRef>
+          <a:fontRef idx="minor">
+            <a:schemeClr val="lt1"/>
+          </a:fontRef>
+        </p:style>
+        <p:txBody>
+          <a:bodyPr wrap="none" lIns="0" tIns="0" rIns="0" bIns="0" rtlCol="0" anchor="ctr" anchorCtr="1"/>
+          <a:lstStyle/>
+          <a:p>
+            <a:pPr lvl="0" algn="ctr"/>
+            <a:r>
+              <a:rPr lang="el-GR" altLang="zh-TW" sz="1400" b="1" dirty="0">
+                <a:solidFill>
+                  <a:schemeClr val="tx2"/>
+                </a:solidFill>
+                <a:latin typeface="Calibri" panose="020F0502020204030204" pitchFamily="34" charset="0"/>
+                <a:ea typeface="Calibri" panose="020F0502020204030204" pitchFamily="34" charset="0"/>
+                <a:cs typeface="Calibri" panose="020F0502020204030204" pitchFamily="34" charset="0"/>
+              </a:rPr>
+              <a:t>σ</a:t>
+            </a:r>
+            <a:endParaRPr lang="en-US" altLang="zh-TW" sz="1400" b="1" baseline="-25000" dirty="0">
+              <a:solidFill>
+                <a:schemeClr val="tx2"/>
+              </a:solidFill>
+            </a:endParaRPr>
+          </a:p>
+        </p:txBody>
+      </p:sp>
+      <p:sp>
+        <p:nvSpPr>
+          <p:cNvPr id="15" name="文字方塊 14">
+            <a:extLst>
+              <a:ext uri="{FF2B5EF4-FFF2-40B4-BE49-F238E27FC236}">
+                <a16:creationId xmlns:a16="http://schemas.microsoft.com/office/drawing/2014/main" id="{9B2D4CE4-1656-DD83-BB97-6894531A2BA8}"/>
+              </a:ext>
+            </a:extLst>
+          </p:cNvPr>
+          <p:cNvSpPr txBox="1"/>
+          <p:nvPr/>
+        </p:nvSpPr>
+        <p:spPr>
+          <a:xfrm>
+            <a:off x="936453" y="5371151"/>
+            <a:ext cx="152825" cy="232156"/>
+          </a:xfrm>
+          <a:prstGeom prst="rect">
+            <a:avLst/>
+          </a:prstGeom>
+          <a:noFill/>
+        </p:spPr>
+        <p:txBody>
+          <a:bodyPr wrap="none" lIns="0" tIns="0" rIns="0" bIns="0" rtlCol="0" anchor="ctr" anchorCtr="1">
+            <a:noAutofit/>
+          </a:bodyPr>
+          <a:lstStyle/>
+          <a:p>
+            <a:pPr algn="ctr">
+              <a:lnSpc>
+                <a:spcPts val="1600"/>
+              </a:lnSpc>
+            </a:pPr>
+            <a:r>
+              <a:rPr lang="en-US" altLang="zh-TW" sz="1400" b="1" dirty="0"/>
+              <a:t>i</a:t>
+            </a:r>
+            <a:r>
+              <a:rPr lang="en-US" altLang="zh-TW" sz="1400" b="1" baseline="-25000" dirty="0"/>
+              <a:t>t</a:t>
+            </a:r>
+            <a:endParaRPr lang="zh-TW" altLang="en-US" sz="1400" b="1" baseline="-25000" dirty="0"/>
+          </a:p>
+        </p:txBody>
+      </p:sp>
+      <p:sp>
+        <p:nvSpPr>
+          <p:cNvPr id="16" name="文字方塊 15">
+            <a:extLst>
+              <a:ext uri="{FF2B5EF4-FFF2-40B4-BE49-F238E27FC236}">
+                <a16:creationId xmlns:a16="http://schemas.microsoft.com/office/drawing/2014/main" id="{B2F376C8-9C15-2574-2564-4E95077635ED}"/>
+              </a:ext>
+            </a:extLst>
+          </p:cNvPr>
+          <p:cNvSpPr txBox="1"/>
+          <p:nvPr/>
+        </p:nvSpPr>
+        <p:spPr>
+          <a:xfrm>
+            <a:off x="662201" y="5924390"/>
+            <a:ext cx="206230" cy="232156"/>
+          </a:xfrm>
+          <a:prstGeom prst="rect">
+            <a:avLst/>
+          </a:prstGeom>
+          <a:noFill/>
+        </p:spPr>
+        <p:txBody>
+          <a:bodyPr wrap="none" lIns="0" tIns="0" rIns="0" bIns="0" rtlCol="0" anchor="ctr" anchorCtr="1">
+            <a:noAutofit/>
+          </a:bodyPr>
+          <a:lstStyle/>
+          <a:p>
+            <a:pPr algn="ctr">
+              <a:lnSpc>
+                <a:spcPts val="1600"/>
+              </a:lnSpc>
+            </a:pPr>
+            <a:r>
+              <a:rPr lang="en-US" altLang="zh-TW" sz="1400" b="1" dirty="0"/>
+              <a:t>O</a:t>
+            </a:r>
+            <a:r>
+              <a:rPr lang="en-US" altLang="zh-TW" sz="1400" b="1" baseline="-25000" dirty="0"/>
+              <a:t>t</a:t>
+            </a:r>
+            <a:endParaRPr lang="zh-TW" altLang="en-US" sz="1400" b="1" baseline="-25000" dirty="0"/>
+          </a:p>
+        </p:txBody>
+      </p:sp>
+      <mc:AlternateContent xmlns:mc="http://schemas.openxmlformats.org/markup-compatibility/2006">
+        <mc:Choice xmlns:a14="http://schemas.microsoft.com/office/drawing/2010/main" Requires="a14">
+          <p:sp>
+            <p:nvSpPr>
+              <p:cNvPr id="17" name="文字方塊 16">
+                <a:extLst>
+                  <a:ext uri="{FF2B5EF4-FFF2-40B4-BE49-F238E27FC236}">
+                    <a16:creationId xmlns:a16="http://schemas.microsoft.com/office/drawing/2014/main" id="{ACC10C95-D396-BF24-A1A2-3546DCAFEE9B}"/>
+                  </a:ext>
+                </a:extLst>
+              </p:cNvPr>
+              <p:cNvSpPr txBox="1"/>
+              <p:nvPr/>
+            </p:nvSpPr>
+            <p:spPr>
+              <a:xfrm>
+                <a:off x="697495" y="6417677"/>
+                <a:ext cx="152825" cy="189154"/>
+              </a:xfrm>
+              <a:prstGeom prst="rect">
+                <a:avLst/>
+              </a:prstGeom>
+              <a:noFill/>
+            </p:spPr>
+            <p:txBody>
+              <a:bodyPr wrap="square" lIns="0" tIns="0" rIns="0" bIns="0" rtlCol="0">
+                <a:spAutoFit/>
+              </a:bodyPr>
+              <a:lstStyle/>
+              <a:p>
+                <a:pPr/>
+                <a14:m>
+                  <m:oMathPara xmlns:m="http://schemas.openxmlformats.org/officeDocument/2006/math">
+                    <m:oMathParaPr>
+                      <m:jc m:val="center"/>
+                    </m:oMathParaPr>
+                    <m:oMath>
+                      <m:sSub>
+                        <m:sSubPr>
+                          <m:ctrlPr>
+                            <a:rPr lang="en-US" altLang="zh-TW" sz="1200" b="1" i="1">
+                              <a:latin typeface="Cambria Math" panose="02040503050406030204" pitchFamily="18" charset="0"/>
+                            </a:rPr>
+                          </m:ctrlPr>
+                        </m:sSubPr>
+                        <m:e>
+                          <m:acc>
+                            <m:accPr>
+                              <m:chr m:val="̃"/>
+                              <m:ctrlPr>
+                                <a:rPr lang="en-US" altLang="zh-TW" sz="1200" b="1" i="0">
+                                  <a:latin typeface="Cambria Math" panose="02040503050406030204" pitchFamily="18" charset="0"/>
+                                </a:rPr>
+                              </m:ctrlPr>
+                            </m:accPr>
+                            <m:e>
+                              <m:r>
+                                <a:rPr lang="en-US" altLang="zh-TW" sz="1200" b="1" i="0">
+                                  <a:latin typeface="Cambria Math" panose="02040503050406030204" pitchFamily="18" charset="0"/>
+                                </a:rPr>
+                                <m:t>𝐂</m:t>
+                              </m:r>
+                            </m:e>
+                          </m:acc>
+                        </m:e>
+                        <m:sub>
+                          <m:r>
+                            <m:rPr>
+                              <m:sty m:val="p"/>
+                            </m:rPr>
+                            <a:rPr lang="en-US" altLang="zh-TW" sz="1200" b="0" i="0" smtClean="0">
+                              <a:latin typeface="Cambria Math" panose="02040503050406030204" pitchFamily="18" charset="0"/>
+                            </a:rPr>
+                            <m:t>t</m:t>
+                          </m:r>
+                        </m:sub>
+                      </m:sSub>
+                    </m:oMath>
+                  </m:oMathPara>
+                </a14:m>
+                <a:endParaRPr lang="zh-TW" altLang="en-US" sz="1200" dirty="0"/>
+              </a:p>
+            </p:txBody>
+          </p:sp>
+        </mc:Choice>
+        <mc:Fallback>
+          <p:sp>
+            <p:nvSpPr>
+              <p:cNvPr id="17" name="文字方塊 16">
+                <a:extLst>
+                  <a:ext uri="{FF2B5EF4-FFF2-40B4-BE49-F238E27FC236}">
+                    <a16:creationId xmlns:a16="http://schemas.microsoft.com/office/drawing/2014/main" id="{ACC10C95-D396-BF24-A1A2-3546DCAFEE9B}"/>
+                  </a:ext>
+                </a:extLst>
+              </p:cNvPr>
+              <p:cNvSpPr txBox="1">
+                <a:spLocks noRot="1" noChangeAspect="1" noMove="1" noResize="1" noEditPoints="1" noAdjustHandles="1" noChangeArrowheads="1" noChangeShapeType="1" noTextEdit="1"/>
+              </p:cNvSpPr>
+              <p:nvPr/>
+            </p:nvSpPr>
+            <p:spPr>
+              <a:xfrm>
+                <a:off x="697495" y="6417677"/>
+                <a:ext cx="152825" cy="189154"/>
+              </a:xfrm>
+              <a:prstGeom prst="rect">
+                <a:avLst/>
+              </a:prstGeom>
+              <a:blipFill>
+                <a:blip r:embed="rId11"/>
+                <a:stretch>
+                  <a:fillRect l="-32000" t="-41935" r="-64000" b="-12903"/>
+                </a:stretch>
+              </a:blipFill>
+            </p:spPr>
+            <p:txBody>
+              <a:bodyPr/>
+              <a:lstStyle/>
+              <a:p>
+                <a:r>
+                  <a:rPr lang="zh-TW" altLang="en-US">
+                    <a:noFill/>
+                  </a:rPr>
+                  <a:t> </a:t>
+                </a:r>
+              </a:p>
+            </p:txBody>
+          </p:sp>
+        </mc:Fallback>
+      </mc:AlternateContent>
+      <p:sp>
+        <p:nvSpPr>
+          <p:cNvPr id="18" name="矩形 17">
+            <a:extLst>
+              <a:ext uri="{FF2B5EF4-FFF2-40B4-BE49-F238E27FC236}">
+                <a16:creationId xmlns:a16="http://schemas.microsoft.com/office/drawing/2014/main" id="{90C6B832-AE33-5F81-DBD3-F8B053CF81E1}"/>
+              </a:ext>
+            </a:extLst>
+          </p:cNvPr>
+          <p:cNvSpPr/>
+          <p:nvPr/>
+        </p:nvSpPr>
+        <p:spPr>
+          <a:xfrm>
+            <a:off x="1030267" y="5818547"/>
+            <a:ext cx="438267" cy="226925"/>
+          </a:xfrm>
+          <a:prstGeom prst="rect">
+            <a:avLst/>
+          </a:prstGeom>
+          <a:solidFill>
+            <a:schemeClr val="bg1">
+              <a:alpha val="60000"/>
+            </a:schemeClr>
+          </a:solidFill>
+          <a:ln w="19050">
+            <a:noFill/>
+            <a:prstDash val="sysDot"/>
+            <a:extLst>
+              <a:ext uri="{C807C97D-BFC1-408E-A445-0C87EB9F89A2}">
+                <ask:lineSketchStyleProps xmlns:ask="http://schemas.microsoft.com/office/drawing/2018/sketchyshapes">
+                  <ask:type>
+                    <ask:lineSketchNone/>
+                  </ask:type>
+                </ask:lineSketchStyleProps>
+              </a:ext>
+            </a:extLst>
+          </a:ln>
+        </p:spPr>
+        <p:style>
+          <a:lnRef idx="2">
+            <a:schemeClr val="accent1">
+              <a:shade val="15000"/>
+            </a:schemeClr>
+          </a:lnRef>
+          <a:fillRef idx="1">
+            <a:schemeClr val="accent1"/>
+          </a:fillRef>
+          <a:effectRef idx="0">
+            <a:schemeClr val="accent1"/>
+          </a:effectRef>
+          <a:fontRef idx="minor">
+            <a:schemeClr val="lt1"/>
+          </a:fontRef>
+        </p:style>
+        <p:txBody>
+          <a:bodyPr wrap="none" lIns="0" tIns="0" rIns="0" bIns="0" rtlCol="0" anchor="ctr" anchorCtr="1"/>
+          <a:lstStyle/>
+          <a:p>
+            <a:pPr lvl="0" algn="ctr"/>
+            <a:r>
+              <a:rPr lang="en-US" altLang="zh-TW" sz="1200" b="1" dirty="0">
+                <a:solidFill>
+                  <a:schemeClr val="tx2"/>
+                </a:solidFill>
+                <a:cs typeface="Calibri" panose="020F0502020204030204" pitchFamily="34" charset="0"/>
+              </a:rPr>
+              <a:t>tanh</a:t>
+            </a:r>
+            <a:endParaRPr lang="en-US" altLang="zh-TW" sz="1200" b="1" baseline="-25000" dirty="0">
+              <a:solidFill>
+                <a:schemeClr val="tx2"/>
+              </a:solidFill>
+            </a:endParaRPr>
+          </a:p>
+        </p:txBody>
+      </p:sp>
+      <p:cxnSp>
+        <p:nvCxnSpPr>
+          <p:cNvPr id="19" name="直線單箭頭接點 18">
+            <a:extLst>
+              <a:ext uri="{FF2B5EF4-FFF2-40B4-BE49-F238E27FC236}">
+                <a16:creationId xmlns:a16="http://schemas.microsoft.com/office/drawing/2014/main" id="{7990C2E5-B935-FE62-81C1-4C191C9CDA43}"/>
+              </a:ext>
+            </a:extLst>
+          </p:cNvPr>
+          <p:cNvCxnSpPr>
+            <a:cxnSpLocks/>
+            <a:endCxn id="16" idx="1"/>
+          </p:cNvCxnSpPr>
+          <p:nvPr/>
+        </p:nvCxnSpPr>
+        <p:spPr>
+          <a:xfrm>
+            <a:off x="307190" y="6038561"/>
+            <a:ext cx="355011" cy="1907"/>
           </a:xfrm>
           <a:prstGeom prst="straightConnector1">
             <a:avLst/>
@@ -21921,6 +21442,4204 @@
                 <a:lumMod val="60000"/>
                 <a:lumOff val="40000"/>
               </a:schemeClr>
+            </a:solidFill>
+            <a:prstDash val="sysDot"/>
+            <a:tailEnd type="triangle" w="sm" len="med"/>
+          </a:ln>
+        </p:spPr>
+        <p:style>
+          <a:lnRef idx="1">
+            <a:schemeClr val="accent1"/>
+          </a:lnRef>
+          <a:fillRef idx="0">
+            <a:schemeClr val="accent1"/>
+          </a:fillRef>
+          <a:effectRef idx="0">
+            <a:schemeClr val="accent1"/>
+          </a:effectRef>
+          <a:fontRef idx="minor">
+            <a:schemeClr val="tx1"/>
+          </a:fontRef>
+        </p:style>
+      </p:cxnSp>
+      <p:cxnSp>
+        <p:nvCxnSpPr>
+          <p:cNvPr id="20" name="直線單箭頭接點 19">
+            <a:extLst>
+              <a:ext uri="{FF2B5EF4-FFF2-40B4-BE49-F238E27FC236}">
+                <a16:creationId xmlns:a16="http://schemas.microsoft.com/office/drawing/2014/main" id="{F2C0B2EB-38AC-627B-54DA-2904282C97B3}"/>
+              </a:ext>
+            </a:extLst>
+          </p:cNvPr>
+          <p:cNvCxnSpPr>
+            <a:cxnSpLocks/>
+            <a:endCxn id="16" idx="3"/>
+          </p:cNvCxnSpPr>
+          <p:nvPr/>
+        </p:nvCxnSpPr>
+        <p:spPr>
+          <a:xfrm flipH="1">
+            <a:off x="868431" y="6038796"/>
+            <a:ext cx="753644" cy="1672"/>
+          </a:xfrm>
+          <a:prstGeom prst="straightConnector1">
+            <a:avLst/>
+          </a:prstGeom>
+          <a:ln w="15875">
+            <a:solidFill>
+              <a:schemeClr val="accent5"/>
+            </a:solidFill>
+            <a:prstDash val="sysDot"/>
+            <a:tailEnd type="triangle" w="sm" len="med"/>
+          </a:ln>
+        </p:spPr>
+        <p:style>
+          <a:lnRef idx="1">
+            <a:schemeClr val="accent1"/>
+          </a:lnRef>
+          <a:fillRef idx="0">
+            <a:schemeClr val="accent1"/>
+          </a:fillRef>
+          <a:effectRef idx="0">
+            <a:schemeClr val="accent1"/>
+          </a:effectRef>
+          <a:fontRef idx="minor">
+            <a:schemeClr val="tx1"/>
+          </a:fontRef>
+        </p:style>
+      </p:cxnSp>
+      <p:cxnSp>
+        <p:nvCxnSpPr>
+          <p:cNvPr id="21" name="直線單箭頭接點 20">
+            <a:extLst>
+              <a:ext uri="{FF2B5EF4-FFF2-40B4-BE49-F238E27FC236}">
+                <a16:creationId xmlns:a16="http://schemas.microsoft.com/office/drawing/2014/main" id="{3E7DC010-8D29-0BDA-C8B0-92B6174413FD}"/>
+              </a:ext>
+            </a:extLst>
+          </p:cNvPr>
+          <p:cNvCxnSpPr>
+            <a:cxnSpLocks/>
+            <a:endCxn id="17" idx="1"/>
+          </p:cNvCxnSpPr>
+          <p:nvPr/>
+        </p:nvCxnSpPr>
+        <p:spPr>
+          <a:xfrm flipV="1">
+            <a:off x="295150" y="6512254"/>
+            <a:ext cx="402345" cy="2647"/>
+          </a:xfrm>
+          <a:prstGeom prst="straightConnector1">
+            <a:avLst/>
+          </a:prstGeom>
+          <a:ln w="15875">
+            <a:solidFill>
+              <a:schemeClr val="accent2">
+                <a:lumMod val="60000"/>
+                <a:lumOff val="40000"/>
+              </a:schemeClr>
+            </a:solidFill>
+            <a:prstDash val="sysDot"/>
+            <a:tailEnd type="triangle" w="sm" len="med"/>
+          </a:ln>
+        </p:spPr>
+        <p:style>
+          <a:lnRef idx="1">
+            <a:schemeClr val="accent1"/>
+          </a:lnRef>
+          <a:fillRef idx="0">
+            <a:schemeClr val="accent1"/>
+          </a:fillRef>
+          <a:effectRef idx="0">
+            <a:schemeClr val="accent1"/>
+          </a:effectRef>
+          <a:fontRef idx="minor">
+            <a:schemeClr val="tx1"/>
+          </a:fontRef>
+        </p:style>
+      </p:cxnSp>
+      <p:cxnSp>
+        <p:nvCxnSpPr>
+          <p:cNvPr id="22" name="直線單箭頭接點 21">
+            <a:extLst>
+              <a:ext uri="{FF2B5EF4-FFF2-40B4-BE49-F238E27FC236}">
+                <a16:creationId xmlns:a16="http://schemas.microsoft.com/office/drawing/2014/main" id="{C367DB9C-706C-6DB1-AB1F-8C984C8D4F40}"/>
+              </a:ext>
+            </a:extLst>
+          </p:cNvPr>
+          <p:cNvCxnSpPr>
+            <a:cxnSpLocks/>
+            <a:endCxn id="17" idx="3"/>
+          </p:cNvCxnSpPr>
+          <p:nvPr/>
+        </p:nvCxnSpPr>
+        <p:spPr>
+          <a:xfrm flipH="1" flipV="1">
+            <a:off x="850320" y="6512254"/>
+            <a:ext cx="771755" cy="1644"/>
+          </a:xfrm>
+          <a:prstGeom prst="straightConnector1">
+            <a:avLst/>
+          </a:prstGeom>
+          <a:ln w="15875">
+            <a:solidFill>
+              <a:schemeClr val="accent5"/>
+            </a:solidFill>
+            <a:prstDash val="sysDot"/>
+            <a:tailEnd type="triangle" w="sm" len="med"/>
+          </a:ln>
+        </p:spPr>
+        <p:style>
+          <a:lnRef idx="1">
+            <a:schemeClr val="accent1"/>
+          </a:lnRef>
+          <a:fillRef idx="0">
+            <a:schemeClr val="accent1"/>
+          </a:fillRef>
+          <a:effectRef idx="0">
+            <a:schemeClr val="accent1"/>
+          </a:effectRef>
+          <a:fontRef idx="minor">
+            <a:schemeClr val="tx1"/>
+          </a:fontRef>
+        </p:style>
+      </p:cxnSp>
+      <p:sp>
+        <p:nvSpPr>
+          <p:cNvPr id="23" name="矩形 22">
+            <a:extLst>
+              <a:ext uri="{FF2B5EF4-FFF2-40B4-BE49-F238E27FC236}">
+                <a16:creationId xmlns:a16="http://schemas.microsoft.com/office/drawing/2014/main" id="{CAC259EE-F6FA-9AEF-1220-71D37A3966E0}"/>
+              </a:ext>
+            </a:extLst>
+          </p:cNvPr>
+          <p:cNvSpPr/>
+          <p:nvPr/>
+        </p:nvSpPr>
+        <p:spPr>
+          <a:xfrm>
+            <a:off x="3757077" y="6369327"/>
+            <a:ext cx="438267" cy="192822"/>
+          </a:xfrm>
+          <a:prstGeom prst="rect">
+            <a:avLst/>
+          </a:prstGeom>
+          <a:solidFill>
+            <a:schemeClr val="bg1">
+              <a:alpha val="60000"/>
+            </a:schemeClr>
+          </a:solidFill>
+          <a:ln w="19050">
+            <a:noFill/>
+            <a:prstDash val="sysDot"/>
+            <a:extLst>
+              <a:ext uri="{C807C97D-BFC1-408E-A445-0C87EB9F89A2}">
+                <ask:lineSketchStyleProps xmlns:ask="http://schemas.microsoft.com/office/drawing/2018/sketchyshapes">
+                  <ask:type>
+                    <ask:lineSketchNone/>
+                  </ask:type>
+                </ask:lineSketchStyleProps>
+              </a:ext>
+            </a:extLst>
+          </a:ln>
+        </p:spPr>
+        <p:style>
+          <a:lnRef idx="2">
+            <a:schemeClr val="accent1">
+              <a:shade val="15000"/>
+            </a:schemeClr>
+          </a:lnRef>
+          <a:fillRef idx="1">
+            <a:schemeClr val="accent1"/>
+          </a:fillRef>
+          <a:effectRef idx="0">
+            <a:schemeClr val="accent1"/>
+          </a:effectRef>
+          <a:fontRef idx="minor">
+            <a:schemeClr val="lt1"/>
+          </a:fontRef>
+        </p:style>
+        <p:txBody>
+          <a:bodyPr wrap="none" lIns="0" tIns="0" rIns="0" bIns="0" rtlCol="0" anchor="ctr" anchorCtr="1"/>
+          <a:lstStyle/>
+          <a:p>
+            <a:pPr lvl="0" algn="ctr"/>
+            <a:r>
+              <a:rPr lang="en-US" altLang="zh-TW" sz="1200" b="1" dirty="0">
+                <a:solidFill>
+                  <a:schemeClr val="tx2"/>
+                </a:solidFill>
+                <a:cs typeface="Calibri" panose="020F0502020204030204" pitchFamily="34" charset="0"/>
+              </a:rPr>
+              <a:t>tanh</a:t>
+            </a:r>
+            <a:endParaRPr lang="en-US" altLang="zh-TW" sz="1200" b="1" baseline="-25000" dirty="0">
+              <a:solidFill>
+                <a:schemeClr val="tx2"/>
+              </a:solidFill>
+            </a:endParaRPr>
+          </a:p>
+        </p:txBody>
+      </p:sp>
+      <p:sp>
+        <p:nvSpPr>
+          <p:cNvPr id="27" name="文字方塊 26">
+            <a:extLst>
+              <a:ext uri="{FF2B5EF4-FFF2-40B4-BE49-F238E27FC236}">
+                <a16:creationId xmlns:a16="http://schemas.microsoft.com/office/drawing/2014/main" id="{7DA902CA-D722-D4AB-6963-ECF5F84BBE19}"/>
+              </a:ext>
+            </a:extLst>
+          </p:cNvPr>
+          <p:cNvSpPr txBox="1"/>
+          <p:nvPr/>
+        </p:nvSpPr>
+        <p:spPr>
+          <a:xfrm>
+            <a:off x="2705454" y="2435705"/>
+            <a:ext cx="498394" cy="232495"/>
+          </a:xfrm>
+          <a:prstGeom prst="rect">
+            <a:avLst/>
+          </a:prstGeom>
+          <a:noFill/>
+        </p:spPr>
+        <p:txBody>
+          <a:bodyPr wrap="none" lIns="0" tIns="0" rIns="0" bIns="0" rtlCol="0" anchor="ctr" anchorCtr="1">
+            <a:noAutofit/>
+          </a:bodyPr>
+          <a:lstStyle/>
+          <a:p>
+            <a:pPr marL="0" marR="0" lvl="0" indent="0" algn="ctr" defTabSz="914400" rtl="0" eaLnBrk="1" fontAlgn="auto" latinLnBrk="0" hangingPunct="1">
+              <a:lnSpc>
+                <a:spcPts val="1200"/>
+              </a:lnSpc>
+              <a:spcBef>
+                <a:spcPts val="0"/>
+              </a:spcBef>
+              <a:spcAft>
+                <a:spcPts val="0"/>
+              </a:spcAft>
+              <a:buClrTx/>
+              <a:buSzTx/>
+              <a:buFontTx/>
+              <a:buNone/>
+              <a:tabLst/>
+              <a:defRPr/>
+            </a:pPr>
+            <a:r>
+              <a:rPr lang="en-US" altLang="zh-TW" sz="1400" b="1" dirty="0">
+                <a:solidFill>
+                  <a:schemeClr val="accent4"/>
+                </a:solidFill>
+              </a:rPr>
+              <a:t>+b</a:t>
+            </a:r>
+            <a:r>
+              <a:rPr kumimoji="0" lang="zh-TW" altLang="zh-TW" sz="1000" b="1" i="0" u="none" strike="noStrike" kern="1200" cap="none" spc="0" normalizeH="0" baseline="0" noProof="0" dirty="0">
+                <a:ln>
+                  <a:noFill/>
+                </a:ln>
+                <a:solidFill>
+                  <a:schemeClr val="accent4"/>
+                </a:solidFill>
+                <a:effectLst/>
+                <a:uLnTx/>
+                <a:uFillTx/>
+                <a:latin typeface="Calibri"/>
+                <a:ea typeface="新細明體" panose="02020500000000000000" pitchFamily="18" charset="-120"/>
+                <a:cs typeface="+mn-cs"/>
+              </a:rPr>
+              <a:t>➔</a:t>
+            </a:r>
+            <a:r>
+              <a:rPr kumimoji="0" lang="en-US" altLang="zh-TW" sz="1000" b="1" i="0" u="none" strike="noStrike" kern="1200" cap="none" spc="0" normalizeH="0" baseline="0" noProof="0" dirty="0">
+                <a:ln>
+                  <a:noFill/>
+                </a:ln>
+                <a:solidFill>
+                  <a:schemeClr val="accent4"/>
+                </a:solidFill>
+                <a:effectLst/>
+                <a:uLnTx/>
+                <a:uFillTx/>
+                <a:latin typeface="Calibri"/>
+                <a:ea typeface="新細明體" panose="02020500000000000000" pitchFamily="18" charset="-120"/>
+                <a:cs typeface="+mn-cs"/>
+              </a:rPr>
+              <a:t> </a:t>
+            </a:r>
+            <a:r>
+              <a:rPr kumimoji="0" lang="el-GR" altLang="zh-TW" sz="1600" b="1" i="0" u="none" strike="noStrike" kern="1200" cap="none" spc="0" normalizeH="0" baseline="0" noProof="0" dirty="0">
+                <a:ln>
+                  <a:noFill/>
+                </a:ln>
+                <a:solidFill>
+                  <a:schemeClr val="accent4"/>
+                </a:solidFill>
+                <a:effectLst/>
+                <a:uLnTx/>
+                <a:uFillTx/>
+                <a:cs typeface="Calibri" panose="020F0502020204030204" pitchFamily="34" charset="0"/>
+              </a:rPr>
+              <a:t>σ</a:t>
+            </a:r>
+            <a:r>
+              <a:rPr kumimoji="0" lang="en-US" altLang="zh-TW" sz="1400" b="1" i="0" u="none" strike="noStrike" kern="1200" cap="none" spc="0" normalizeH="0" baseline="0" noProof="0" dirty="0">
+                <a:ln>
+                  <a:noFill/>
+                </a:ln>
+                <a:solidFill>
+                  <a:schemeClr val="accent4"/>
+                </a:solidFill>
+                <a:effectLst/>
+                <a:uLnTx/>
+                <a:uFillTx/>
+                <a:cs typeface="Calibri" panose="020F0502020204030204" pitchFamily="34" charset="0"/>
+              </a:rPr>
+              <a:t> </a:t>
+            </a:r>
+          </a:p>
+        </p:txBody>
+      </p:sp>
+      <p:sp>
+        <p:nvSpPr>
+          <p:cNvPr id="37" name="文字方塊 36">
+            <a:extLst>
+              <a:ext uri="{FF2B5EF4-FFF2-40B4-BE49-F238E27FC236}">
+                <a16:creationId xmlns:a16="http://schemas.microsoft.com/office/drawing/2014/main" id="{EC0E8637-4215-FA16-993B-E6FE19BD43A2}"/>
+              </a:ext>
+            </a:extLst>
+          </p:cNvPr>
+          <p:cNvSpPr txBox="1"/>
+          <p:nvPr/>
+        </p:nvSpPr>
+        <p:spPr>
+          <a:xfrm>
+            <a:off x="2696844" y="4033946"/>
+            <a:ext cx="733204" cy="258551"/>
+          </a:xfrm>
+          <a:prstGeom prst="rect">
+            <a:avLst/>
+          </a:prstGeom>
+          <a:noFill/>
+        </p:spPr>
+        <p:txBody>
+          <a:bodyPr wrap="none" lIns="0" tIns="0" rIns="0" bIns="0" rtlCol="0" anchor="ctr" anchorCtr="1">
+            <a:noAutofit/>
+          </a:bodyPr>
+          <a:lstStyle/>
+          <a:p>
+            <a:pPr marL="0" marR="0" lvl="0" indent="0" algn="ctr" defTabSz="914400" rtl="0" eaLnBrk="1" fontAlgn="auto" latinLnBrk="0" hangingPunct="1">
+              <a:lnSpc>
+                <a:spcPts val="1200"/>
+              </a:lnSpc>
+              <a:spcBef>
+                <a:spcPts val="0"/>
+              </a:spcBef>
+              <a:spcAft>
+                <a:spcPts val="0"/>
+              </a:spcAft>
+              <a:buClrTx/>
+              <a:buSzTx/>
+              <a:buFontTx/>
+              <a:buNone/>
+              <a:tabLst/>
+              <a:defRPr/>
+            </a:pPr>
+            <a:r>
+              <a:rPr lang="en-US" altLang="zh-TW" sz="1400" b="1" dirty="0">
+                <a:solidFill>
+                  <a:schemeClr val="accent4"/>
+                </a:solidFill>
+              </a:rPr>
+              <a:t>+b</a:t>
+            </a:r>
+            <a:r>
+              <a:rPr kumimoji="0" lang="zh-TW" altLang="zh-TW" sz="1000" b="1" i="0" u="none" strike="noStrike" kern="1200" cap="none" spc="0" normalizeH="0" baseline="0" noProof="0" dirty="0">
+                <a:ln>
+                  <a:noFill/>
+                </a:ln>
+                <a:solidFill>
+                  <a:schemeClr val="accent4"/>
+                </a:solidFill>
+                <a:effectLst/>
+                <a:uLnTx/>
+                <a:uFillTx/>
+                <a:latin typeface="Calibri"/>
+                <a:ea typeface="新細明體" panose="02020500000000000000" pitchFamily="18" charset="-120"/>
+                <a:cs typeface="+mn-cs"/>
+              </a:rPr>
+              <a:t>➔</a:t>
+            </a:r>
+            <a:r>
+              <a:rPr kumimoji="0" lang="en-US" altLang="zh-TW" sz="1400" b="1" i="0" u="none" strike="noStrike" kern="1200" cap="none" spc="0" normalizeH="0" baseline="0" noProof="0" dirty="0">
+                <a:ln>
+                  <a:noFill/>
+                </a:ln>
+                <a:solidFill>
+                  <a:schemeClr val="accent4"/>
+                </a:solidFill>
+                <a:effectLst/>
+                <a:uLnTx/>
+                <a:uFillTx/>
+                <a:latin typeface="Calibri"/>
+                <a:ea typeface="新細明體" panose="02020500000000000000" pitchFamily="18" charset="-120"/>
+                <a:cs typeface="+mn-cs"/>
+              </a:rPr>
+              <a:t> </a:t>
+            </a:r>
+            <a:r>
+              <a:rPr kumimoji="0" lang="el-GR" altLang="zh-TW" sz="1800" b="1" i="0" u="none" strike="noStrike" kern="1200" cap="none" spc="0" normalizeH="0" baseline="0" noProof="0" dirty="0">
+                <a:ln>
+                  <a:noFill/>
+                </a:ln>
+                <a:solidFill>
+                  <a:srgbClr val="8064A2"/>
+                </a:solidFill>
+                <a:effectLst/>
+                <a:uLnTx/>
+                <a:uFillTx/>
+                <a:latin typeface="Calibri"/>
+                <a:ea typeface="新細明體" panose="02020500000000000000" pitchFamily="18" charset="-120"/>
+                <a:cs typeface="Calibri" panose="020F0502020204030204" pitchFamily="34" charset="0"/>
+              </a:rPr>
+              <a:t>σ</a:t>
+            </a:r>
+            <a:endParaRPr kumimoji="0" lang="en-US" altLang="zh-TW" sz="1400" b="1" i="0" u="none" strike="noStrike" kern="1200" cap="none" spc="0" normalizeH="0" baseline="0" noProof="0" dirty="0">
+              <a:ln>
+                <a:noFill/>
+              </a:ln>
+              <a:solidFill>
+                <a:schemeClr val="accent4"/>
+              </a:solidFill>
+              <a:effectLst/>
+              <a:uLnTx/>
+              <a:uFillTx/>
+              <a:cs typeface="Calibri" panose="020F0502020204030204" pitchFamily="34" charset="0"/>
+            </a:endParaRPr>
+          </a:p>
+        </p:txBody>
+      </p:sp>
+      <p:cxnSp>
+        <p:nvCxnSpPr>
+          <p:cNvPr id="45" name="接點: 肘形 44">
+            <a:extLst>
+              <a:ext uri="{FF2B5EF4-FFF2-40B4-BE49-F238E27FC236}">
+                <a16:creationId xmlns:a16="http://schemas.microsoft.com/office/drawing/2014/main" id="{3B47887B-7C3A-06DA-647A-4F2DEE064CB4}"/>
+              </a:ext>
+            </a:extLst>
+          </p:cNvPr>
+          <p:cNvCxnSpPr>
+            <a:cxnSpLocks/>
+            <a:stCxn id="108" idx="1"/>
+            <a:endCxn id="88" idx="3"/>
+          </p:cNvCxnSpPr>
+          <p:nvPr/>
+        </p:nvCxnSpPr>
+        <p:spPr>
+          <a:xfrm rot="10800000">
+            <a:off x="4346760" y="3051764"/>
+            <a:ext cx="441264" cy="415907"/>
+          </a:xfrm>
+          <a:prstGeom prst="bentConnector3">
+            <a:avLst>
+              <a:gd name="adj1" fmla="val 50000"/>
+            </a:avLst>
+          </a:prstGeom>
+          <a:ln w="15875">
+            <a:solidFill>
+              <a:schemeClr val="tx2"/>
+            </a:solidFill>
+            <a:prstDash val="sysDot"/>
+            <a:tailEnd type="triangle" w="sm" len="med"/>
+          </a:ln>
+        </p:spPr>
+        <p:style>
+          <a:lnRef idx="1">
+            <a:schemeClr val="accent1"/>
+          </a:lnRef>
+          <a:fillRef idx="0">
+            <a:schemeClr val="accent1"/>
+          </a:fillRef>
+          <a:effectRef idx="0">
+            <a:schemeClr val="accent1"/>
+          </a:effectRef>
+          <a:fontRef idx="minor">
+            <a:schemeClr val="tx1"/>
+          </a:fontRef>
+        </p:style>
+      </p:cxnSp>
+      <p:sp>
+        <p:nvSpPr>
+          <p:cNvPr id="49" name="文字方塊 48">
+            <a:extLst>
+              <a:ext uri="{FF2B5EF4-FFF2-40B4-BE49-F238E27FC236}">
+                <a16:creationId xmlns:a16="http://schemas.microsoft.com/office/drawing/2014/main" id="{BDA27FC2-E4C8-3138-9905-EFE69276A75E}"/>
+              </a:ext>
+            </a:extLst>
+          </p:cNvPr>
+          <p:cNvSpPr txBox="1"/>
+          <p:nvPr/>
+        </p:nvSpPr>
+        <p:spPr>
+          <a:xfrm>
+            <a:off x="5388527" y="6440213"/>
+            <a:ext cx="415217" cy="184666"/>
+          </a:xfrm>
+          <a:prstGeom prst="rect">
+            <a:avLst/>
+          </a:prstGeom>
+          <a:noFill/>
+        </p:spPr>
+        <p:txBody>
+          <a:bodyPr wrap="square" lIns="0" tIns="0" rIns="0" bIns="0" rtlCol="0" anchor="t">
+            <a:spAutoFit/>
+          </a:bodyPr>
+          <a:lstStyle/>
+          <a:p>
+            <a:pPr algn="ctr"/>
+            <a:r>
+              <a:rPr lang="en-US" altLang="zh-TW" sz="1200" b="0" dirty="0">
+                <a:latin typeface="ADLaM Display" panose="02010000000000000000" pitchFamily="2" charset="0"/>
+                <a:ea typeface="ADLaM Display" panose="02010000000000000000" pitchFamily="2" charset="0"/>
+                <a:cs typeface="ADLaM Display" panose="02010000000000000000" pitchFamily="2" charset="0"/>
+              </a:rPr>
+              <a:t>h1(t)</a:t>
+            </a:r>
+            <a:endParaRPr lang="zh-TW" altLang="en-US" sz="1200" dirty="0"/>
+          </a:p>
+        </p:txBody>
+      </p:sp>
+      <p:sp>
+        <p:nvSpPr>
+          <p:cNvPr id="69" name="文字方塊 68">
+            <a:extLst>
+              <a:ext uri="{FF2B5EF4-FFF2-40B4-BE49-F238E27FC236}">
+                <a16:creationId xmlns:a16="http://schemas.microsoft.com/office/drawing/2014/main" id="{687A1E7C-3827-EB8D-4AD8-128468D0B531}"/>
+              </a:ext>
+            </a:extLst>
+          </p:cNvPr>
+          <p:cNvSpPr txBox="1"/>
+          <p:nvPr/>
+        </p:nvSpPr>
+        <p:spPr>
+          <a:xfrm>
+            <a:off x="496322" y="6276994"/>
+            <a:ext cx="782767" cy="184666"/>
+          </a:xfrm>
+          <a:prstGeom prst="rect">
+            <a:avLst/>
+          </a:prstGeom>
+          <a:noFill/>
+        </p:spPr>
+        <p:txBody>
+          <a:bodyPr wrap="square" lIns="0" tIns="0" rIns="0" bIns="0" rtlCol="0" anchor="t">
+            <a:spAutoFit/>
+          </a:bodyPr>
+          <a:lstStyle/>
+          <a:p>
+            <a:r>
+              <a:rPr lang="en-US" altLang="zh-TW" sz="1200" dirty="0">
+                <a:latin typeface="ADLaM Display" panose="02010000000000000000" pitchFamily="2" charset="0"/>
+                <a:ea typeface="ADLaM Display" panose="02010000000000000000" pitchFamily="2" charset="0"/>
+                <a:cs typeface="ADLaM Display" panose="02010000000000000000" pitchFamily="2" charset="0"/>
+              </a:rPr>
+              <a:t>I</a:t>
+            </a:r>
+            <a:r>
+              <a:rPr lang="en-US" altLang="zh-TW" sz="1200" b="0" dirty="0">
+                <a:latin typeface="ADLaM Display" panose="02010000000000000000" pitchFamily="2" charset="0"/>
+                <a:ea typeface="ADLaM Display" panose="02010000000000000000" pitchFamily="2" charset="0"/>
+                <a:cs typeface="ADLaM Display" panose="02010000000000000000" pitchFamily="2" charset="0"/>
+              </a:rPr>
+              <a:t>nput h0(t)</a:t>
+            </a:r>
+            <a:endParaRPr lang="zh-TW" altLang="en-US" sz="1200" dirty="0"/>
+          </a:p>
+        </p:txBody>
+      </p:sp>
+      <p:sp>
+        <p:nvSpPr>
+          <p:cNvPr id="71" name="文字方塊 70">
+            <a:extLst>
+              <a:ext uri="{FF2B5EF4-FFF2-40B4-BE49-F238E27FC236}">
+                <a16:creationId xmlns:a16="http://schemas.microsoft.com/office/drawing/2014/main" id="{B1A1E97A-4774-FDA2-7F81-3825B10F33C3}"/>
+              </a:ext>
+            </a:extLst>
+          </p:cNvPr>
+          <p:cNvSpPr txBox="1"/>
+          <p:nvPr/>
+        </p:nvSpPr>
+        <p:spPr>
+          <a:xfrm>
+            <a:off x="620881" y="1772816"/>
+            <a:ext cx="782767" cy="184666"/>
+          </a:xfrm>
+          <a:prstGeom prst="rect">
+            <a:avLst/>
+          </a:prstGeom>
+          <a:noFill/>
+        </p:spPr>
+        <p:txBody>
+          <a:bodyPr wrap="square" lIns="0" tIns="0" rIns="0" bIns="0" rtlCol="0" anchor="t">
+            <a:spAutoFit/>
+          </a:bodyPr>
+          <a:lstStyle/>
+          <a:p>
+            <a:r>
+              <a:rPr lang="en-US" altLang="zh-TW" sz="1200" dirty="0">
+                <a:latin typeface="ADLaM Display" panose="02010000000000000000" pitchFamily="2" charset="0"/>
+                <a:ea typeface="ADLaM Display" panose="02010000000000000000" pitchFamily="2" charset="0"/>
+                <a:cs typeface="ADLaM Display" panose="02010000000000000000" pitchFamily="2" charset="0"/>
+              </a:rPr>
+              <a:t>I</a:t>
+            </a:r>
+            <a:r>
+              <a:rPr lang="en-US" altLang="zh-TW" sz="1200" b="0" dirty="0">
+                <a:latin typeface="ADLaM Display" panose="02010000000000000000" pitchFamily="2" charset="0"/>
+                <a:ea typeface="ADLaM Display" panose="02010000000000000000" pitchFamily="2" charset="0"/>
+                <a:cs typeface="ADLaM Display" panose="02010000000000000000" pitchFamily="2" charset="0"/>
+              </a:rPr>
+              <a:t>nput x(t)</a:t>
+            </a:r>
+            <a:endParaRPr lang="zh-TW" altLang="en-US" sz="1200" dirty="0"/>
+          </a:p>
+        </p:txBody>
+      </p:sp>
+      <p:sp>
+        <p:nvSpPr>
+          <p:cNvPr id="74" name="文字方塊 73">
+            <a:extLst>
+              <a:ext uri="{FF2B5EF4-FFF2-40B4-BE49-F238E27FC236}">
+                <a16:creationId xmlns:a16="http://schemas.microsoft.com/office/drawing/2014/main" id="{06EFEB9E-A81C-1674-DBBD-69AB5910C07B}"/>
+              </a:ext>
+            </a:extLst>
+          </p:cNvPr>
+          <p:cNvSpPr txBox="1"/>
+          <p:nvPr/>
+        </p:nvSpPr>
+        <p:spPr>
+          <a:xfrm>
+            <a:off x="4856316" y="1844824"/>
+            <a:ext cx="415217" cy="184666"/>
+          </a:xfrm>
+          <a:prstGeom prst="rect">
+            <a:avLst/>
+          </a:prstGeom>
+          <a:noFill/>
+        </p:spPr>
+        <p:txBody>
+          <a:bodyPr wrap="square" lIns="0" tIns="0" rIns="0" bIns="0" rtlCol="0" anchor="t">
+            <a:spAutoFit/>
+          </a:bodyPr>
+          <a:lstStyle/>
+          <a:p>
+            <a:pPr algn="ctr"/>
+            <a:r>
+              <a:rPr lang="en-US" altLang="zh-TW" sz="1200" b="0" dirty="0">
+                <a:latin typeface="ADLaM Display" panose="02010000000000000000" pitchFamily="2" charset="0"/>
+                <a:ea typeface="ADLaM Display" panose="02010000000000000000" pitchFamily="2" charset="0"/>
+                <a:cs typeface="ADLaM Display" panose="02010000000000000000" pitchFamily="2" charset="0"/>
+              </a:rPr>
+              <a:t>h(t)</a:t>
+            </a:r>
+            <a:endParaRPr lang="zh-TW" altLang="en-US" sz="1200" dirty="0"/>
+          </a:p>
+        </p:txBody>
+      </p:sp>
+      <p:sp>
+        <p:nvSpPr>
+          <p:cNvPr id="206" name="文字方塊 205">
+            <a:extLst>
+              <a:ext uri="{FF2B5EF4-FFF2-40B4-BE49-F238E27FC236}">
+                <a16:creationId xmlns:a16="http://schemas.microsoft.com/office/drawing/2014/main" id="{D7160AE8-7A03-0531-A60B-836455A6276D}"/>
+              </a:ext>
+            </a:extLst>
+          </p:cNvPr>
+          <p:cNvSpPr txBox="1"/>
+          <p:nvPr/>
+        </p:nvSpPr>
+        <p:spPr>
+          <a:xfrm>
+            <a:off x="3071475" y="2967169"/>
+            <a:ext cx="708437" cy="162801"/>
+          </a:xfrm>
+          <a:prstGeom prst="rect">
+            <a:avLst/>
+          </a:prstGeom>
+          <a:noFill/>
+        </p:spPr>
+        <p:txBody>
+          <a:bodyPr wrap="square" lIns="0" tIns="0" rIns="0" bIns="0" rtlCol="0">
+            <a:spAutoFit/>
+          </a:bodyPr>
+          <a:lstStyle/>
+          <a:p>
+            <a:pPr marL="0" marR="0" lvl="0" indent="0" algn="ctr" defTabSz="914400" rtl="0" eaLnBrk="1" fontAlgn="auto" latinLnBrk="0" hangingPunct="1">
+              <a:lnSpc>
+                <a:spcPts val="1200"/>
+              </a:lnSpc>
+              <a:spcBef>
+                <a:spcPts val="0"/>
+              </a:spcBef>
+              <a:spcAft>
+                <a:spcPts val="0"/>
+              </a:spcAft>
+              <a:buClrTx/>
+              <a:buSzTx/>
+              <a:buFontTx/>
+              <a:buNone/>
+              <a:tabLst/>
+              <a:defRPr/>
+            </a:pPr>
+            <a:r>
+              <a:rPr kumimoji="0" lang="en-US" altLang="zh-TW" sz="1400" b="1" i="0" u="none" strike="noStrike" kern="1200" cap="none" spc="0" normalizeH="0" baseline="0" noProof="0" dirty="0">
+                <a:ln>
+                  <a:noFill/>
+                </a:ln>
+                <a:solidFill>
+                  <a:srgbClr val="8064A2"/>
+                </a:solidFill>
+                <a:effectLst/>
+                <a:uLnTx/>
+                <a:uFillTx/>
+                <a:latin typeface="Calibri"/>
+                <a:ea typeface="新細明體" panose="02020500000000000000" pitchFamily="18" charset="-120"/>
+                <a:cs typeface="+mn-cs"/>
+              </a:rPr>
+              <a:t>+b</a:t>
+            </a:r>
+            <a:r>
+              <a:rPr kumimoji="0" lang="zh-TW" altLang="zh-TW" sz="1000" b="1" i="0" u="none" strike="noStrike" kern="1200" cap="none" spc="0" normalizeH="0" baseline="0" noProof="0" dirty="0">
+                <a:ln>
+                  <a:noFill/>
+                </a:ln>
+                <a:solidFill>
+                  <a:srgbClr val="8064A2"/>
+                </a:solidFill>
+                <a:effectLst/>
+                <a:uLnTx/>
+                <a:uFillTx/>
+                <a:latin typeface="Calibri"/>
+                <a:ea typeface="新細明體" panose="02020500000000000000" pitchFamily="18" charset="-120"/>
+                <a:cs typeface="+mn-cs"/>
+              </a:rPr>
+              <a:t>➔</a:t>
+            </a:r>
+            <a:r>
+              <a:rPr kumimoji="0" lang="en-US" altLang="zh-TW" sz="1000" b="1" i="0" u="none" strike="noStrike" kern="1200" cap="none" spc="0" normalizeH="0" baseline="0" noProof="0" dirty="0">
+                <a:ln>
+                  <a:noFill/>
+                </a:ln>
+                <a:solidFill>
+                  <a:srgbClr val="8064A2"/>
+                </a:solidFill>
+                <a:effectLst/>
+                <a:uLnTx/>
+                <a:uFillTx/>
+                <a:latin typeface="Calibri"/>
+                <a:ea typeface="新細明體" panose="02020500000000000000" pitchFamily="18" charset="-120"/>
+                <a:cs typeface="+mn-cs"/>
+              </a:rPr>
+              <a:t> </a:t>
+            </a:r>
+            <a:r>
+              <a:rPr kumimoji="0" lang="en-US" altLang="zh-TW" sz="1400" b="1" i="0" u="none" strike="noStrike" kern="1200" cap="none" spc="0" normalizeH="0" baseline="0" noProof="0" dirty="0">
+                <a:ln>
+                  <a:noFill/>
+                </a:ln>
+                <a:solidFill>
+                  <a:srgbClr val="8064A2"/>
+                </a:solidFill>
+                <a:effectLst/>
+                <a:uLnTx/>
+                <a:uFillTx/>
+                <a:latin typeface="Calibri"/>
+                <a:ea typeface="新細明體" panose="02020500000000000000" pitchFamily="18" charset="-120"/>
+                <a:cs typeface="Calibri" panose="020F0502020204030204" pitchFamily="34" charset="0"/>
+              </a:rPr>
+              <a:t>tanh </a:t>
+            </a:r>
+          </a:p>
+        </p:txBody>
+      </p:sp>
+      <p:sp>
+        <p:nvSpPr>
+          <p:cNvPr id="77" name="文字方塊 76">
+            <a:extLst>
+              <a:ext uri="{FF2B5EF4-FFF2-40B4-BE49-F238E27FC236}">
+                <a16:creationId xmlns:a16="http://schemas.microsoft.com/office/drawing/2014/main" id="{5636790C-44F1-422D-C96B-0684D774D0CF}"/>
+              </a:ext>
+            </a:extLst>
+          </p:cNvPr>
+          <p:cNvSpPr txBox="1"/>
+          <p:nvPr/>
+        </p:nvSpPr>
+        <p:spPr>
+          <a:xfrm>
+            <a:off x="3224212" y="3160018"/>
+            <a:ext cx="339676" cy="133397"/>
+          </a:xfrm>
+          <a:prstGeom prst="rect">
+            <a:avLst/>
+          </a:prstGeom>
+          <a:noFill/>
+        </p:spPr>
+        <p:txBody>
+          <a:bodyPr wrap="none" lIns="0" tIns="0" rIns="0" bIns="0" rtlCol="0" anchor="ctr" anchorCtr="1">
+            <a:noAutofit/>
+          </a:bodyPr>
+          <a:lstStyle/>
+          <a:p>
+            <a:pPr algn="ctr">
+              <a:lnSpc>
+                <a:spcPts val="1400"/>
+              </a:lnSpc>
+            </a:pPr>
+            <a:r>
+              <a:rPr lang="en-US" altLang="zh-TW" sz="1400" b="1" dirty="0">
+                <a:solidFill>
+                  <a:schemeClr val="accent4"/>
+                </a:solidFill>
+                <a:ea typeface="ADLaM Display" panose="02010000000000000000" pitchFamily="2" charset="0"/>
+                <a:cs typeface="ADLaM Display" panose="02010000000000000000" pitchFamily="2" charset="0"/>
+              </a:rPr>
+              <a:t>= </a:t>
+            </a:r>
+            <a:r>
+              <a:rPr lang="en-US" altLang="zh-TW" sz="1400" b="1" dirty="0">
+                <a:solidFill>
+                  <a:schemeClr val="accent4"/>
+                </a:solidFill>
+                <a:latin typeface="Calibri" panose="020F0502020204030204" pitchFamily="34" charset="0"/>
+                <a:ea typeface="Calibri" panose="020F0502020204030204" pitchFamily="34" charset="0"/>
+                <a:cs typeface="Calibri" panose="020F0502020204030204" pitchFamily="34" charset="0"/>
+              </a:rPr>
+              <a:t>€</a:t>
+            </a:r>
+            <a:r>
+              <a:rPr lang="en-US" altLang="zh-TW" sz="1400" b="1" dirty="0">
+                <a:solidFill>
+                  <a:schemeClr val="accent4"/>
+                </a:solidFill>
+                <a:ea typeface="ADLaM Display" panose="02010000000000000000" pitchFamily="2" charset="0"/>
+                <a:cs typeface="ADLaM Display" panose="02010000000000000000" pitchFamily="2" charset="0"/>
+              </a:rPr>
+              <a:t>4</a:t>
+            </a:r>
+            <a:endParaRPr lang="zh-TW" altLang="en-US" sz="1400" b="1" baseline="-25000" dirty="0">
+              <a:solidFill>
+                <a:schemeClr val="accent4"/>
+              </a:solidFill>
+            </a:endParaRPr>
+          </a:p>
+        </p:txBody>
+      </p:sp>
+      <p:grpSp>
+        <p:nvGrpSpPr>
+          <p:cNvPr id="78" name="群組 77">
+            <a:extLst>
+              <a:ext uri="{FF2B5EF4-FFF2-40B4-BE49-F238E27FC236}">
+                <a16:creationId xmlns:a16="http://schemas.microsoft.com/office/drawing/2014/main" id="{3F666D54-1D00-2357-4408-3AF7641B328D}"/>
+              </a:ext>
+            </a:extLst>
+          </p:cNvPr>
+          <p:cNvGrpSpPr/>
+          <p:nvPr/>
+        </p:nvGrpSpPr>
+        <p:grpSpPr>
+          <a:xfrm>
+            <a:off x="6480938" y="6045472"/>
+            <a:ext cx="2482283" cy="446292"/>
+            <a:chOff x="6047368" y="1223009"/>
+            <a:chExt cx="2482283" cy="446292"/>
+          </a:xfrm>
+        </p:grpSpPr>
+        <mc:AlternateContent xmlns:mc="http://schemas.openxmlformats.org/markup-compatibility/2006">
+          <mc:Choice xmlns:a14="http://schemas.microsoft.com/office/drawing/2010/main" Requires="a14">
+            <p:sp>
+              <p:nvSpPr>
+                <p:cNvPr id="79" name="文字方塊 78">
+                  <a:extLst>
+                    <a:ext uri="{FF2B5EF4-FFF2-40B4-BE49-F238E27FC236}">
+                      <a16:creationId xmlns:a16="http://schemas.microsoft.com/office/drawing/2014/main" id="{E29BCC17-8CF9-03AE-F9AD-954710B0C938}"/>
+                    </a:ext>
+                  </a:extLst>
+                </p:cNvPr>
+                <p:cNvSpPr txBox="1"/>
+                <p:nvPr/>
+              </p:nvSpPr>
+              <p:spPr>
+                <a:xfrm>
+                  <a:off x="6047368" y="1453601"/>
+                  <a:ext cx="2482283" cy="215700"/>
+                </a:xfrm>
+                <a:prstGeom prst="rect">
+                  <a:avLst/>
+                </a:prstGeom>
+                <a:solidFill>
+                  <a:schemeClr val="bg1">
+                    <a:lumMod val="95000"/>
+                  </a:schemeClr>
+                </a:solidFill>
+              </p:spPr>
+              <p:txBody>
+                <a:bodyPr wrap="none" lIns="0" tIns="0" rIns="0" bIns="0" rtlCol="0" anchor="t">
+                  <a:spAutoFit/>
+                </a:bodyPr>
+                <a:lstStyle/>
+                <a:p>
+                  <a:pPr/>
+                  <a14:m>
+                    <m:oMathPara xmlns:m="http://schemas.openxmlformats.org/officeDocument/2006/math">
+                      <m:oMathParaPr>
+                        <m:jc m:val="left"/>
+                      </m:oMathParaPr>
+                      <m:oMath>
+                        <m:r>
+                          <m:rPr>
+                            <m:sty m:val="p"/>
+                          </m:rPr>
+                          <a:rPr lang="en-US" altLang="zh-TW" sz="1200" b="0" i="0" smtClean="0">
+                            <a:latin typeface="Cambria Math" panose="02040503050406030204" pitchFamily="18" charset="0"/>
+                          </a:rPr>
+                          <m:t>tanh</m:t>
+                        </m:r>
+                        <m:d>
+                          <m:dPr>
+                            <m:ctrlPr>
+                              <a:rPr lang="en-US" altLang="zh-TW" sz="1200" b="1" i="1">
+                                <a:solidFill>
+                                  <a:schemeClr val="accent2"/>
+                                </a:solidFill>
+                                <a:latin typeface="Cambria Math" panose="02040503050406030204" pitchFamily="18" charset="0"/>
+                              </a:rPr>
+                            </m:ctrlPr>
+                          </m:dPr>
+                          <m:e>
+                            <m:sSub>
+                              <m:sSubPr>
+                                <m:ctrlPr>
+                                  <a:rPr lang="en-US" altLang="zh-TW" sz="1200" b="1" i="0">
+                                    <a:solidFill>
+                                      <a:schemeClr val="accent2"/>
+                                    </a:solidFill>
+                                    <a:latin typeface="Cambria Math" panose="02040503050406030204" pitchFamily="18" charset="0"/>
+                                  </a:rPr>
+                                </m:ctrlPr>
+                              </m:sSubPr>
+                              <m:e>
+                                <m:r>
+                                  <a:rPr lang="en-US" altLang="zh-TW" sz="1200" b="1" i="0">
+                                    <a:solidFill>
+                                      <a:schemeClr val="accent2"/>
+                                    </a:solidFill>
+                                    <a:latin typeface="Cambria Math" panose="02040503050406030204" pitchFamily="18" charset="0"/>
+                                  </a:rPr>
+                                  <m:t>𝐡</m:t>
+                                </m:r>
+                              </m:e>
+                              <m:sub>
+                                <m:r>
+                                  <a:rPr lang="en-US" altLang="zh-TW" sz="1200" i="1">
+                                    <a:solidFill>
+                                      <a:schemeClr val="accent2"/>
+                                    </a:solidFill>
+                                    <a:latin typeface="Cambria Math" panose="02040503050406030204" pitchFamily="18" charset="0"/>
+                                  </a:rPr>
+                                  <m:t>(</m:t>
+                                </m:r>
+                                <m:r>
+                                  <a:rPr lang="en-US" altLang="zh-TW" sz="1200" b="0" i="1" smtClean="0">
+                                    <a:solidFill>
+                                      <a:schemeClr val="accent2"/>
+                                    </a:solidFill>
+                                    <a:latin typeface="Cambria Math" panose="02040503050406030204" pitchFamily="18" charset="0"/>
+                                  </a:rPr>
+                                  <m:t>#</m:t>
+                                </m:r>
+                                <m:r>
+                                  <a:rPr lang="en-US" altLang="zh-TW" sz="1200" i="1" smtClean="0">
+                                    <a:solidFill>
+                                      <a:schemeClr val="accent2"/>
+                                    </a:solidFill>
+                                    <a:latin typeface="Cambria Math" panose="02040503050406030204" pitchFamily="18" charset="0"/>
+                                  </a:rPr>
+                                  <m:t>−</m:t>
+                                </m:r>
+                                <m:r>
+                                  <a:rPr lang="en-US" altLang="zh-TW" sz="1200" b="0" i="1" smtClean="0">
+                                    <a:solidFill>
+                                      <a:schemeClr val="accent2"/>
+                                    </a:solidFill>
+                                    <a:latin typeface="Cambria Math" panose="02040503050406030204" pitchFamily="18" charset="0"/>
+                                  </a:rPr>
+                                  <m:t>1,   </m:t>
+                                </m:r>
+                                <m:r>
+                                  <m:rPr>
+                                    <m:sty m:val="p"/>
+                                  </m:rPr>
+                                  <a:rPr lang="en-US" altLang="zh-TW" sz="1200" b="0" i="1" smtClean="0">
+                                    <a:solidFill>
+                                      <a:schemeClr val="accent2"/>
+                                    </a:solidFill>
+                                    <a:latin typeface="Cambria Math" panose="02040503050406030204" pitchFamily="18" charset="0"/>
+                                  </a:rPr>
+                                  <m:t>t</m:t>
+                                </m:r>
+                                <m:r>
+                                  <a:rPr lang="en-US" altLang="zh-TW" sz="1200" b="0" i="1" smtClean="0">
+                                    <a:solidFill>
+                                      <a:schemeClr val="accent2"/>
+                                    </a:solidFill>
+                                    <a:latin typeface="Cambria Math" panose="02040503050406030204" pitchFamily="18" charset="0"/>
+                                  </a:rPr>
+                                  <m:t>)</m:t>
+                                </m:r>
+                              </m:sub>
+                            </m:sSub>
+                            <m:r>
+                              <a:rPr lang="en-US" altLang="zh-TW" sz="1200" b="1">
+                                <a:solidFill>
+                                  <a:schemeClr val="accent2">
+                                    <a:lumMod val="75000"/>
+                                  </a:schemeClr>
+                                </a:solidFill>
+                                <a:latin typeface="Cambria Math" panose="02040503050406030204" pitchFamily="18" charset="0"/>
+                              </a:rPr>
+                              <m:t>𝐖</m:t>
+                            </m:r>
+                            <m:r>
+                              <a:rPr lang="en-US" altLang="zh-TW" sz="1200" b="1" i="0" smtClean="0">
+                                <a:solidFill>
+                                  <a:schemeClr val="accent2">
+                                    <a:lumMod val="75000"/>
+                                  </a:schemeClr>
+                                </a:solidFill>
+                                <a:latin typeface="Cambria Math" panose="02040503050406030204" pitchFamily="18" charset="0"/>
+                              </a:rPr>
+                              <m:t>#</m:t>
+                            </m:r>
+                            <m:r>
+                              <a:rPr lang="en-US" altLang="zh-TW" sz="1200" b="0" i="1" smtClean="0">
+                                <a:solidFill>
+                                  <a:schemeClr val="tx1"/>
+                                </a:solidFill>
+                                <a:latin typeface="Cambria Math" panose="02040503050406030204" pitchFamily="18" charset="0"/>
+                              </a:rPr>
+                              <m:t>+</m:t>
+                            </m:r>
+                            <m:sSub>
+                              <m:sSubPr>
+                                <m:ctrlPr>
+                                  <a:rPr lang="en-US" altLang="zh-TW" sz="1200" b="0" i="1" smtClean="0">
+                                    <a:solidFill>
+                                      <a:schemeClr val="accent5">
+                                        <a:lumMod val="75000"/>
+                                      </a:schemeClr>
+                                    </a:solidFill>
+                                    <a:latin typeface="Cambria Math" panose="02040503050406030204" pitchFamily="18" charset="0"/>
+                                  </a:rPr>
+                                </m:ctrlPr>
+                              </m:sSubPr>
+                              <m:e>
+                                <m:r>
+                                  <m:rPr>
+                                    <m:sty m:val="p"/>
+                                  </m:rPr>
+                                  <a:rPr lang="en-US" altLang="zh-TW" sz="1200" b="0" i="1" smtClean="0">
+                                    <a:solidFill>
+                                      <a:schemeClr val="accent5">
+                                        <a:lumMod val="75000"/>
+                                      </a:schemeClr>
+                                    </a:solidFill>
+                                    <a:latin typeface="Cambria Math" panose="02040503050406030204" pitchFamily="18" charset="0"/>
+                                  </a:rPr>
+                                  <m:t>h</m:t>
+                                </m:r>
+                              </m:e>
+                              <m:sub>
+                                <m:r>
+                                  <a:rPr lang="en-US" altLang="zh-TW" sz="1200" b="0" i="1" smtClean="0">
+                                    <a:solidFill>
+                                      <a:schemeClr val="accent5">
+                                        <a:lumMod val="75000"/>
+                                      </a:schemeClr>
+                                    </a:solidFill>
+                                    <a:latin typeface="Cambria Math" panose="02040503050406030204" pitchFamily="18" charset="0"/>
+                                  </a:rPr>
+                                  <m:t>(</m:t>
+                                </m:r>
+                                <m:r>
+                                  <a:rPr lang="en-US" altLang="zh-TW" sz="1200" i="1">
+                                    <a:solidFill>
+                                      <a:schemeClr val="accent5">
+                                        <a:lumMod val="75000"/>
+                                      </a:schemeClr>
+                                    </a:solidFill>
+                                    <a:latin typeface="Cambria Math" panose="02040503050406030204" pitchFamily="18" charset="0"/>
+                                  </a:rPr>
+                                  <m:t>#</m:t>
+                                </m:r>
+                                <m:r>
+                                  <a:rPr lang="en-US" altLang="zh-TW" sz="1200" i="1" smtClean="0">
+                                    <a:solidFill>
+                                      <a:schemeClr val="accent5">
+                                        <a:lumMod val="75000"/>
+                                      </a:schemeClr>
+                                    </a:solidFill>
+                                    <a:latin typeface="Cambria Math" panose="02040503050406030204" pitchFamily="18" charset="0"/>
+                                  </a:rPr>
+                                  <m:t>,</m:t>
+                                </m:r>
+                                <m:r>
+                                  <a:rPr lang="zh-TW" altLang="en-US" sz="1200" i="1">
+                                    <a:solidFill>
+                                      <a:schemeClr val="accent5">
+                                        <a:lumMod val="75000"/>
+                                      </a:schemeClr>
+                                    </a:solidFill>
+                                    <a:latin typeface="Cambria Math" panose="02040503050406030204" pitchFamily="18" charset="0"/>
+                                  </a:rPr>
+                                  <m:t> </m:t>
+                                </m:r>
+                                <m:r>
+                                  <a:rPr lang="en-US" altLang="zh-TW" sz="1200" b="0" i="1" smtClean="0">
+                                    <a:solidFill>
+                                      <a:schemeClr val="accent5">
+                                        <a:lumMod val="75000"/>
+                                      </a:schemeClr>
+                                    </a:solidFill>
+                                    <a:latin typeface="Cambria Math" panose="02040503050406030204" pitchFamily="18" charset="0"/>
+                                  </a:rPr>
+                                  <m:t> </m:t>
+                                </m:r>
+                                <m:r>
+                                  <m:rPr>
+                                    <m:sty m:val="p"/>
+                                  </m:rPr>
+                                  <a:rPr lang="en-US" altLang="zh-TW" sz="1200" b="0" i="1" smtClean="0">
+                                    <a:solidFill>
+                                      <a:schemeClr val="accent5">
+                                        <a:lumMod val="75000"/>
+                                      </a:schemeClr>
+                                    </a:solidFill>
+                                    <a:latin typeface="Cambria Math" panose="02040503050406030204" pitchFamily="18" charset="0"/>
+                                  </a:rPr>
+                                  <m:t>t</m:t>
+                                </m:r>
+                                <m:r>
+                                  <a:rPr lang="en-US" altLang="zh-TW" sz="1200" b="0" i="1" smtClean="0">
+                                    <a:solidFill>
+                                      <a:schemeClr val="accent5">
+                                        <a:lumMod val="75000"/>
+                                      </a:schemeClr>
+                                    </a:solidFill>
+                                    <a:latin typeface="Cambria Math" panose="02040503050406030204" pitchFamily="18" charset="0"/>
+                                  </a:rPr>
+                                  <m:t>−1)</m:t>
+                                </m:r>
+                              </m:sub>
+                            </m:sSub>
+                            <m:r>
+                              <a:rPr lang="en-US" altLang="zh-TW" sz="1200" b="1" i="0" smtClean="0">
+                                <a:solidFill>
+                                  <a:schemeClr val="accent1">
+                                    <a:lumMod val="75000"/>
+                                  </a:schemeClr>
+                                </a:solidFill>
+                                <a:latin typeface="Cambria Math" panose="02040503050406030204" pitchFamily="18" charset="0"/>
+                              </a:rPr>
+                              <m:t>𝐔</m:t>
+                            </m:r>
+                            <m:r>
+                              <a:rPr lang="en-US" altLang="zh-TW" sz="1200" b="1" i="0" smtClean="0">
+                                <a:solidFill>
+                                  <a:schemeClr val="accent1">
+                                    <a:lumMod val="75000"/>
+                                  </a:schemeClr>
+                                </a:solidFill>
+                                <a:latin typeface="Cambria Math" panose="02040503050406030204" pitchFamily="18" charset="0"/>
+                              </a:rPr>
+                              <m:t>#+</m:t>
+                            </m:r>
+                            <m:r>
+                              <m:rPr>
+                                <m:sty m:val="p"/>
+                              </m:rPr>
+                              <a:rPr lang="en-US" altLang="zh-TW" sz="1200" b="0" i="1" smtClean="0">
+                                <a:latin typeface="Cambria Math" panose="02040503050406030204" pitchFamily="18" charset="0"/>
+                              </a:rPr>
+                              <m:t>b</m:t>
+                            </m:r>
+                            <m:r>
+                              <a:rPr lang="en-US" altLang="zh-TW" sz="1200" b="0" i="1" smtClean="0">
+                                <a:latin typeface="Cambria Math" panose="02040503050406030204" pitchFamily="18" charset="0"/>
+                              </a:rPr>
+                              <m:t>#</m:t>
+                            </m:r>
+                          </m:e>
+                        </m:d>
+                      </m:oMath>
+                    </m:oMathPara>
+                  </a14:m>
+                  <a:endParaRPr lang="zh-TW" altLang="en-US" sz="1200" dirty="0"/>
+                </a:p>
+              </p:txBody>
+            </p:sp>
+          </mc:Choice>
+          <mc:Fallback>
+            <p:sp>
+              <p:nvSpPr>
+                <p:cNvPr id="79" name="文字方塊 78">
+                  <a:extLst>
+                    <a:ext uri="{FF2B5EF4-FFF2-40B4-BE49-F238E27FC236}">
+                      <a16:creationId xmlns:a16="http://schemas.microsoft.com/office/drawing/2014/main" id="{E29BCC17-8CF9-03AE-F9AD-954710B0C938}"/>
+                    </a:ext>
+                  </a:extLst>
+                </p:cNvPr>
+                <p:cNvSpPr txBox="1">
+                  <a:spLocks noRot="1" noChangeAspect="1" noMove="1" noResize="1" noEditPoints="1" noAdjustHandles="1" noChangeArrowheads="1" noChangeShapeType="1" noTextEdit="1"/>
+                </p:cNvSpPr>
+                <p:nvPr/>
+              </p:nvSpPr>
+              <p:spPr>
+                <a:xfrm>
+                  <a:off x="6047368" y="1453601"/>
+                  <a:ext cx="2482283" cy="215700"/>
+                </a:xfrm>
+                <a:prstGeom prst="rect">
+                  <a:avLst/>
+                </a:prstGeom>
+                <a:blipFill>
+                  <a:blip r:embed="rId12"/>
+                  <a:stretch>
+                    <a:fillRect l="-2211" b="-25714"/>
+                  </a:stretch>
+                </a:blipFill>
+              </p:spPr>
+              <p:txBody>
+                <a:bodyPr/>
+                <a:lstStyle/>
+                <a:p>
+                  <a:r>
+                    <a:rPr lang="zh-TW" altLang="en-US">
+                      <a:noFill/>
+                    </a:rPr>
+                    <a:t> </a:t>
+                  </a:r>
+                </a:p>
+              </p:txBody>
+            </p:sp>
+          </mc:Fallback>
+        </mc:AlternateContent>
+        <p:sp>
+          <p:nvSpPr>
+            <p:cNvPr id="81" name="矩形 80">
+              <a:extLst>
+                <a:ext uri="{FF2B5EF4-FFF2-40B4-BE49-F238E27FC236}">
+                  <a16:creationId xmlns:a16="http://schemas.microsoft.com/office/drawing/2014/main" id="{2677B485-33BD-D443-495C-206A48618F57}"/>
+                </a:ext>
+              </a:extLst>
+            </p:cNvPr>
+            <p:cNvSpPr/>
+            <p:nvPr/>
+          </p:nvSpPr>
+          <p:spPr>
+            <a:xfrm>
+              <a:off x="6047368" y="1223009"/>
+              <a:ext cx="1339534" cy="184667"/>
+            </a:xfrm>
+            <a:prstGeom prst="rect">
+              <a:avLst/>
+            </a:prstGeom>
+            <a:noFill/>
+            <a:ln w="19050">
+              <a:noFill/>
+              <a:prstDash val="sysDash"/>
+            </a:ln>
+          </p:spPr>
+          <p:style>
+            <a:lnRef idx="2">
+              <a:schemeClr val="accent1">
+                <a:shade val="15000"/>
+              </a:schemeClr>
+            </a:lnRef>
+            <a:fillRef idx="1">
+              <a:schemeClr val="accent1"/>
+            </a:fillRef>
+            <a:effectRef idx="0">
+              <a:schemeClr val="accent1"/>
+            </a:effectRef>
+            <a:fontRef idx="minor">
+              <a:schemeClr val="lt1"/>
+            </a:fontRef>
+          </p:style>
+          <p:txBody>
+            <a:bodyPr wrap="none" lIns="0" tIns="0" rIns="0" bIns="0" rtlCol="0" anchor="t" anchorCtr="0">
+              <a:noAutofit/>
+            </a:bodyPr>
+            <a:lstStyle/>
+            <a:p>
+              <a:pPr>
+                <a:lnSpc>
+                  <a:spcPts val="1600"/>
+                </a:lnSpc>
+              </a:pPr>
+              <a:r>
+                <a:rPr lang="en-US" altLang="zh-TW" sz="1200" b="1" dirty="0">
+                  <a:solidFill>
+                    <a:schemeClr val="bg1">
+                      <a:lumMod val="65000"/>
+                    </a:schemeClr>
+                  </a:solidFill>
+                  <a:ea typeface="微軟正黑體" panose="020B0604030504040204" pitchFamily="34" charset="-120"/>
+                </a:rPr>
+                <a:t>RNN h#(t) … </a:t>
+              </a:r>
+              <a:endParaRPr lang="en-US" altLang="zh-TW" sz="1200" baseline="-25000" dirty="0">
+                <a:solidFill>
+                  <a:schemeClr val="bg1">
+                    <a:lumMod val="65000"/>
+                  </a:schemeClr>
+                </a:solidFill>
+                <a:ea typeface="微軟正黑體" panose="020B0604030504040204" pitchFamily="34" charset="-120"/>
+              </a:endParaRPr>
+            </a:p>
+          </p:txBody>
+        </p:sp>
+      </p:grpSp>
+      <p:sp>
+        <p:nvSpPr>
+          <p:cNvPr id="98" name="文字方塊 97">
+            <a:extLst>
+              <a:ext uri="{FF2B5EF4-FFF2-40B4-BE49-F238E27FC236}">
+                <a16:creationId xmlns:a16="http://schemas.microsoft.com/office/drawing/2014/main" id="{9254CDDD-C926-D3E9-E3AA-00DFDF2FDA9E}"/>
+              </a:ext>
+            </a:extLst>
+          </p:cNvPr>
+          <p:cNvSpPr txBox="1"/>
+          <p:nvPr/>
+        </p:nvSpPr>
+        <p:spPr>
+          <a:xfrm>
+            <a:off x="4302508" y="5774506"/>
+            <a:ext cx="199239" cy="223769"/>
+          </a:xfrm>
+          <a:prstGeom prst="rect">
+            <a:avLst/>
+          </a:prstGeom>
+          <a:noFill/>
+        </p:spPr>
+        <p:txBody>
+          <a:bodyPr wrap="none" lIns="0" tIns="0" rIns="0" bIns="0" rtlCol="0" anchor="ctr" anchorCtr="1">
+            <a:noAutofit/>
+          </a:bodyPr>
+          <a:lstStyle/>
+          <a:p>
+            <a:pPr algn="ctr">
+              <a:lnSpc>
+                <a:spcPts val="1400"/>
+              </a:lnSpc>
+            </a:pPr>
+            <a:r>
+              <a:rPr lang="en-US" altLang="zh-TW" sz="1400" b="1" dirty="0">
+                <a:solidFill>
+                  <a:schemeClr val="accent4"/>
+                </a:solidFill>
+                <a:ea typeface="ADLaM Display" panose="02010000000000000000" pitchFamily="2" charset="0"/>
+                <a:cs typeface="ADLaM Display" panose="02010000000000000000" pitchFamily="2" charset="0"/>
+              </a:rPr>
+              <a:t>U</a:t>
+            </a:r>
+            <a:r>
+              <a:rPr lang="en-US" altLang="zh-TW" sz="1400" b="1" baseline="-25000" dirty="0">
+                <a:solidFill>
+                  <a:schemeClr val="accent4"/>
+                </a:solidFill>
+                <a:ea typeface="ADLaM Display" panose="02010000000000000000" pitchFamily="2" charset="0"/>
+                <a:cs typeface="ADLaM Display" panose="02010000000000000000" pitchFamily="2" charset="0"/>
+              </a:rPr>
+              <a:t>t</a:t>
+            </a:r>
+            <a:endParaRPr lang="zh-TW" altLang="en-US" sz="1400" b="1" baseline="-25000" dirty="0">
+              <a:solidFill>
+                <a:schemeClr val="accent4"/>
+              </a:solidFill>
+            </a:endParaRPr>
+          </a:p>
+        </p:txBody>
+      </p:sp>
+      <p:sp>
+        <p:nvSpPr>
+          <p:cNvPr id="177" name="文字方塊 176">
+            <a:extLst>
+              <a:ext uri="{FF2B5EF4-FFF2-40B4-BE49-F238E27FC236}">
+                <a16:creationId xmlns:a16="http://schemas.microsoft.com/office/drawing/2014/main" id="{84DBD70E-B8C0-89B1-F630-AF61FF591373}"/>
+              </a:ext>
+            </a:extLst>
+          </p:cNvPr>
+          <p:cNvSpPr txBox="1"/>
+          <p:nvPr/>
+        </p:nvSpPr>
+        <p:spPr>
+          <a:xfrm>
+            <a:off x="2373140" y="1933383"/>
+            <a:ext cx="534817" cy="225421"/>
+          </a:xfrm>
+          <a:prstGeom prst="rect">
+            <a:avLst/>
+          </a:prstGeom>
+          <a:noFill/>
+        </p:spPr>
+        <p:txBody>
+          <a:bodyPr wrap="none" lIns="0" tIns="0" rIns="0" bIns="0" rtlCol="0" anchor="ctr" anchorCtr="0">
+            <a:noAutofit/>
+          </a:bodyPr>
+          <a:lstStyle/>
+          <a:p>
+            <a:pPr marL="0" marR="0" lvl="0" indent="0" algn="ctr" defTabSz="914400" rtl="0" eaLnBrk="1" fontAlgn="auto" latinLnBrk="0" hangingPunct="1">
+              <a:lnSpc>
+                <a:spcPts val="1400"/>
+              </a:lnSpc>
+              <a:spcBef>
+                <a:spcPts val="0"/>
+              </a:spcBef>
+              <a:spcAft>
+                <a:spcPts val="0"/>
+              </a:spcAft>
+              <a:buClrTx/>
+              <a:buSzTx/>
+              <a:buFontTx/>
+              <a:buNone/>
+              <a:tabLst/>
+              <a:defRPr/>
+            </a:pPr>
+            <a:r>
+              <a:rPr lang="en-US" altLang="zh-TW" sz="1400" b="1" dirty="0">
+                <a:solidFill>
+                  <a:schemeClr val="accent4"/>
+                </a:solidFill>
+              </a:rPr>
+              <a:t>+b</a:t>
+            </a:r>
+            <a:r>
+              <a:rPr kumimoji="0" lang="zh-TW" altLang="zh-TW" sz="1000" b="1" i="0" u="none" strike="noStrike" kern="1200" cap="none" spc="0" normalizeH="0" baseline="0" noProof="0" dirty="0">
+                <a:ln>
+                  <a:noFill/>
+                </a:ln>
+                <a:solidFill>
+                  <a:schemeClr val="accent4"/>
+                </a:solidFill>
+                <a:effectLst/>
+                <a:uLnTx/>
+                <a:uFillTx/>
+                <a:latin typeface="Calibri"/>
+                <a:ea typeface="新細明體" panose="02020500000000000000" pitchFamily="18" charset="-120"/>
+                <a:cs typeface="+mn-cs"/>
+              </a:rPr>
+              <a:t>➔</a:t>
+            </a:r>
+            <a:r>
+              <a:rPr kumimoji="0" lang="en-US" altLang="zh-TW" sz="1000" b="1" i="0" u="none" strike="noStrike" kern="1200" cap="none" spc="0" normalizeH="0" baseline="0" noProof="0" dirty="0">
+                <a:ln>
+                  <a:noFill/>
+                </a:ln>
+                <a:solidFill>
+                  <a:schemeClr val="accent4"/>
+                </a:solidFill>
+                <a:effectLst/>
+                <a:uLnTx/>
+                <a:uFillTx/>
+                <a:latin typeface="Calibri"/>
+                <a:ea typeface="新細明體" panose="02020500000000000000" pitchFamily="18" charset="-120"/>
+                <a:cs typeface="+mn-cs"/>
+              </a:rPr>
+              <a:t> </a:t>
+            </a:r>
+            <a:r>
+              <a:rPr kumimoji="0" lang="el-GR" altLang="zh-TW" sz="1600" b="1" i="0" u="none" strike="noStrike" kern="1200" cap="none" spc="0" normalizeH="0" baseline="0" noProof="0" dirty="0">
+                <a:ln>
+                  <a:noFill/>
+                </a:ln>
+                <a:solidFill>
+                  <a:schemeClr val="accent4"/>
+                </a:solidFill>
+                <a:effectLst/>
+                <a:uLnTx/>
+                <a:uFillTx/>
+                <a:cs typeface="Calibri" panose="020F0502020204030204" pitchFamily="34" charset="0"/>
+              </a:rPr>
+              <a:t>σ</a:t>
+            </a:r>
+            <a:r>
+              <a:rPr kumimoji="0" lang="en-US" altLang="zh-TW" sz="1400" b="1" i="0" u="none" strike="noStrike" kern="1200" cap="none" spc="0" normalizeH="0" baseline="0" noProof="0" dirty="0">
+                <a:ln>
+                  <a:noFill/>
+                </a:ln>
+                <a:solidFill>
+                  <a:schemeClr val="accent4"/>
+                </a:solidFill>
+                <a:effectLst/>
+                <a:uLnTx/>
+                <a:uFillTx/>
+                <a:cs typeface="Calibri" panose="020F0502020204030204" pitchFamily="34" charset="0"/>
+              </a:rPr>
+              <a:t> </a:t>
+            </a:r>
+          </a:p>
+        </p:txBody>
+      </p:sp>
+      <p:sp>
+        <p:nvSpPr>
+          <p:cNvPr id="100" name="文字方塊 99">
+            <a:extLst>
+              <a:ext uri="{FF2B5EF4-FFF2-40B4-BE49-F238E27FC236}">
+                <a16:creationId xmlns:a16="http://schemas.microsoft.com/office/drawing/2014/main" id="{D9D0C396-BA14-09D0-9E72-56A9A3E764D5}"/>
+              </a:ext>
+            </a:extLst>
+          </p:cNvPr>
+          <p:cNvSpPr txBox="1"/>
+          <p:nvPr/>
+        </p:nvSpPr>
+        <p:spPr>
+          <a:xfrm>
+            <a:off x="2343944" y="2132856"/>
+            <a:ext cx="352899" cy="182880"/>
+          </a:xfrm>
+          <a:prstGeom prst="rect">
+            <a:avLst/>
+          </a:prstGeom>
+          <a:noFill/>
+        </p:spPr>
+        <p:txBody>
+          <a:bodyPr wrap="none" lIns="0" tIns="0" rIns="0" bIns="0" rtlCol="0" anchor="ctr" anchorCtr="1">
+            <a:noAutofit/>
+          </a:bodyPr>
+          <a:lstStyle/>
+          <a:p>
+            <a:pPr algn="ctr">
+              <a:lnSpc>
+                <a:spcPts val="1400"/>
+              </a:lnSpc>
+            </a:pPr>
+            <a:r>
+              <a:rPr lang="en-US" altLang="zh-TW" sz="1400" b="1" dirty="0">
+                <a:solidFill>
+                  <a:schemeClr val="accent4"/>
+                </a:solidFill>
+                <a:sym typeface="Wingdings" panose="05000000000000000000" pitchFamily="2" charset="2"/>
+              </a:rPr>
+              <a:t>= </a:t>
+            </a:r>
+            <a:r>
+              <a:rPr lang="en-US" altLang="zh-TW" sz="1400" b="1" dirty="0">
+                <a:solidFill>
+                  <a:schemeClr val="accent4"/>
+                </a:solidFill>
+              </a:rPr>
+              <a:t>f4</a:t>
+            </a:r>
+            <a:endParaRPr lang="zh-TW" altLang="en-US" sz="1400" b="1" baseline="-25000" dirty="0">
+              <a:solidFill>
+                <a:schemeClr val="accent4">
+                  <a:lumMod val="60000"/>
+                  <a:lumOff val="40000"/>
+                </a:schemeClr>
+              </a:solidFill>
+            </a:endParaRPr>
+          </a:p>
+        </p:txBody>
+      </p:sp>
+      <p:sp>
+        <p:nvSpPr>
+          <p:cNvPr id="158" name="文字方塊 157">
+            <a:extLst>
+              <a:ext uri="{FF2B5EF4-FFF2-40B4-BE49-F238E27FC236}">
+                <a16:creationId xmlns:a16="http://schemas.microsoft.com/office/drawing/2014/main" id="{9279C120-8B7D-2C0C-C8E7-3F2C6006EEA3}"/>
+              </a:ext>
+            </a:extLst>
+          </p:cNvPr>
+          <p:cNvSpPr txBox="1"/>
+          <p:nvPr/>
+        </p:nvSpPr>
+        <p:spPr>
+          <a:xfrm>
+            <a:off x="2698602" y="2611981"/>
+            <a:ext cx="361230" cy="174575"/>
+          </a:xfrm>
+          <a:prstGeom prst="rect">
+            <a:avLst/>
+          </a:prstGeom>
+          <a:noFill/>
+        </p:spPr>
+        <p:txBody>
+          <a:bodyPr wrap="none" lIns="0" tIns="0" rIns="0" bIns="0" rtlCol="0" anchor="ctr" anchorCtr="1">
+            <a:noAutofit/>
+          </a:bodyPr>
+          <a:lstStyle/>
+          <a:p>
+            <a:pPr algn="ctr">
+              <a:lnSpc>
+                <a:spcPts val="1400"/>
+              </a:lnSpc>
+            </a:pPr>
+            <a:r>
+              <a:rPr lang="en-US" altLang="zh-TW" sz="1400" b="1" dirty="0">
+                <a:solidFill>
+                  <a:schemeClr val="accent4"/>
+                </a:solidFill>
+                <a:sym typeface="Wingdings" panose="05000000000000000000" pitchFamily="2" charset="2"/>
+              </a:rPr>
+              <a:t>= </a:t>
+            </a:r>
+            <a:r>
+              <a:rPr lang="en-US" altLang="zh-TW" sz="1400" b="1" dirty="0">
+                <a:solidFill>
+                  <a:schemeClr val="accent4"/>
+                </a:solidFill>
+              </a:rPr>
+              <a:t>i4</a:t>
+            </a:r>
+            <a:endParaRPr lang="zh-TW" altLang="en-US" sz="1400" b="1" baseline="-25000" dirty="0">
+              <a:solidFill>
+                <a:schemeClr val="accent4">
+                  <a:lumMod val="60000"/>
+                  <a:lumOff val="40000"/>
+                </a:schemeClr>
+              </a:solidFill>
+            </a:endParaRPr>
+          </a:p>
+        </p:txBody>
+      </p:sp>
+      <p:sp>
+        <p:nvSpPr>
+          <p:cNvPr id="80" name="矩形 79">
+            <a:extLst>
+              <a:ext uri="{FF2B5EF4-FFF2-40B4-BE49-F238E27FC236}">
+                <a16:creationId xmlns:a16="http://schemas.microsoft.com/office/drawing/2014/main" id="{45D15400-0AD2-169A-6F71-5FB3C845F9A3}"/>
+              </a:ext>
+            </a:extLst>
+          </p:cNvPr>
+          <p:cNvSpPr/>
+          <p:nvPr/>
+        </p:nvSpPr>
+        <p:spPr>
+          <a:xfrm>
+            <a:off x="693093" y="3707876"/>
+            <a:ext cx="689164" cy="342763"/>
+          </a:xfrm>
+          <a:prstGeom prst="rect">
+            <a:avLst/>
+          </a:prstGeom>
+          <a:solidFill>
+            <a:schemeClr val="accent2">
+              <a:lumMod val="20000"/>
+              <a:lumOff val="80000"/>
+              <a:alpha val="20000"/>
+            </a:schemeClr>
+          </a:solidFill>
+          <a:ln w="15875">
+            <a:solidFill>
+              <a:schemeClr val="accent2">
+                <a:lumMod val="75000"/>
+              </a:schemeClr>
+            </a:solidFill>
+            <a:prstDash val="sysDot"/>
+            <a:extLst>
+              <a:ext uri="{C807C97D-BFC1-408E-A445-0C87EB9F89A2}">
+                <ask:lineSketchStyleProps xmlns:ask="http://schemas.microsoft.com/office/drawing/2018/sketchyshapes">
+                  <ask:type>
+                    <ask:lineSketchNone/>
+                  </ask:type>
+                </ask:lineSketchStyleProps>
+              </a:ext>
+            </a:extLst>
+          </a:ln>
+        </p:spPr>
+        <p:style>
+          <a:lnRef idx="2">
+            <a:schemeClr val="accent1">
+              <a:shade val="15000"/>
+            </a:schemeClr>
+          </a:lnRef>
+          <a:fillRef idx="1">
+            <a:schemeClr val="accent1"/>
+          </a:fillRef>
+          <a:effectRef idx="0">
+            <a:schemeClr val="accent1"/>
+          </a:effectRef>
+          <a:fontRef idx="minor">
+            <a:schemeClr val="lt1"/>
+          </a:fontRef>
+        </p:style>
+        <p:txBody>
+          <a:bodyPr wrap="none" lIns="0" tIns="0" rIns="0" bIns="0" rtlCol="0" anchor="ctr" anchorCtr="1"/>
+          <a:lstStyle/>
+          <a:p>
+            <a:pPr algn="ctr">
+              <a:lnSpc>
+                <a:spcPts val="1500"/>
+              </a:lnSpc>
+            </a:pPr>
+            <a:r>
+              <a:rPr lang="en-US" altLang="zh-TW" sz="1400" b="1" dirty="0">
+                <a:solidFill>
+                  <a:schemeClr val="accent2"/>
+                </a:solidFill>
+                <a:ea typeface="微軟正黑體" panose="020B0604030504040204" pitchFamily="34" charset="-120"/>
+              </a:rPr>
+              <a:t>x(4)</a:t>
+            </a:r>
+          </a:p>
+        </p:txBody>
+      </p:sp>
+      <p:cxnSp>
+        <p:nvCxnSpPr>
+          <p:cNvPr id="212" name="接點: 肘形 211">
+            <a:extLst>
+              <a:ext uri="{FF2B5EF4-FFF2-40B4-BE49-F238E27FC236}">
+                <a16:creationId xmlns:a16="http://schemas.microsoft.com/office/drawing/2014/main" id="{F74F3668-7891-A338-BD45-C31E65FE1CC6}"/>
+              </a:ext>
+            </a:extLst>
+          </p:cNvPr>
+          <p:cNvCxnSpPr>
+            <a:cxnSpLocks/>
+            <a:stCxn id="158" idx="2"/>
+            <a:endCxn id="306" idx="0"/>
+          </p:cNvCxnSpPr>
+          <p:nvPr/>
+        </p:nvCxnSpPr>
+        <p:spPr>
+          <a:xfrm rot="16200000" flipH="1">
+            <a:off x="2634527" y="3031245"/>
+            <a:ext cx="786460" cy="297081"/>
+          </a:xfrm>
+          <a:prstGeom prst="bentConnector3">
+            <a:avLst>
+              <a:gd name="adj1" fmla="val 50000"/>
+            </a:avLst>
+          </a:prstGeom>
+          <a:ln w="15875">
+            <a:solidFill>
+              <a:schemeClr val="accent4"/>
+            </a:solidFill>
+            <a:prstDash val="sysDot"/>
+            <a:tailEnd type="triangle" w="sm" len="med"/>
+          </a:ln>
+        </p:spPr>
+        <p:style>
+          <a:lnRef idx="1">
+            <a:schemeClr val="accent1"/>
+          </a:lnRef>
+          <a:fillRef idx="0">
+            <a:schemeClr val="accent1"/>
+          </a:fillRef>
+          <a:effectRef idx="0">
+            <a:schemeClr val="accent1"/>
+          </a:effectRef>
+          <a:fontRef idx="minor">
+            <a:schemeClr val="tx1"/>
+          </a:fontRef>
+        </p:style>
+      </p:cxnSp>
+      <p:cxnSp>
+        <p:nvCxnSpPr>
+          <p:cNvPr id="217" name="接點: 肘形 216">
+            <a:extLst>
+              <a:ext uri="{FF2B5EF4-FFF2-40B4-BE49-F238E27FC236}">
+                <a16:creationId xmlns:a16="http://schemas.microsoft.com/office/drawing/2014/main" id="{DD17F48B-17BE-BA11-CF4C-79DFFD95FB03}"/>
+              </a:ext>
+            </a:extLst>
+          </p:cNvPr>
+          <p:cNvCxnSpPr>
+            <a:cxnSpLocks/>
+            <a:stCxn id="77" idx="2"/>
+            <a:endCxn id="319" idx="0"/>
+          </p:cNvCxnSpPr>
+          <p:nvPr/>
+        </p:nvCxnSpPr>
+        <p:spPr>
+          <a:xfrm rot="16200000" flipH="1">
+            <a:off x="3351521" y="3335943"/>
+            <a:ext cx="279601" cy="194543"/>
+          </a:xfrm>
+          <a:prstGeom prst="bentConnector3">
+            <a:avLst>
+              <a:gd name="adj1" fmla="val 50000"/>
+            </a:avLst>
+          </a:prstGeom>
+          <a:ln w="15875">
+            <a:solidFill>
+              <a:schemeClr val="accent4"/>
+            </a:solidFill>
+            <a:prstDash val="sysDot"/>
+            <a:tailEnd type="triangle" w="sm" len="med"/>
+          </a:ln>
+        </p:spPr>
+        <p:style>
+          <a:lnRef idx="1">
+            <a:schemeClr val="accent1"/>
+          </a:lnRef>
+          <a:fillRef idx="0">
+            <a:schemeClr val="accent1"/>
+          </a:fillRef>
+          <a:effectRef idx="0">
+            <a:schemeClr val="accent1"/>
+          </a:effectRef>
+          <a:fontRef idx="minor">
+            <a:schemeClr val="tx1"/>
+          </a:fontRef>
+        </p:style>
+      </p:cxnSp>
+      <p:sp>
+        <p:nvSpPr>
+          <p:cNvPr id="232" name="文字方塊 231">
+            <a:extLst>
+              <a:ext uri="{FF2B5EF4-FFF2-40B4-BE49-F238E27FC236}">
+                <a16:creationId xmlns:a16="http://schemas.microsoft.com/office/drawing/2014/main" id="{8F445768-2CF1-B42C-E7FC-D81D32DD27EE}"/>
+              </a:ext>
+            </a:extLst>
+          </p:cNvPr>
+          <p:cNvSpPr txBox="1"/>
+          <p:nvPr/>
+        </p:nvSpPr>
+        <p:spPr>
+          <a:xfrm>
+            <a:off x="4302508" y="6144005"/>
+            <a:ext cx="924781" cy="239508"/>
+          </a:xfrm>
+          <a:prstGeom prst="rect">
+            <a:avLst/>
+          </a:prstGeom>
+          <a:noFill/>
+        </p:spPr>
+        <p:txBody>
+          <a:bodyPr wrap="none" lIns="0" tIns="0" rIns="0" bIns="0" rtlCol="0" anchor="ctr" anchorCtr="1">
+            <a:noAutofit/>
+          </a:bodyPr>
+          <a:lstStyle/>
+          <a:p>
+            <a:pPr algn="ctr">
+              <a:lnSpc>
+                <a:spcPts val="1400"/>
+              </a:lnSpc>
+            </a:pPr>
+            <a:r>
+              <a:rPr kumimoji="0" lang="en-US" altLang="zh-TW" sz="1000" b="1" i="0" u="none" strike="noStrike" kern="1200" cap="none" spc="0" normalizeH="0" baseline="0" noProof="0" dirty="0">
+                <a:ln>
+                  <a:noFill/>
+                </a:ln>
+                <a:solidFill>
+                  <a:srgbClr val="8064A2"/>
+                </a:solidFill>
+                <a:effectLst/>
+                <a:uLnTx/>
+                <a:uFillTx/>
+                <a:latin typeface="Calibri"/>
+                <a:ea typeface="新細明體" panose="02020500000000000000" pitchFamily="18" charset="-120"/>
+                <a:cs typeface="+mn-cs"/>
+              </a:rPr>
+              <a:t> </a:t>
+            </a:r>
+            <a:r>
+              <a:rPr kumimoji="0" lang="zh-TW" altLang="zh-TW" sz="1000" b="1" i="0" u="none" strike="noStrike" kern="1200" cap="none" spc="0" normalizeH="0" baseline="0" noProof="0" dirty="0">
+                <a:ln>
+                  <a:noFill/>
+                </a:ln>
+                <a:solidFill>
+                  <a:srgbClr val="8064A2"/>
+                </a:solidFill>
+                <a:effectLst/>
+                <a:uLnTx/>
+                <a:uFillTx/>
+                <a:latin typeface="Calibri"/>
+                <a:ea typeface="新細明體" panose="02020500000000000000" pitchFamily="18" charset="-120"/>
+                <a:cs typeface="+mn-cs"/>
+              </a:rPr>
+              <a:t>➔ </a:t>
+            </a:r>
+            <a:r>
+              <a:rPr lang="en-US" altLang="zh-TW" sz="1400" b="1" dirty="0">
+                <a:solidFill>
+                  <a:schemeClr val="accent4"/>
+                </a:solidFill>
+                <a:ea typeface="ADLaM Display" panose="02010000000000000000" pitchFamily="2" charset="0"/>
+                <a:cs typeface="ADLaM Display" panose="02010000000000000000" pitchFamily="2" charset="0"/>
+              </a:rPr>
+              <a:t>tanh = C</a:t>
+            </a:r>
+            <a:r>
+              <a:rPr lang="en-US" altLang="zh-TW" sz="1400" b="1" baseline="-25000" dirty="0">
+                <a:solidFill>
+                  <a:schemeClr val="accent4"/>
+                </a:solidFill>
+                <a:ea typeface="ADLaM Display" panose="02010000000000000000" pitchFamily="2" charset="0"/>
+                <a:cs typeface="ADLaM Display" panose="02010000000000000000" pitchFamily="2" charset="0"/>
+              </a:rPr>
+              <a:t>t</a:t>
+            </a:r>
+            <a:endParaRPr lang="zh-TW" altLang="en-US" sz="1400" b="1" baseline="-25000" dirty="0">
+              <a:solidFill>
+                <a:schemeClr val="accent4"/>
+              </a:solidFill>
+            </a:endParaRPr>
+          </a:p>
+        </p:txBody>
+      </p:sp>
+      <p:sp>
+        <p:nvSpPr>
+          <p:cNvPr id="241" name="矩形 240">
+            <a:extLst>
+              <a:ext uri="{FF2B5EF4-FFF2-40B4-BE49-F238E27FC236}">
+                <a16:creationId xmlns:a16="http://schemas.microsoft.com/office/drawing/2014/main" id="{208C2ADA-4A55-5920-4045-5CA9706A897C}"/>
+              </a:ext>
+            </a:extLst>
+          </p:cNvPr>
+          <p:cNvSpPr/>
+          <p:nvPr/>
+        </p:nvSpPr>
+        <p:spPr>
+          <a:xfrm>
+            <a:off x="4788024" y="3723794"/>
+            <a:ext cx="569295" cy="355845"/>
+          </a:xfrm>
+          <a:prstGeom prst="rect">
+            <a:avLst/>
+          </a:prstGeom>
+          <a:solidFill>
+            <a:schemeClr val="accent4">
+              <a:lumMod val="20000"/>
+              <a:lumOff val="80000"/>
+              <a:alpha val="40000"/>
+            </a:schemeClr>
+          </a:solidFill>
+          <a:ln w="15875">
+            <a:solidFill>
+              <a:schemeClr val="accent4"/>
+            </a:solidFill>
+            <a:prstDash val="sysDot"/>
+            <a:extLst>
+              <a:ext uri="{C807C97D-BFC1-408E-A445-0C87EB9F89A2}">
+                <ask:lineSketchStyleProps xmlns:ask="http://schemas.microsoft.com/office/drawing/2018/sketchyshapes">
+                  <ask:type>
+                    <ask:lineSketchNone/>
+                  </ask:type>
+                </ask:lineSketchStyleProps>
+              </a:ext>
+            </a:extLst>
+          </a:ln>
+        </p:spPr>
+        <p:style>
+          <a:lnRef idx="2">
+            <a:schemeClr val="accent1">
+              <a:shade val="15000"/>
+            </a:schemeClr>
+          </a:lnRef>
+          <a:fillRef idx="1">
+            <a:schemeClr val="accent1"/>
+          </a:fillRef>
+          <a:effectRef idx="0">
+            <a:schemeClr val="accent1"/>
+          </a:effectRef>
+          <a:fontRef idx="minor">
+            <a:schemeClr val="lt1"/>
+          </a:fontRef>
+        </p:style>
+        <p:txBody>
+          <a:bodyPr wrap="none" lIns="0" tIns="0" rIns="0" bIns="0" rtlCol="0" anchor="ctr" anchorCtr="1"/>
+          <a:lstStyle/>
+          <a:p>
+            <a:pPr algn="ctr">
+              <a:lnSpc>
+                <a:spcPts val="1500"/>
+              </a:lnSpc>
+            </a:pPr>
+            <a:r>
+              <a:rPr lang="en-US" altLang="zh-TW" sz="1400" b="1" dirty="0">
+                <a:solidFill>
+                  <a:schemeClr val="accent4"/>
+                </a:solidFill>
+                <a:ea typeface="微軟正黑體" panose="020B0604030504040204" pitchFamily="34" charset="-120"/>
+              </a:rPr>
+              <a:t>h(4)</a:t>
+            </a:r>
+          </a:p>
+        </p:txBody>
+      </p:sp>
+      <p:graphicFrame>
+        <p:nvGraphicFramePr>
+          <p:cNvPr id="244" name="表格 243">
+            <a:extLst>
+              <a:ext uri="{FF2B5EF4-FFF2-40B4-BE49-F238E27FC236}">
+                <a16:creationId xmlns:a16="http://schemas.microsoft.com/office/drawing/2014/main" id="{A25279DA-52BF-B9C1-15DA-A140FD666B37}"/>
+              </a:ext>
+            </a:extLst>
+          </p:cNvPr>
+          <p:cNvGraphicFramePr>
+            <a:graphicFrameLocks noGrp="1"/>
+          </p:cNvGraphicFramePr>
+          <p:nvPr>
+            <p:extLst>
+              <p:ext uri="{D42A27DB-BD31-4B8C-83A1-F6EECF244321}">
+                <p14:modId xmlns:p14="http://schemas.microsoft.com/office/powerpoint/2010/main" val="4219227573"/>
+              </p:ext>
+            </p:extLst>
+          </p:nvPr>
+        </p:nvGraphicFramePr>
+        <p:xfrm>
+          <a:off x="5522179" y="2518782"/>
+          <a:ext cx="415217" cy="1499421"/>
+        </p:xfrm>
+        <a:graphic>
+          <a:graphicData uri="http://schemas.openxmlformats.org/drawingml/2006/table">
+            <a:tbl>
+              <a:tblPr firstRow="1" bandRow="1">
+                <a:tableStyleId>{5C22544A-7EE6-4342-B048-85BDC9FD1C3A}</a:tableStyleId>
+              </a:tblPr>
+              <a:tblGrid>
+                <a:gridCol w="211691">
+                  <a:extLst>
+                    <a:ext uri="{9D8B030D-6E8A-4147-A177-3AD203B41FA5}">
+                      <a16:colId xmlns:a16="http://schemas.microsoft.com/office/drawing/2014/main" val="871242339"/>
+                    </a:ext>
+                  </a:extLst>
+                </a:gridCol>
+                <a:gridCol w="203526">
+                  <a:extLst>
+                    <a:ext uri="{9D8B030D-6E8A-4147-A177-3AD203B41FA5}">
+                      <a16:colId xmlns:a16="http://schemas.microsoft.com/office/drawing/2014/main" val="1424301285"/>
+                    </a:ext>
+                  </a:extLst>
+                </a:gridCol>
+              </a:tblGrid>
+              <a:tr h="214203">
+                <a:tc>
+                  <a:txBody>
+                    <a:bodyPr/>
+                    <a:lstStyle/>
+                    <a:p>
+                      <a:pPr algn="ctr"/>
+                      <a:r>
+                        <a:rPr lang="en-US" altLang="zh-TW" sz="1000" b="0" dirty="0">
+                          <a:solidFill>
+                            <a:schemeClr val="bg1">
+                              <a:lumMod val="75000"/>
+                            </a:schemeClr>
+                          </a:solidFill>
+                          <a:latin typeface="ADLaM Display" panose="02010000000000000000" pitchFamily="2" charset="0"/>
+                          <a:cs typeface="ADLaM Display" panose="02010000000000000000" pitchFamily="2" charset="0"/>
+                        </a:rPr>
+                        <a:t>0</a:t>
+                      </a:r>
+                      <a:endParaRPr lang="zh-TW" altLang="en-US" sz="1000" b="0" dirty="0">
+                        <a:solidFill>
+                          <a:schemeClr val="bg1">
+                            <a:lumMod val="75000"/>
+                          </a:schemeClr>
+                        </a:solidFill>
+                        <a:latin typeface="ADLaM Display" panose="02010000000000000000" pitchFamily="2" charset="0"/>
+                        <a:cs typeface="ADLaM Display" panose="02010000000000000000" pitchFamily="2" charset="0"/>
+                      </a:endParaRPr>
+                    </a:p>
+                  </a:txBody>
+                  <a:tcPr marL="0" marR="0" marT="0" marB="0" anchor="ctr" anchorCtr="1">
+                    <a:lnL w="12700" cap="flat" cmpd="sng" algn="ctr">
+                      <a:solidFill>
+                        <a:schemeClr val="bg1">
+                          <a:lumMod val="50000"/>
+                        </a:schemeClr>
+                      </a:solidFill>
+                      <a:prstDash val="solid"/>
+                      <a:round/>
+                      <a:headEnd type="none" w="med" len="med"/>
+                      <a:tailEnd type="none" w="med" len="med"/>
+                    </a:lnL>
+                    <a:lnR w="12700" cmpd="sng">
+                      <a:noFill/>
+                    </a:lnR>
+                    <a:lnT w="12700" cmpd="sng">
+                      <a:noFill/>
+                    </a:lnT>
+                    <a:lnB w="38100" cmpd="sng">
+                      <a:noFill/>
+                    </a:lnB>
+                    <a:lnTlToBr w="12700" cmpd="sng">
+                      <a:noFill/>
+                      <a:prstDash val="solid"/>
+                    </a:lnTlToBr>
+                    <a:lnBlToTr w="12700" cmpd="sng">
+                      <a:noFill/>
+                      <a:prstDash val="solid"/>
+                    </a:lnBlToTr>
+                    <a:solidFill>
+                      <a:schemeClr val="bg1">
+                        <a:lumMod val="95000"/>
+                      </a:schemeClr>
+                    </a:solidFill>
+                  </a:tcPr>
+                </a:tc>
+                <a:tc>
+                  <a:txBody>
+                    <a:bodyPr/>
+                    <a:lstStyle/>
+                    <a:p>
+                      <a:pPr algn="ctr"/>
+                      <a:r>
+                        <a:rPr lang="en-US" altLang="zh-TW" sz="1000" b="0" dirty="0">
+                          <a:solidFill>
+                            <a:schemeClr val="bg1">
+                              <a:lumMod val="75000"/>
+                            </a:schemeClr>
+                          </a:solidFill>
+                          <a:latin typeface="ADLaM Display" panose="02010000000000000000" pitchFamily="2" charset="0"/>
+                          <a:cs typeface="ADLaM Display" panose="02010000000000000000" pitchFamily="2" charset="0"/>
+                        </a:rPr>
+                        <a:t>0</a:t>
+                      </a:r>
+                      <a:endParaRPr lang="zh-TW" altLang="en-US" sz="1000" b="0" dirty="0">
+                        <a:solidFill>
+                          <a:schemeClr val="bg1">
+                            <a:lumMod val="75000"/>
+                          </a:schemeClr>
+                        </a:solidFill>
+                        <a:latin typeface="ADLaM Display" panose="02010000000000000000" pitchFamily="2" charset="0"/>
+                        <a:cs typeface="ADLaM Display" panose="02010000000000000000" pitchFamily="2" charset="0"/>
+                      </a:endParaRPr>
+                    </a:p>
+                  </a:txBody>
+                  <a:tcPr marL="0" marR="0" marT="0" marB="0" anchor="ctr" anchorCtr="1">
+                    <a:lnL w="12700" cmpd="sng">
+                      <a:noFill/>
+                    </a:lnL>
+                    <a:lnR w="19050" cap="flat" cmpd="sng" algn="ctr">
+                      <a:solidFill>
+                        <a:schemeClr val="bg1">
+                          <a:lumMod val="65000"/>
+                        </a:schemeClr>
+                      </a:solidFill>
+                      <a:prstDash val="solid"/>
+                      <a:round/>
+                      <a:headEnd type="none" w="med" len="med"/>
+                      <a:tailEnd type="none" w="med" len="med"/>
+                    </a:lnR>
+                    <a:lnT w="12700" cmpd="sng">
+                      <a:noFill/>
+                    </a:lnT>
+                    <a:lnB w="38100" cmpd="sng">
+                      <a:noFill/>
+                    </a:lnB>
+                    <a:lnTlToBr w="12700" cmpd="sng">
+                      <a:noFill/>
+                      <a:prstDash val="solid"/>
+                    </a:lnTlToBr>
+                    <a:lnBlToTr w="12700" cmpd="sng">
+                      <a:noFill/>
+                      <a:prstDash val="solid"/>
+                    </a:lnBlToTr>
+                    <a:solidFill>
+                      <a:schemeClr val="bg1">
+                        <a:lumMod val="95000"/>
+                      </a:schemeClr>
+                    </a:solidFill>
+                  </a:tcPr>
+                </a:tc>
+                <a:extLst>
+                  <a:ext uri="{0D108BD9-81ED-4DB2-BD59-A6C34878D82A}">
+                    <a16:rowId xmlns:a16="http://schemas.microsoft.com/office/drawing/2014/main" val="1375496678"/>
+                  </a:ext>
+                </a:extLst>
+              </a:tr>
+              <a:tr h="214203">
+                <a:tc>
+                  <a:txBody>
+                    <a:bodyPr/>
+                    <a:lstStyle/>
+                    <a:p>
+                      <a:pPr algn="ctr"/>
+                      <a:endParaRPr lang="zh-TW" altLang="en-US" sz="1000" b="0" dirty="0">
+                        <a:solidFill>
+                          <a:schemeClr val="bg1">
+                            <a:lumMod val="75000"/>
+                          </a:schemeClr>
+                        </a:solidFill>
+                        <a:latin typeface="ADLaM Display" panose="02010000000000000000" pitchFamily="2" charset="0"/>
+                        <a:cs typeface="ADLaM Display" panose="02010000000000000000" pitchFamily="2" charset="0"/>
+                      </a:endParaRPr>
+                    </a:p>
+                  </a:txBody>
+                  <a:tcPr marL="0" marR="0" marT="0" marB="0" anchor="ctr" anchorCtr="1">
+                    <a:lnL w="12700" cap="flat" cmpd="sng" algn="ctr">
+                      <a:noFill/>
+                      <a:prstDash val="solid"/>
+                      <a:round/>
+                      <a:headEnd type="none" w="med" len="med"/>
+                      <a:tailEnd type="none" w="med" len="med"/>
+                    </a:lnL>
+                    <a:lnR w="12700" cmpd="sng">
+                      <a:noFill/>
+                    </a:lnR>
+                    <a:lnT w="12700" cmpd="sng">
+                      <a:noFill/>
+                    </a:lnT>
+                    <a:lnB w="38100" cmpd="sng">
+                      <a:noFill/>
+                    </a:lnB>
+                    <a:lnTlToBr w="12700" cmpd="sng">
+                      <a:noFill/>
+                      <a:prstDash val="solid"/>
+                    </a:lnTlToBr>
+                    <a:lnBlToTr w="12700" cmpd="sng">
+                      <a:noFill/>
+                      <a:prstDash val="solid"/>
+                    </a:lnBlToTr>
+                    <a:solidFill>
+                      <a:schemeClr val="bg1"/>
+                    </a:solidFill>
+                  </a:tcPr>
+                </a:tc>
+                <a:tc>
+                  <a:txBody>
+                    <a:bodyPr/>
+                    <a:lstStyle/>
+                    <a:p>
+                      <a:pPr algn="ctr"/>
+                      <a:endParaRPr lang="zh-TW" altLang="en-US" sz="1000" b="0" dirty="0">
+                        <a:solidFill>
+                          <a:schemeClr val="bg1">
+                            <a:lumMod val="75000"/>
+                          </a:schemeClr>
+                        </a:solidFill>
+                        <a:latin typeface="ADLaM Display" panose="02010000000000000000" pitchFamily="2" charset="0"/>
+                        <a:cs typeface="ADLaM Display" panose="02010000000000000000" pitchFamily="2" charset="0"/>
+                      </a:endParaRPr>
+                    </a:p>
+                  </a:txBody>
+                  <a:tcPr marL="0" marR="0" marT="0" marB="0" anchor="ctr" anchorCtr="1">
+                    <a:lnL w="12700" cmpd="sng">
+                      <a:noFill/>
+                    </a:lnL>
+                    <a:lnR w="12700" cap="flat" cmpd="sng" algn="ctr">
+                      <a:noFill/>
+                      <a:prstDash val="solid"/>
+                      <a:round/>
+                      <a:headEnd type="none" w="med" len="med"/>
+                      <a:tailEnd type="none" w="med" len="med"/>
+                    </a:lnR>
+                    <a:lnT w="12700" cmpd="sng">
+                      <a:noFill/>
+                    </a:lnT>
+                    <a:lnB w="38100" cmpd="sng">
+                      <a:noFill/>
+                    </a:lnB>
+                    <a:lnTlToBr w="12700" cmpd="sng">
+                      <a:noFill/>
+                      <a:prstDash val="solid"/>
+                    </a:lnTlToBr>
+                    <a:lnBlToTr w="12700" cmpd="sng">
+                      <a:noFill/>
+                      <a:prstDash val="solid"/>
+                    </a:lnBlToTr>
+                    <a:solidFill>
+                      <a:schemeClr val="bg1"/>
+                    </a:solidFill>
+                  </a:tcPr>
+                </a:tc>
+                <a:extLst>
+                  <a:ext uri="{0D108BD9-81ED-4DB2-BD59-A6C34878D82A}">
+                    <a16:rowId xmlns:a16="http://schemas.microsoft.com/office/drawing/2014/main" val="2787225911"/>
+                  </a:ext>
+                </a:extLst>
+              </a:tr>
+              <a:tr h="214203">
+                <a:tc>
+                  <a:txBody>
+                    <a:bodyPr/>
+                    <a:lstStyle/>
+                    <a:p>
+                      <a:pPr algn="ctr"/>
+                      <a:r>
+                        <a:rPr lang="en-US" altLang="zh-TW" sz="1000" b="0" dirty="0">
+                          <a:solidFill>
+                            <a:schemeClr val="bg1">
+                              <a:lumMod val="75000"/>
+                            </a:schemeClr>
+                          </a:solidFill>
+                          <a:latin typeface="ADLaM Display" panose="02010000000000000000" pitchFamily="2" charset="0"/>
+                          <a:cs typeface="ADLaM Display" panose="02010000000000000000" pitchFamily="2" charset="0"/>
+                        </a:rPr>
+                        <a:t>0</a:t>
+                      </a:r>
+                      <a:endParaRPr lang="zh-TW" altLang="en-US" sz="1000" b="0" dirty="0">
+                        <a:solidFill>
+                          <a:schemeClr val="bg1">
+                            <a:lumMod val="75000"/>
+                          </a:schemeClr>
+                        </a:solidFill>
+                        <a:latin typeface="ADLaM Display" panose="02010000000000000000" pitchFamily="2" charset="0"/>
+                        <a:cs typeface="ADLaM Display" panose="02010000000000000000" pitchFamily="2" charset="0"/>
+                      </a:endParaRPr>
+                    </a:p>
+                  </a:txBody>
+                  <a:tcPr marL="0" marR="0" marT="0" marB="0" anchor="ctr" anchorCtr="1">
+                    <a:lnL w="12700" cap="flat" cmpd="sng" algn="ctr">
+                      <a:solidFill>
+                        <a:schemeClr val="bg1">
+                          <a:lumMod val="50000"/>
+                        </a:schemeClr>
+                      </a:solidFill>
+                      <a:prstDash val="solid"/>
+                      <a:round/>
+                      <a:headEnd type="none" w="med" len="med"/>
+                      <a:tailEnd type="none" w="med" len="med"/>
+                    </a:lnL>
+                    <a:lnR w="12700" cmpd="sng">
+                      <a:noFill/>
+                    </a:lnR>
+                    <a:lnT w="12700" cmpd="sng">
+                      <a:noFill/>
+                    </a:lnT>
+                    <a:lnB w="38100" cmpd="sng">
+                      <a:noFill/>
+                    </a:lnB>
+                    <a:lnTlToBr w="12700" cmpd="sng">
+                      <a:noFill/>
+                      <a:prstDash val="solid"/>
+                    </a:lnTlToBr>
+                    <a:lnBlToTr w="12700" cmpd="sng">
+                      <a:noFill/>
+                      <a:prstDash val="solid"/>
+                    </a:lnBlToTr>
+                    <a:solidFill>
+                      <a:schemeClr val="bg1">
+                        <a:lumMod val="95000"/>
+                      </a:schemeClr>
+                    </a:solidFill>
+                  </a:tcPr>
+                </a:tc>
+                <a:tc>
+                  <a:txBody>
+                    <a:bodyPr/>
+                    <a:lstStyle/>
+                    <a:p>
+                      <a:pPr algn="ctr"/>
+                      <a:r>
+                        <a:rPr lang="en-US" altLang="zh-TW" sz="1000" b="0" dirty="0">
+                          <a:solidFill>
+                            <a:schemeClr val="bg1">
+                              <a:lumMod val="75000"/>
+                            </a:schemeClr>
+                          </a:solidFill>
+                          <a:latin typeface="ADLaM Display" panose="02010000000000000000" pitchFamily="2" charset="0"/>
+                          <a:cs typeface="ADLaM Display" panose="02010000000000000000" pitchFamily="2" charset="0"/>
+                        </a:rPr>
+                        <a:t>0</a:t>
+                      </a:r>
+                      <a:endParaRPr lang="zh-TW" altLang="en-US" sz="1000" b="0" dirty="0">
+                        <a:solidFill>
+                          <a:schemeClr val="bg1">
+                            <a:lumMod val="75000"/>
+                          </a:schemeClr>
+                        </a:solidFill>
+                        <a:latin typeface="ADLaM Display" panose="02010000000000000000" pitchFamily="2" charset="0"/>
+                        <a:cs typeface="ADLaM Display" panose="02010000000000000000" pitchFamily="2" charset="0"/>
+                      </a:endParaRPr>
+                    </a:p>
+                  </a:txBody>
+                  <a:tcPr marL="0" marR="0" marT="0" marB="0" anchor="ctr" anchorCtr="1">
+                    <a:lnL w="12700" cmpd="sng">
+                      <a:noFill/>
+                    </a:lnL>
+                    <a:lnR w="19050" cap="flat" cmpd="sng" algn="ctr">
+                      <a:solidFill>
+                        <a:schemeClr val="bg1">
+                          <a:lumMod val="65000"/>
+                        </a:schemeClr>
+                      </a:solidFill>
+                      <a:prstDash val="solid"/>
+                      <a:round/>
+                      <a:headEnd type="none" w="med" len="med"/>
+                      <a:tailEnd type="none" w="med" len="med"/>
+                    </a:lnR>
+                    <a:lnT w="12700" cmpd="sng">
+                      <a:noFill/>
+                    </a:lnT>
+                    <a:lnB w="38100" cmpd="sng">
+                      <a:noFill/>
+                    </a:lnB>
+                    <a:lnTlToBr w="12700" cmpd="sng">
+                      <a:noFill/>
+                      <a:prstDash val="solid"/>
+                    </a:lnTlToBr>
+                    <a:lnBlToTr w="12700" cmpd="sng">
+                      <a:noFill/>
+                      <a:prstDash val="solid"/>
+                    </a:lnBlToTr>
+                    <a:solidFill>
+                      <a:schemeClr val="bg1">
+                        <a:lumMod val="95000"/>
+                      </a:schemeClr>
+                    </a:solidFill>
+                  </a:tcPr>
+                </a:tc>
+                <a:extLst>
+                  <a:ext uri="{0D108BD9-81ED-4DB2-BD59-A6C34878D82A}">
+                    <a16:rowId xmlns:a16="http://schemas.microsoft.com/office/drawing/2014/main" val="3529971003"/>
+                  </a:ext>
+                </a:extLst>
+              </a:tr>
+              <a:tr h="214203">
+                <a:tc>
+                  <a:txBody>
+                    <a:bodyPr/>
+                    <a:lstStyle/>
+                    <a:p>
+                      <a:pPr algn="ctr"/>
+                      <a:endParaRPr lang="zh-TW" altLang="en-US" sz="1000" b="0" dirty="0">
+                        <a:solidFill>
+                          <a:schemeClr val="bg1">
+                            <a:lumMod val="75000"/>
+                          </a:schemeClr>
+                        </a:solidFill>
+                        <a:latin typeface="ADLaM Display" panose="02010000000000000000" pitchFamily="2" charset="0"/>
+                        <a:cs typeface="ADLaM Display" panose="02010000000000000000" pitchFamily="2" charset="0"/>
+                      </a:endParaRPr>
+                    </a:p>
+                  </a:txBody>
+                  <a:tcPr marL="0" marR="0" marT="0" marB="0" anchor="ctr" anchorCtr="1">
+                    <a:lnL w="12700" cap="flat" cmpd="sng" algn="ctr">
+                      <a:noFill/>
+                      <a:prstDash val="solid"/>
+                      <a:round/>
+                      <a:headEnd type="none" w="med" len="med"/>
+                      <a:tailEnd type="none" w="med" len="med"/>
+                    </a:lnL>
+                    <a:lnR w="12700" cmpd="sng">
+                      <a:noFill/>
+                    </a:lnR>
+                    <a:lnT w="12700" cmpd="sng">
+                      <a:noFill/>
+                    </a:lnT>
+                    <a:lnB w="38100" cmpd="sng">
+                      <a:noFill/>
+                    </a:lnB>
+                    <a:lnTlToBr w="12700" cmpd="sng">
+                      <a:noFill/>
+                      <a:prstDash val="solid"/>
+                    </a:lnTlToBr>
+                    <a:lnBlToTr w="12700" cmpd="sng">
+                      <a:noFill/>
+                      <a:prstDash val="solid"/>
+                    </a:lnBlToTr>
+                    <a:solidFill>
+                      <a:schemeClr val="bg1"/>
+                    </a:solidFill>
+                  </a:tcPr>
+                </a:tc>
+                <a:tc>
+                  <a:txBody>
+                    <a:bodyPr/>
+                    <a:lstStyle/>
+                    <a:p>
+                      <a:pPr algn="ctr"/>
+                      <a:endParaRPr lang="zh-TW" altLang="en-US" sz="1000" b="0" dirty="0">
+                        <a:solidFill>
+                          <a:schemeClr val="bg1">
+                            <a:lumMod val="75000"/>
+                          </a:schemeClr>
+                        </a:solidFill>
+                        <a:latin typeface="ADLaM Display" panose="02010000000000000000" pitchFamily="2" charset="0"/>
+                        <a:cs typeface="ADLaM Display" panose="02010000000000000000" pitchFamily="2" charset="0"/>
+                      </a:endParaRPr>
+                    </a:p>
+                  </a:txBody>
+                  <a:tcPr marL="0" marR="0" marT="0" marB="0" anchor="ctr" anchorCtr="1">
+                    <a:lnL w="12700" cmpd="sng">
+                      <a:noFill/>
+                    </a:lnL>
+                    <a:lnR w="12700" cap="flat" cmpd="sng" algn="ctr">
+                      <a:noFill/>
+                      <a:prstDash val="solid"/>
+                      <a:round/>
+                      <a:headEnd type="none" w="med" len="med"/>
+                      <a:tailEnd type="none" w="med" len="med"/>
+                    </a:lnR>
+                    <a:lnT w="12700" cmpd="sng">
+                      <a:noFill/>
+                    </a:lnT>
+                    <a:lnB w="38100" cmpd="sng">
+                      <a:noFill/>
+                    </a:lnB>
+                    <a:lnTlToBr w="12700" cmpd="sng">
+                      <a:noFill/>
+                      <a:prstDash val="solid"/>
+                    </a:lnTlToBr>
+                    <a:lnBlToTr w="12700" cmpd="sng">
+                      <a:noFill/>
+                      <a:prstDash val="solid"/>
+                    </a:lnBlToTr>
+                    <a:solidFill>
+                      <a:schemeClr val="bg1"/>
+                    </a:solidFill>
+                  </a:tcPr>
+                </a:tc>
+                <a:extLst>
+                  <a:ext uri="{0D108BD9-81ED-4DB2-BD59-A6C34878D82A}">
+                    <a16:rowId xmlns:a16="http://schemas.microsoft.com/office/drawing/2014/main" val="1370384225"/>
+                  </a:ext>
+                </a:extLst>
+              </a:tr>
+              <a:tr h="214203">
+                <a:tc>
+                  <a:txBody>
+                    <a:bodyPr/>
+                    <a:lstStyle/>
+                    <a:p>
+                      <a:pPr algn="ctr"/>
+                      <a:r>
+                        <a:rPr lang="en-US" altLang="zh-TW" sz="1000" b="0" dirty="0">
+                          <a:solidFill>
+                            <a:schemeClr val="bg1">
+                              <a:lumMod val="75000"/>
+                            </a:schemeClr>
+                          </a:solidFill>
+                          <a:latin typeface="ADLaM Display" panose="02010000000000000000" pitchFamily="2" charset="0"/>
+                          <a:cs typeface="ADLaM Display" panose="02010000000000000000" pitchFamily="2" charset="0"/>
+                        </a:rPr>
+                        <a:t>0</a:t>
+                      </a:r>
+                      <a:endParaRPr lang="zh-TW" altLang="en-US" sz="1000" b="0" dirty="0">
+                        <a:solidFill>
+                          <a:schemeClr val="bg1">
+                            <a:lumMod val="75000"/>
+                          </a:schemeClr>
+                        </a:solidFill>
+                        <a:latin typeface="ADLaM Display" panose="02010000000000000000" pitchFamily="2" charset="0"/>
+                        <a:cs typeface="ADLaM Display" panose="02010000000000000000" pitchFamily="2" charset="0"/>
+                      </a:endParaRPr>
+                    </a:p>
+                  </a:txBody>
+                  <a:tcPr marL="0" marR="0" marT="0" marB="0" anchor="ctr" anchorCtr="1">
+                    <a:lnL w="12700" cap="flat" cmpd="sng" algn="ctr">
+                      <a:solidFill>
+                        <a:schemeClr val="bg1">
+                          <a:lumMod val="50000"/>
+                        </a:schemeClr>
+                      </a:solidFill>
+                      <a:prstDash val="solid"/>
+                      <a:round/>
+                      <a:headEnd type="none" w="med" len="med"/>
+                      <a:tailEnd type="none" w="med" len="med"/>
+                    </a:lnL>
+                    <a:lnR w="12700" cmpd="sng">
+                      <a:noFill/>
+                    </a:lnR>
+                    <a:lnT w="12700" cmpd="sng">
+                      <a:noFill/>
+                    </a:lnT>
+                    <a:lnB w="38100" cmpd="sng">
+                      <a:noFill/>
+                    </a:lnB>
+                    <a:lnTlToBr w="12700" cmpd="sng">
+                      <a:noFill/>
+                      <a:prstDash val="solid"/>
+                    </a:lnTlToBr>
+                    <a:lnBlToTr w="12700" cmpd="sng">
+                      <a:noFill/>
+                      <a:prstDash val="solid"/>
+                    </a:lnBlToTr>
+                    <a:solidFill>
+                      <a:schemeClr val="bg1">
+                        <a:lumMod val="95000"/>
+                      </a:schemeClr>
+                    </a:solidFill>
+                  </a:tcPr>
+                </a:tc>
+                <a:tc>
+                  <a:txBody>
+                    <a:bodyPr/>
+                    <a:lstStyle/>
+                    <a:p>
+                      <a:pPr algn="ctr"/>
+                      <a:r>
+                        <a:rPr lang="en-US" altLang="zh-TW" sz="1000" b="0" dirty="0">
+                          <a:solidFill>
+                            <a:schemeClr val="bg1">
+                              <a:lumMod val="75000"/>
+                            </a:schemeClr>
+                          </a:solidFill>
+                          <a:latin typeface="ADLaM Display" panose="02010000000000000000" pitchFamily="2" charset="0"/>
+                          <a:cs typeface="ADLaM Display" panose="02010000000000000000" pitchFamily="2" charset="0"/>
+                        </a:rPr>
+                        <a:t>0</a:t>
+                      </a:r>
+                      <a:endParaRPr lang="zh-TW" altLang="en-US" sz="1000" b="0" dirty="0">
+                        <a:solidFill>
+                          <a:schemeClr val="bg1">
+                            <a:lumMod val="75000"/>
+                          </a:schemeClr>
+                        </a:solidFill>
+                        <a:latin typeface="ADLaM Display" panose="02010000000000000000" pitchFamily="2" charset="0"/>
+                        <a:cs typeface="ADLaM Display" panose="02010000000000000000" pitchFamily="2" charset="0"/>
+                      </a:endParaRPr>
+                    </a:p>
+                  </a:txBody>
+                  <a:tcPr marL="0" marR="0" marT="0" marB="0" anchor="ctr" anchorCtr="1">
+                    <a:lnL w="12700" cmpd="sng">
+                      <a:noFill/>
+                    </a:lnL>
+                    <a:lnR w="19050" cap="flat" cmpd="sng" algn="ctr">
+                      <a:solidFill>
+                        <a:schemeClr val="bg1">
+                          <a:lumMod val="65000"/>
+                        </a:schemeClr>
+                      </a:solidFill>
+                      <a:prstDash val="solid"/>
+                      <a:round/>
+                      <a:headEnd type="none" w="med" len="med"/>
+                      <a:tailEnd type="none" w="med" len="med"/>
+                    </a:lnR>
+                    <a:lnT w="12700" cmpd="sng">
+                      <a:noFill/>
+                    </a:lnT>
+                    <a:lnB w="38100" cmpd="sng">
+                      <a:noFill/>
+                    </a:lnB>
+                    <a:lnTlToBr w="12700" cmpd="sng">
+                      <a:noFill/>
+                      <a:prstDash val="solid"/>
+                    </a:lnTlToBr>
+                    <a:lnBlToTr w="12700" cmpd="sng">
+                      <a:noFill/>
+                      <a:prstDash val="solid"/>
+                    </a:lnBlToTr>
+                    <a:solidFill>
+                      <a:schemeClr val="bg1">
+                        <a:lumMod val="95000"/>
+                      </a:schemeClr>
+                    </a:solidFill>
+                  </a:tcPr>
+                </a:tc>
+                <a:extLst>
+                  <a:ext uri="{0D108BD9-81ED-4DB2-BD59-A6C34878D82A}">
+                    <a16:rowId xmlns:a16="http://schemas.microsoft.com/office/drawing/2014/main" val="3975019256"/>
+                  </a:ext>
+                </a:extLst>
+              </a:tr>
+              <a:tr h="214203">
+                <a:tc>
+                  <a:txBody>
+                    <a:bodyPr/>
+                    <a:lstStyle/>
+                    <a:p>
+                      <a:pPr algn="ctr"/>
+                      <a:endParaRPr lang="zh-TW" altLang="en-US" sz="1000" b="0" dirty="0">
+                        <a:solidFill>
+                          <a:schemeClr val="bg1">
+                            <a:lumMod val="75000"/>
+                          </a:schemeClr>
+                        </a:solidFill>
+                        <a:latin typeface="ADLaM Display" panose="02010000000000000000" pitchFamily="2" charset="0"/>
+                        <a:cs typeface="ADLaM Display" panose="02010000000000000000" pitchFamily="2" charset="0"/>
+                      </a:endParaRPr>
+                    </a:p>
+                  </a:txBody>
+                  <a:tcPr marL="0" marR="0" marT="0" marB="0" anchor="ctr" anchorCtr="1">
+                    <a:lnL w="12700" cap="flat" cmpd="sng" algn="ctr">
+                      <a:noFill/>
+                      <a:prstDash val="solid"/>
+                      <a:round/>
+                      <a:headEnd type="none" w="med" len="med"/>
+                      <a:tailEnd type="none" w="med" len="med"/>
+                    </a:lnL>
+                    <a:lnR w="12700" cmpd="sng">
+                      <a:noFill/>
+                    </a:lnR>
+                    <a:lnT w="12700" cmpd="sng">
+                      <a:noFill/>
+                    </a:lnT>
+                    <a:lnB w="38100" cmpd="sng">
+                      <a:noFill/>
+                    </a:lnB>
+                    <a:lnTlToBr w="12700" cmpd="sng">
+                      <a:noFill/>
+                      <a:prstDash val="solid"/>
+                    </a:lnTlToBr>
+                    <a:lnBlToTr w="12700" cmpd="sng">
+                      <a:noFill/>
+                      <a:prstDash val="solid"/>
+                    </a:lnBlToTr>
+                    <a:solidFill>
+                      <a:schemeClr val="bg1"/>
+                    </a:solidFill>
+                  </a:tcPr>
+                </a:tc>
+                <a:tc>
+                  <a:txBody>
+                    <a:bodyPr/>
+                    <a:lstStyle/>
+                    <a:p>
+                      <a:pPr algn="ctr"/>
+                      <a:endParaRPr lang="zh-TW" altLang="en-US" sz="1000" b="0" dirty="0">
+                        <a:solidFill>
+                          <a:schemeClr val="bg1">
+                            <a:lumMod val="75000"/>
+                          </a:schemeClr>
+                        </a:solidFill>
+                        <a:latin typeface="ADLaM Display" panose="02010000000000000000" pitchFamily="2" charset="0"/>
+                        <a:cs typeface="ADLaM Display" panose="02010000000000000000" pitchFamily="2" charset="0"/>
+                      </a:endParaRPr>
+                    </a:p>
+                  </a:txBody>
+                  <a:tcPr marL="0" marR="0" marT="0" marB="0" anchor="ctr" anchorCtr="1">
+                    <a:lnL w="12700" cmpd="sng">
+                      <a:noFill/>
+                    </a:lnL>
+                    <a:lnR w="12700" cap="flat" cmpd="sng" algn="ctr">
+                      <a:noFill/>
+                      <a:prstDash val="solid"/>
+                      <a:round/>
+                      <a:headEnd type="none" w="med" len="med"/>
+                      <a:tailEnd type="none" w="med" len="med"/>
+                    </a:lnR>
+                    <a:lnT w="12700" cmpd="sng">
+                      <a:noFill/>
+                    </a:lnT>
+                    <a:lnB w="38100" cmpd="sng">
+                      <a:noFill/>
+                    </a:lnB>
+                    <a:lnTlToBr w="12700" cmpd="sng">
+                      <a:noFill/>
+                      <a:prstDash val="solid"/>
+                    </a:lnTlToBr>
+                    <a:lnBlToTr w="12700" cmpd="sng">
+                      <a:noFill/>
+                      <a:prstDash val="solid"/>
+                    </a:lnBlToTr>
+                    <a:solidFill>
+                      <a:schemeClr val="bg1"/>
+                    </a:solidFill>
+                  </a:tcPr>
+                </a:tc>
+                <a:extLst>
+                  <a:ext uri="{0D108BD9-81ED-4DB2-BD59-A6C34878D82A}">
+                    <a16:rowId xmlns:a16="http://schemas.microsoft.com/office/drawing/2014/main" val="3136641310"/>
+                  </a:ext>
+                </a:extLst>
+              </a:tr>
+              <a:tr h="214203">
+                <a:tc>
+                  <a:txBody>
+                    <a:bodyPr/>
+                    <a:lstStyle/>
+                    <a:p>
+                      <a:pPr algn="ctr"/>
+                      <a:r>
+                        <a:rPr lang="en-US" altLang="zh-TW" sz="1000" b="0" dirty="0">
+                          <a:solidFill>
+                            <a:schemeClr val="accent4">
+                              <a:lumMod val="40000"/>
+                              <a:lumOff val="60000"/>
+                            </a:schemeClr>
+                          </a:solidFill>
+                          <a:latin typeface="ADLaM Display" panose="02010000000000000000" pitchFamily="2" charset="0"/>
+                          <a:cs typeface="ADLaM Display" panose="02010000000000000000" pitchFamily="2" charset="0"/>
+                        </a:rPr>
+                        <a:t>0</a:t>
+                      </a:r>
+                      <a:endParaRPr lang="zh-TW" altLang="en-US" sz="1000" b="0" dirty="0">
+                        <a:solidFill>
+                          <a:schemeClr val="accent4">
+                            <a:lumMod val="40000"/>
+                            <a:lumOff val="60000"/>
+                          </a:schemeClr>
+                        </a:solidFill>
+                        <a:latin typeface="ADLaM Display" panose="02010000000000000000" pitchFamily="2" charset="0"/>
+                        <a:cs typeface="ADLaM Display" panose="02010000000000000000" pitchFamily="2" charset="0"/>
+                      </a:endParaRPr>
+                    </a:p>
+                  </a:txBody>
+                  <a:tcPr marL="0" marR="0" marT="0" marB="0" anchor="ctr" anchorCtr="1">
+                    <a:lnL w="12700" cap="flat" cmpd="sng" algn="ctr">
+                      <a:solidFill>
+                        <a:schemeClr val="bg1">
+                          <a:lumMod val="50000"/>
+                        </a:schemeClr>
+                      </a:solidFill>
+                      <a:prstDash val="solid"/>
+                      <a:round/>
+                      <a:headEnd type="none" w="med" len="med"/>
+                      <a:tailEnd type="none" w="med" len="med"/>
+                    </a:lnL>
+                    <a:lnR w="12700" cmpd="sng">
+                      <a:noFill/>
+                    </a:lnR>
+                    <a:lnT w="12700" cmpd="sng">
+                      <a:noFill/>
+                    </a:lnT>
+                    <a:lnB w="38100" cmpd="sng">
+                      <a:noFill/>
+                    </a:lnB>
+                    <a:lnTlToBr w="12700" cmpd="sng">
+                      <a:noFill/>
+                      <a:prstDash val="solid"/>
+                    </a:lnTlToBr>
+                    <a:lnBlToTr w="12700" cmpd="sng">
+                      <a:noFill/>
+                      <a:prstDash val="solid"/>
+                    </a:lnBlToTr>
+                    <a:solidFill>
+                      <a:schemeClr val="bg1">
+                        <a:lumMod val="95000"/>
+                      </a:schemeClr>
+                    </a:solidFill>
+                  </a:tcPr>
+                </a:tc>
+                <a:tc>
+                  <a:txBody>
+                    <a:bodyPr/>
+                    <a:lstStyle/>
+                    <a:p>
+                      <a:pPr algn="ctr"/>
+                      <a:r>
+                        <a:rPr lang="en-US" altLang="zh-TW" sz="1000" b="0" dirty="0">
+                          <a:solidFill>
+                            <a:schemeClr val="accent4">
+                              <a:lumMod val="40000"/>
+                              <a:lumOff val="60000"/>
+                            </a:schemeClr>
+                          </a:solidFill>
+                          <a:latin typeface="ADLaM Display" panose="02010000000000000000" pitchFamily="2" charset="0"/>
+                          <a:cs typeface="ADLaM Display" panose="02010000000000000000" pitchFamily="2" charset="0"/>
+                        </a:rPr>
+                        <a:t>0</a:t>
+                      </a:r>
+                      <a:endParaRPr lang="zh-TW" altLang="en-US" sz="1000" b="0" dirty="0">
+                        <a:solidFill>
+                          <a:schemeClr val="accent4">
+                            <a:lumMod val="40000"/>
+                            <a:lumOff val="60000"/>
+                          </a:schemeClr>
+                        </a:solidFill>
+                        <a:latin typeface="ADLaM Display" panose="02010000000000000000" pitchFamily="2" charset="0"/>
+                        <a:cs typeface="ADLaM Display" panose="02010000000000000000" pitchFamily="2" charset="0"/>
+                      </a:endParaRPr>
+                    </a:p>
+                  </a:txBody>
+                  <a:tcPr marL="0" marR="0" marT="0" marB="0" anchor="ctr" anchorCtr="1">
+                    <a:lnL w="12700" cmpd="sng">
+                      <a:noFill/>
+                    </a:lnL>
+                    <a:lnR w="19050" cap="flat" cmpd="sng" algn="ctr">
+                      <a:solidFill>
+                        <a:schemeClr val="bg1">
+                          <a:lumMod val="65000"/>
+                        </a:schemeClr>
+                      </a:solidFill>
+                      <a:prstDash val="solid"/>
+                      <a:round/>
+                      <a:headEnd type="none" w="med" len="med"/>
+                      <a:tailEnd type="none" w="med" len="med"/>
+                    </a:lnR>
+                    <a:lnT w="12700" cmpd="sng">
+                      <a:noFill/>
+                    </a:lnT>
+                    <a:lnB w="38100" cmpd="sng">
+                      <a:noFill/>
+                    </a:lnB>
+                    <a:lnTlToBr w="12700" cmpd="sng">
+                      <a:noFill/>
+                      <a:prstDash val="solid"/>
+                    </a:lnTlToBr>
+                    <a:lnBlToTr w="12700" cmpd="sng">
+                      <a:noFill/>
+                      <a:prstDash val="solid"/>
+                    </a:lnBlToTr>
+                    <a:solidFill>
+                      <a:schemeClr val="bg1">
+                        <a:lumMod val="95000"/>
+                      </a:schemeClr>
+                    </a:solidFill>
+                  </a:tcPr>
+                </a:tc>
+                <a:extLst>
+                  <a:ext uri="{0D108BD9-81ED-4DB2-BD59-A6C34878D82A}">
+                    <a16:rowId xmlns:a16="http://schemas.microsoft.com/office/drawing/2014/main" val="2789904019"/>
+                  </a:ext>
+                </a:extLst>
+              </a:tr>
+            </a:tbl>
+          </a:graphicData>
+        </a:graphic>
+      </p:graphicFrame>
+      <p:graphicFrame>
+        <p:nvGraphicFramePr>
+          <p:cNvPr id="247" name="表格 246">
+            <a:extLst>
+              <a:ext uri="{FF2B5EF4-FFF2-40B4-BE49-F238E27FC236}">
+                <a16:creationId xmlns:a16="http://schemas.microsoft.com/office/drawing/2014/main" id="{3AC4EF3F-1274-2ADF-A4D9-35B088874371}"/>
+              </a:ext>
+            </a:extLst>
+          </p:cNvPr>
+          <p:cNvGraphicFramePr>
+            <a:graphicFrameLocks noGrp="1"/>
+          </p:cNvGraphicFramePr>
+          <p:nvPr>
+            <p:extLst>
+              <p:ext uri="{D42A27DB-BD31-4B8C-83A1-F6EECF244321}">
+                <p14:modId xmlns:p14="http://schemas.microsoft.com/office/powerpoint/2010/main" val="4191640365"/>
+              </p:ext>
+            </p:extLst>
+          </p:nvPr>
+        </p:nvGraphicFramePr>
+        <p:xfrm>
+          <a:off x="5522180" y="2075808"/>
+          <a:ext cx="415216" cy="214203"/>
+        </p:xfrm>
+        <a:graphic>
+          <a:graphicData uri="http://schemas.openxmlformats.org/drawingml/2006/table">
+            <a:tbl>
+              <a:tblPr firstRow="1" bandRow="1">
+                <a:tableStyleId>{5C22544A-7EE6-4342-B048-85BDC9FD1C3A}</a:tableStyleId>
+              </a:tblPr>
+              <a:tblGrid>
+                <a:gridCol w="211690">
+                  <a:extLst>
+                    <a:ext uri="{9D8B030D-6E8A-4147-A177-3AD203B41FA5}">
+                      <a16:colId xmlns:a16="http://schemas.microsoft.com/office/drawing/2014/main" val="871242339"/>
+                    </a:ext>
+                  </a:extLst>
+                </a:gridCol>
+                <a:gridCol w="203526">
+                  <a:extLst>
+                    <a:ext uri="{9D8B030D-6E8A-4147-A177-3AD203B41FA5}">
+                      <a16:colId xmlns:a16="http://schemas.microsoft.com/office/drawing/2014/main" val="1424301285"/>
+                    </a:ext>
+                  </a:extLst>
+                </a:gridCol>
+              </a:tblGrid>
+              <a:tr h="214203">
+                <a:tc>
+                  <a:txBody>
+                    <a:bodyPr/>
+                    <a:lstStyle/>
+                    <a:p>
+                      <a:pPr algn="ctr"/>
+                      <a:r>
+                        <a:rPr lang="en-US" altLang="zh-TW" sz="1000" b="0" dirty="0">
+                          <a:solidFill>
+                            <a:schemeClr val="bg2">
+                              <a:lumMod val="75000"/>
+                            </a:schemeClr>
+                          </a:solidFill>
+                          <a:latin typeface="ADLaM Display" panose="02010000000000000000" pitchFamily="2" charset="0"/>
+                          <a:cs typeface="ADLaM Display" panose="02010000000000000000" pitchFamily="2" charset="0"/>
+                        </a:rPr>
+                        <a:t>0</a:t>
+                      </a:r>
+                      <a:endParaRPr lang="zh-TW" altLang="en-US" sz="1000" b="0" dirty="0">
+                        <a:solidFill>
+                          <a:schemeClr val="bg2">
+                            <a:lumMod val="75000"/>
+                          </a:schemeClr>
+                        </a:solidFill>
+                        <a:latin typeface="ADLaM Display" panose="02010000000000000000" pitchFamily="2" charset="0"/>
+                        <a:cs typeface="ADLaM Display" panose="02010000000000000000" pitchFamily="2" charset="0"/>
+                      </a:endParaRPr>
+                    </a:p>
+                  </a:txBody>
+                  <a:tcPr marL="0" marR="0" marT="0" marB="0" anchor="ctr" anchorCtr="1">
+                    <a:lnL w="12700" cap="flat" cmpd="sng" algn="ctr">
+                      <a:solidFill>
+                        <a:schemeClr val="bg1">
+                          <a:lumMod val="50000"/>
+                        </a:schemeClr>
+                      </a:solidFill>
+                      <a:prstDash val="solid"/>
+                      <a:round/>
+                      <a:headEnd type="none" w="med" len="med"/>
+                      <a:tailEnd type="none" w="med" len="med"/>
+                    </a:lnL>
+                    <a:lnR w="12700" cmpd="sng">
+                      <a:noFill/>
+                    </a:lnR>
+                    <a:lnT w="12700" cmpd="sng">
+                      <a:noFill/>
+                    </a:lnT>
+                    <a:lnB w="38100" cmpd="sng">
+                      <a:noFill/>
+                    </a:lnB>
+                    <a:lnTlToBr w="12700" cmpd="sng">
+                      <a:noFill/>
+                      <a:prstDash val="solid"/>
+                    </a:lnTlToBr>
+                    <a:lnBlToTr w="12700" cmpd="sng">
+                      <a:noFill/>
+                      <a:prstDash val="solid"/>
+                    </a:lnBlToTr>
+                    <a:solidFill>
+                      <a:schemeClr val="bg1">
+                        <a:lumMod val="95000"/>
+                      </a:schemeClr>
+                    </a:solidFill>
+                  </a:tcPr>
+                </a:tc>
+                <a:tc>
+                  <a:txBody>
+                    <a:bodyPr/>
+                    <a:lstStyle/>
+                    <a:p>
+                      <a:pPr algn="ctr"/>
+                      <a:r>
+                        <a:rPr lang="en-US" altLang="zh-TW" sz="1000" b="0" dirty="0">
+                          <a:solidFill>
+                            <a:schemeClr val="bg2">
+                              <a:lumMod val="75000"/>
+                            </a:schemeClr>
+                          </a:solidFill>
+                          <a:latin typeface="ADLaM Display" panose="02010000000000000000" pitchFamily="2" charset="0"/>
+                          <a:cs typeface="ADLaM Display" panose="02010000000000000000" pitchFamily="2" charset="0"/>
+                        </a:rPr>
+                        <a:t>0</a:t>
+                      </a:r>
+                      <a:endParaRPr lang="zh-TW" altLang="en-US" sz="1000" b="0" dirty="0">
+                        <a:solidFill>
+                          <a:schemeClr val="bg2">
+                            <a:lumMod val="75000"/>
+                          </a:schemeClr>
+                        </a:solidFill>
+                        <a:latin typeface="ADLaM Display" panose="02010000000000000000" pitchFamily="2" charset="0"/>
+                        <a:cs typeface="ADLaM Display" panose="02010000000000000000" pitchFamily="2" charset="0"/>
+                      </a:endParaRPr>
+                    </a:p>
+                  </a:txBody>
+                  <a:tcPr marL="0" marR="0" marT="0" marB="0" anchor="ctr" anchorCtr="1">
+                    <a:lnL w="12700" cmpd="sng">
+                      <a:noFill/>
+                    </a:lnL>
+                    <a:lnR w="19050" cap="flat" cmpd="sng" algn="ctr">
+                      <a:solidFill>
+                        <a:schemeClr val="bg1">
+                          <a:lumMod val="65000"/>
+                        </a:schemeClr>
+                      </a:solidFill>
+                      <a:prstDash val="solid"/>
+                      <a:round/>
+                      <a:headEnd type="none" w="med" len="med"/>
+                      <a:tailEnd type="none" w="med" len="med"/>
+                    </a:lnR>
+                    <a:lnT w="12700" cmpd="sng">
+                      <a:noFill/>
+                    </a:lnT>
+                    <a:lnB w="38100" cmpd="sng">
+                      <a:noFill/>
+                    </a:lnB>
+                    <a:lnTlToBr w="12700" cmpd="sng">
+                      <a:noFill/>
+                      <a:prstDash val="solid"/>
+                    </a:lnTlToBr>
+                    <a:lnBlToTr w="12700" cmpd="sng">
+                      <a:noFill/>
+                      <a:prstDash val="solid"/>
+                    </a:lnBlToTr>
+                    <a:solidFill>
+                      <a:schemeClr val="bg1">
+                        <a:lumMod val="95000"/>
+                      </a:schemeClr>
+                    </a:solidFill>
+                  </a:tcPr>
+                </a:tc>
+                <a:extLst>
+                  <a:ext uri="{0D108BD9-81ED-4DB2-BD59-A6C34878D82A}">
+                    <a16:rowId xmlns:a16="http://schemas.microsoft.com/office/drawing/2014/main" val="1375496678"/>
+                  </a:ext>
+                </a:extLst>
+              </a:tr>
+            </a:tbl>
+          </a:graphicData>
+        </a:graphic>
+      </p:graphicFrame>
+      <p:sp>
+        <p:nvSpPr>
+          <p:cNvPr id="253" name="文字方塊 252">
+            <a:extLst>
+              <a:ext uri="{FF2B5EF4-FFF2-40B4-BE49-F238E27FC236}">
+                <a16:creationId xmlns:a16="http://schemas.microsoft.com/office/drawing/2014/main" id="{45A15D45-61C9-D3E2-0EC7-8ABD4A586C80}"/>
+              </a:ext>
+            </a:extLst>
+          </p:cNvPr>
+          <p:cNvSpPr txBox="1"/>
+          <p:nvPr/>
+        </p:nvSpPr>
+        <p:spPr>
+          <a:xfrm>
+            <a:off x="5511157" y="1844824"/>
+            <a:ext cx="415217" cy="184666"/>
+          </a:xfrm>
+          <a:prstGeom prst="rect">
+            <a:avLst/>
+          </a:prstGeom>
+          <a:noFill/>
+        </p:spPr>
+        <p:txBody>
+          <a:bodyPr wrap="square" lIns="0" tIns="0" rIns="0" bIns="0" rtlCol="0" anchor="t">
+            <a:spAutoFit/>
+          </a:bodyPr>
+          <a:lstStyle/>
+          <a:p>
+            <a:pPr algn="ctr"/>
+            <a:r>
+              <a:rPr lang="en-US" altLang="zh-TW" sz="1200" dirty="0">
+                <a:latin typeface="ADLaM Display" panose="02010000000000000000" pitchFamily="2" charset="0"/>
+                <a:ea typeface="ADLaM Display" panose="02010000000000000000" pitchFamily="2" charset="0"/>
+                <a:cs typeface="ADLaM Display" panose="02010000000000000000" pitchFamily="2" charset="0"/>
+              </a:rPr>
+              <a:t>C</a:t>
+            </a:r>
+            <a:r>
+              <a:rPr lang="en-US" altLang="zh-TW" sz="1200" b="0" dirty="0">
+                <a:latin typeface="ADLaM Display" panose="02010000000000000000" pitchFamily="2" charset="0"/>
+                <a:ea typeface="ADLaM Display" panose="02010000000000000000" pitchFamily="2" charset="0"/>
+                <a:cs typeface="ADLaM Display" panose="02010000000000000000" pitchFamily="2" charset="0"/>
+              </a:rPr>
+              <a:t>(t)</a:t>
+            </a:r>
+            <a:endParaRPr lang="zh-TW" altLang="en-US" sz="1200" dirty="0"/>
+          </a:p>
+        </p:txBody>
+      </p:sp>
+      <p:sp>
+        <p:nvSpPr>
+          <p:cNvPr id="255" name="矩形 254">
+            <a:extLst>
+              <a:ext uri="{FF2B5EF4-FFF2-40B4-BE49-F238E27FC236}">
+                <a16:creationId xmlns:a16="http://schemas.microsoft.com/office/drawing/2014/main" id="{39D3F783-DCBF-8166-592E-9053AF6E1A01}"/>
+              </a:ext>
+            </a:extLst>
+          </p:cNvPr>
+          <p:cNvSpPr/>
+          <p:nvPr/>
+        </p:nvSpPr>
+        <p:spPr>
+          <a:xfrm>
+            <a:off x="5443135" y="3723794"/>
+            <a:ext cx="569295" cy="355845"/>
+          </a:xfrm>
+          <a:prstGeom prst="rect">
+            <a:avLst/>
+          </a:prstGeom>
+          <a:solidFill>
+            <a:schemeClr val="accent4">
+              <a:lumMod val="20000"/>
+              <a:lumOff val="80000"/>
+              <a:alpha val="40000"/>
+            </a:schemeClr>
+          </a:solidFill>
+          <a:ln w="15875">
+            <a:solidFill>
+              <a:schemeClr val="accent4">
+                <a:lumMod val="75000"/>
+              </a:schemeClr>
+            </a:solidFill>
+            <a:prstDash val="sysDot"/>
+            <a:extLst>
+              <a:ext uri="{C807C97D-BFC1-408E-A445-0C87EB9F89A2}">
+                <ask:lineSketchStyleProps xmlns:ask="http://schemas.microsoft.com/office/drawing/2018/sketchyshapes">
+                  <ask:type>
+                    <ask:lineSketchNone/>
+                  </ask:type>
+                </ask:lineSketchStyleProps>
+              </a:ext>
+            </a:extLst>
+          </a:ln>
+        </p:spPr>
+        <p:style>
+          <a:lnRef idx="2">
+            <a:schemeClr val="accent1">
+              <a:shade val="15000"/>
+            </a:schemeClr>
+          </a:lnRef>
+          <a:fillRef idx="1">
+            <a:schemeClr val="accent1"/>
+          </a:fillRef>
+          <a:effectRef idx="0">
+            <a:schemeClr val="accent1"/>
+          </a:effectRef>
+          <a:fontRef idx="minor">
+            <a:schemeClr val="lt1"/>
+          </a:fontRef>
+        </p:style>
+        <p:txBody>
+          <a:bodyPr wrap="none" lIns="0" tIns="0" rIns="0" bIns="0" rtlCol="0" anchor="ctr" anchorCtr="1"/>
+          <a:lstStyle/>
+          <a:p>
+            <a:pPr algn="ctr">
+              <a:lnSpc>
+                <a:spcPts val="1500"/>
+              </a:lnSpc>
+            </a:pPr>
+            <a:r>
+              <a:rPr lang="en-US" altLang="zh-TW" sz="1400" b="1" dirty="0">
+                <a:solidFill>
+                  <a:schemeClr val="accent4"/>
+                </a:solidFill>
+                <a:latin typeface="+mj-lt"/>
+                <a:ea typeface="+mj-ea"/>
+              </a:rPr>
+              <a:t>C(4)</a:t>
+            </a:r>
+          </a:p>
+        </p:txBody>
+      </p:sp>
+      <p:sp>
+        <p:nvSpPr>
+          <p:cNvPr id="261" name="矩形 260">
+            <a:extLst>
+              <a:ext uri="{FF2B5EF4-FFF2-40B4-BE49-F238E27FC236}">
+                <a16:creationId xmlns:a16="http://schemas.microsoft.com/office/drawing/2014/main" id="{45AD05D0-537C-353F-B140-C4376E317C2B}"/>
+              </a:ext>
+            </a:extLst>
+          </p:cNvPr>
+          <p:cNvSpPr/>
+          <p:nvPr/>
+        </p:nvSpPr>
+        <p:spPr>
+          <a:xfrm>
+            <a:off x="5442865" y="3284985"/>
+            <a:ext cx="569295" cy="355845"/>
+          </a:xfrm>
+          <a:prstGeom prst="rect">
+            <a:avLst/>
+          </a:prstGeom>
+          <a:solidFill>
+            <a:schemeClr val="accent5">
+              <a:lumMod val="20000"/>
+              <a:lumOff val="80000"/>
+              <a:alpha val="40000"/>
+            </a:schemeClr>
+          </a:solidFill>
+          <a:ln w="15875">
+            <a:solidFill>
+              <a:schemeClr val="tx2">
+                <a:lumMod val="40000"/>
+                <a:lumOff val="60000"/>
+              </a:schemeClr>
+            </a:solidFill>
+            <a:prstDash val="sysDot"/>
+            <a:extLst>
+              <a:ext uri="{C807C97D-BFC1-408E-A445-0C87EB9F89A2}">
+                <ask:lineSketchStyleProps xmlns:ask="http://schemas.microsoft.com/office/drawing/2018/sketchyshapes">
+                  <ask:type>
+                    <ask:lineSketchNone/>
+                  </ask:type>
+                </ask:lineSketchStyleProps>
+              </a:ext>
+            </a:extLst>
+          </a:ln>
+        </p:spPr>
+        <p:style>
+          <a:lnRef idx="2">
+            <a:schemeClr val="accent1">
+              <a:shade val="15000"/>
+            </a:schemeClr>
+          </a:lnRef>
+          <a:fillRef idx="1">
+            <a:schemeClr val="accent1"/>
+          </a:fillRef>
+          <a:effectRef idx="0">
+            <a:schemeClr val="accent1"/>
+          </a:effectRef>
+          <a:fontRef idx="minor">
+            <a:schemeClr val="lt1"/>
+          </a:fontRef>
+        </p:style>
+        <p:txBody>
+          <a:bodyPr wrap="none" lIns="0" tIns="0" rIns="0" bIns="0" rtlCol="0" anchor="ctr" anchorCtr="1"/>
+          <a:lstStyle/>
+          <a:p>
+            <a:pPr algn="ctr">
+              <a:lnSpc>
+                <a:spcPts val="1400"/>
+              </a:lnSpc>
+            </a:pPr>
+            <a:r>
+              <a:rPr lang="en-US" altLang="zh-TW" sz="1200" b="1" dirty="0">
+                <a:solidFill>
+                  <a:schemeClr val="tx2">
+                    <a:lumMod val="60000"/>
+                    <a:lumOff val="40000"/>
+                  </a:schemeClr>
+                </a:solidFill>
+                <a:ea typeface="微軟正黑體" panose="020B0604030504040204" pitchFamily="34" charset="-120"/>
+              </a:rPr>
+              <a:t>C3</a:t>
+            </a:r>
+          </a:p>
+        </p:txBody>
+      </p:sp>
+      <p:cxnSp>
+        <p:nvCxnSpPr>
+          <p:cNvPr id="268" name="接點: 肘形 267">
+            <a:extLst>
+              <a:ext uri="{FF2B5EF4-FFF2-40B4-BE49-F238E27FC236}">
+                <a16:creationId xmlns:a16="http://schemas.microsoft.com/office/drawing/2014/main" id="{7EF87034-03F1-240B-BAF7-FF0E3F939EC3}"/>
+              </a:ext>
+            </a:extLst>
+          </p:cNvPr>
+          <p:cNvCxnSpPr>
+            <a:cxnSpLocks/>
+            <a:stCxn id="100" idx="2"/>
+            <a:endCxn id="333" idx="0"/>
+          </p:cNvCxnSpPr>
+          <p:nvPr/>
+        </p:nvCxnSpPr>
+        <p:spPr>
+          <a:xfrm rot="5400000">
+            <a:off x="1843460" y="2896082"/>
+            <a:ext cx="1257280" cy="96589"/>
+          </a:xfrm>
+          <a:prstGeom prst="bentConnector3">
+            <a:avLst>
+              <a:gd name="adj1" fmla="val 50000"/>
+            </a:avLst>
+          </a:prstGeom>
+          <a:ln w="15875">
+            <a:solidFill>
+              <a:schemeClr val="accent4"/>
+            </a:solidFill>
+            <a:prstDash val="sysDot"/>
+            <a:tailEnd type="triangle" w="sm" len="med"/>
+          </a:ln>
+        </p:spPr>
+        <p:style>
+          <a:lnRef idx="1">
+            <a:schemeClr val="accent1"/>
+          </a:lnRef>
+          <a:fillRef idx="0">
+            <a:schemeClr val="accent1"/>
+          </a:fillRef>
+          <a:effectRef idx="0">
+            <a:schemeClr val="accent1"/>
+          </a:effectRef>
+          <a:fontRef idx="minor">
+            <a:schemeClr val="tx1"/>
+          </a:fontRef>
+        </p:style>
+      </p:cxnSp>
+      <p:grpSp>
+        <p:nvGrpSpPr>
+          <p:cNvPr id="365" name="群組 364">
+            <a:extLst>
+              <a:ext uri="{FF2B5EF4-FFF2-40B4-BE49-F238E27FC236}">
+                <a16:creationId xmlns:a16="http://schemas.microsoft.com/office/drawing/2014/main" id="{1B01C14B-B4B6-771F-4A3D-AA77FCF8B5C7}"/>
+              </a:ext>
+            </a:extLst>
+          </p:cNvPr>
+          <p:cNvGrpSpPr/>
+          <p:nvPr/>
+        </p:nvGrpSpPr>
+        <p:grpSpPr>
+          <a:xfrm>
+            <a:off x="2267744" y="3573016"/>
+            <a:ext cx="1944216" cy="192822"/>
+            <a:chOff x="2277562" y="3566144"/>
+            <a:chExt cx="1944216" cy="182880"/>
+          </a:xfrm>
+        </p:grpSpPr>
+        <p:sp>
+          <p:nvSpPr>
+            <p:cNvPr id="93" name="文字方塊 92">
+              <a:extLst>
+                <a:ext uri="{FF2B5EF4-FFF2-40B4-BE49-F238E27FC236}">
+                  <a16:creationId xmlns:a16="http://schemas.microsoft.com/office/drawing/2014/main" id="{202A9E67-9667-A38D-40C2-597520F7CD55}"/>
+                </a:ext>
+              </a:extLst>
+            </p:cNvPr>
+            <p:cNvSpPr txBox="1"/>
+            <p:nvPr/>
+          </p:nvSpPr>
+          <p:spPr>
+            <a:xfrm>
+              <a:off x="3830608" y="3566144"/>
+              <a:ext cx="391170" cy="182880"/>
+            </a:xfrm>
+            <a:prstGeom prst="rect">
+              <a:avLst/>
+            </a:prstGeom>
+            <a:noFill/>
+          </p:spPr>
+          <p:txBody>
+            <a:bodyPr wrap="none" lIns="0" tIns="0" rIns="0" bIns="0" rtlCol="0" anchor="ctr" anchorCtr="1">
+              <a:noAutofit/>
+            </a:bodyPr>
+            <a:lstStyle/>
+            <a:p>
+              <a:pPr algn="ctr">
+                <a:lnSpc>
+                  <a:spcPts val="1400"/>
+                </a:lnSpc>
+              </a:pPr>
+              <a:r>
+                <a:rPr lang="en-US" altLang="zh-TW" sz="1400" b="1" dirty="0">
+                  <a:solidFill>
+                    <a:schemeClr val="accent4"/>
+                  </a:solidFill>
+                  <a:ea typeface="ADLaM Display" panose="02010000000000000000" pitchFamily="2" charset="0"/>
+                  <a:cs typeface="ADLaM Display" panose="02010000000000000000" pitchFamily="2" charset="0"/>
+                </a:rPr>
+                <a:t>= </a:t>
+              </a:r>
+              <a:r>
+                <a:rPr lang="en-US" altLang="zh-TW" sz="1400" b="1" dirty="0">
+                  <a:solidFill>
+                    <a:schemeClr val="accent4">
+                      <a:lumMod val="60000"/>
+                      <a:lumOff val="40000"/>
+                    </a:schemeClr>
+                  </a:solidFill>
+                  <a:ea typeface="ADLaM Display" panose="02010000000000000000" pitchFamily="2" charset="0"/>
+                  <a:cs typeface="ADLaM Display" panose="02010000000000000000" pitchFamily="2" charset="0"/>
+                </a:rPr>
+                <a:t>C(4)</a:t>
+              </a:r>
+              <a:endParaRPr lang="zh-TW" altLang="en-US" sz="1400" b="1" baseline="-25000" dirty="0">
+                <a:solidFill>
+                  <a:schemeClr val="accent4">
+                    <a:lumMod val="60000"/>
+                    <a:lumOff val="40000"/>
+                  </a:schemeClr>
+                </a:solidFill>
+              </a:endParaRPr>
+            </a:p>
+          </p:txBody>
+        </p:sp>
+        <p:sp>
+          <p:nvSpPr>
+            <p:cNvPr id="296" name="文字方塊 295">
+              <a:extLst>
+                <a:ext uri="{FF2B5EF4-FFF2-40B4-BE49-F238E27FC236}">
+                  <a16:creationId xmlns:a16="http://schemas.microsoft.com/office/drawing/2014/main" id="{393BD97A-B14F-525F-59EC-8B80FE622B25}"/>
+                </a:ext>
+              </a:extLst>
+            </p:cNvPr>
+            <p:cNvSpPr txBox="1"/>
+            <p:nvPr/>
+          </p:nvSpPr>
+          <p:spPr>
+            <a:xfrm>
+              <a:off x="2925634" y="3566144"/>
+              <a:ext cx="139565" cy="182880"/>
+            </a:xfrm>
+            <a:prstGeom prst="rect">
+              <a:avLst/>
+            </a:prstGeom>
+            <a:noFill/>
+          </p:spPr>
+          <p:txBody>
+            <a:bodyPr wrap="none" lIns="0" tIns="0" rIns="0" bIns="0" rtlCol="0" anchor="ctr" anchorCtr="1">
+              <a:noAutofit/>
+            </a:bodyPr>
+            <a:lstStyle/>
+            <a:p>
+              <a:pPr algn="ctr">
+                <a:lnSpc>
+                  <a:spcPts val="1400"/>
+                </a:lnSpc>
+              </a:pPr>
+              <a:r>
+                <a:rPr lang="en-US" altLang="zh-TW" sz="1400" b="1" dirty="0">
+                  <a:solidFill>
+                    <a:schemeClr val="accent4"/>
+                  </a:solidFill>
+                  <a:ea typeface="ADLaM Display" panose="02010000000000000000" pitchFamily="2" charset="0"/>
+                  <a:cs typeface="ADLaM Display" panose="02010000000000000000" pitchFamily="2" charset="0"/>
+                </a:rPr>
+                <a:t>+</a:t>
+              </a:r>
+              <a:endParaRPr lang="zh-TW" altLang="en-US" sz="1400" b="1" baseline="-25000" dirty="0">
+                <a:solidFill>
+                  <a:schemeClr val="accent4"/>
+                </a:solidFill>
+              </a:endParaRPr>
+            </a:p>
+          </p:txBody>
+        </p:sp>
+        <p:sp>
+          <p:nvSpPr>
+            <p:cNvPr id="306" name="文字方塊 305">
+              <a:extLst>
+                <a:ext uri="{FF2B5EF4-FFF2-40B4-BE49-F238E27FC236}">
+                  <a16:creationId xmlns:a16="http://schemas.microsoft.com/office/drawing/2014/main" id="{85A1A1DE-9FA4-3618-40E6-A1023D3809A6}"/>
+                </a:ext>
+              </a:extLst>
+            </p:cNvPr>
+            <p:cNvSpPr txBox="1"/>
+            <p:nvPr/>
+          </p:nvSpPr>
+          <p:spPr>
+            <a:xfrm>
+              <a:off x="3086557" y="3566144"/>
+              <a:ext cx="199117" cy="182880"/>
+            </a:xfrm>
+            <a:prstGeom prst="rect">
+              <a:avLst/>
+            </a:prstGeom>
+            <a:noFill/>
+          </p:spPr>
+          <p:txBody>
+            <a:bodyPr wrap="none" lIns="0" tIns="0" rIns="0" bIns="0" rtlCol="0" anchor="ctr" anchorCtr="1">
+              <a:noAutofit/>
+            </a:bodyPr>
+            <a:lstStyle/>
+            <a:p>
+              <a:pPr algn="ctr">
+                <a:lnSpc>
+                  <a:spcPts val="1400"/>
+                </a:lnSpc>
+              </a:pPr>
+              <a:r>
+                <a:rPr lang="en-US" altLang="zh-TW" sz="1400" b="1" dirty="0">
+                  <a:solidFill>
+                    <a:schemeClr val="accent4"/>
+                  </a:solidFill>
+                  <a:latin typeface="Calibri" panose="020F0502020204030204" pitchFamily="34" charset="0"/>
+                  <a:ea typeface="Calibri" panose="020F0502020204030204" pitchFamily="34" charset="0"/>
+                  <a:cs typeface="Calibri" panose="020F0502020204030204" pitchFamily="34" charset="0"/>
+                </a:rPr>
+                <a:t>i4</a:t>
+              </a:r>
+              <a:endParaRPr lang="zh-TW" altLang="en-US" sz="1400" b="1" baseline="-25000" dirty="0">
+                <a:solidFill>
+                  <a:schemeClr val="accent4">
+                    <a:lumMod val="60000"/>
+                    <a:lumOff val="40000"/>
+                  </a:schemeClr>
+                </a:solidFill>
+              </a:endParaRPr>
+            </a:p>
+          </p:txBody>
+        </p:sp>
+        <p:sp>
+          <p:nvSpPr>
+            <p:cNvPr id="308" name="文字方塊 307">
+              <a:extLst>
+                <a:ext uri="{FF2B5EF4-FFF2-40B4-BE49-F238E27FC236}">
+                  <a16:creationId xmlns:a16="http://schemas.microsoft.com/office/drawing/2014/main" id="{58110583-06D2-26F7-0EF0-7BA9CC1F2A19}"/>
+                </a:ext>
+              </a:extLst>
+            </p:cNvPr>
+            <p:cNvSpPr txBox="1"/>
+            <p:nvPr/>
+          </p:nvSpPr>
+          <p:spPr>
+            <a:xfrm>
+              <a:off x="2565594" y="3566144"/>
+              <a:ext cx="355320" cy="182880"/>
+            </a:xfrm>
+            <a:prstGeom prst="rect">
+              <a:avLst/>
+            </a:prstGeom>
+            <a:noFill/>
+          </p:spPr>
+          <p:txBody>
+            <a:bodyPr wrap="none" lIns="0" tIns="0" rIns="0" bIns="0" rtlCol="0" anchor="ctr" anchorCtr="1">
+              <a:noAutofit/>
+            </a:bodyPr>
+            <a:lstStyle/>
+            <a:p>
+              <a:pPr algn="ctr">
+                <a:lnSpc>
+                  <a:spcPts val="1400"/>
+                </a:lnSpc>
+              </a:pPr>
+              <a:r>
+                <a:rPr lang="az-Cyrl-AZ" altLang="zh-TW" sz="1400" b="1" dirty="0">
+                  <a:solidFill>
+                    <a:schemeClr val="accent4">
+                      <a:lumMod val="60000"/>
+                      <a:lumOff val="40000"/>
+                    </a:schemeClr>
+                  </a:solidFill>
+                  <a:latin typeface="Calibri" panose="020F0502020204030204" pitchFamily="34" charset="0"/>
+                  <a:ea typeface="Calibri" panose="020F0502020204030204" pitchFamily="34" charset="0"/>
+                  <a:cs typeface="Calibri" panose="020F0502020204030204" pitchFamily="34" charset="0"/>
+                </a:rPr>
+                <a:t>Ꙩ</a:t>
+              </a:r>
+              <a:r>
+                <a:rPr lang="en-US" altLang="zh-TW" sz="1400" b="1" dirty="0">
+                  <a:solidFill>
+                    <a:schemeClr val="accent4">
+                      <a:lumMod val="60000"/>
+                      <a:lumOff val="40000"/>
+                    </a:schemeClr>
+                  </a:solidFill>
+                  <a:ea typeface="ADLaM Display" panose="02010000000000000000" pitchFamily="2" charset="0"/>
+                  <a:cs typeface="ADLaM Display" panose="02010000000000000000" pitchFamily="2" charset="0"/>
+                </a:rPr>
+                <a:t> C3</a:t>
+              </a:r>
+              <a:endParaRPr lang="zh-TW" altLang="en-US" sz="1400" b="1" baseline="-25000" dirty="0">
+                <a:solidFill>
+                  <a:schemeClr val="accent4">
+                    <a:lumMod val="60000"/>
+                    <a:lumOff val="40000"/>
+                  </a:schemeClr>
+                </a:solidFill>
+              </a:endParaRPr>
+            </a:p>
+          </p:txBody>
+        </p:sp>
+        <p:sp>
+          <p:nvSpPr>
+            <p:cNvPr id="319" name="文字方塊 318">
+              <a:extLst>
+                <a:ext uri="{FF2B5EF4-FFF2-40B4-BE49-F238E27FC236}">
+                  <a16:creationId xmlns:a16="http://schemas.microsoft.com/office/drawing/2014/main" id="{0CFB4FC7-B016-8FE8-808F-18DF0A3C9AFF}"/>
+                </a:ext>
+              </a:extLst>
+            </p:cNvPr>
+            <p:cNvSpPr txBox="1"/>
+            <p:nvPr/>
+          </p:nvSpPr>
+          <p:spPr>
+            <a:xfrm>
+              <a:off x="3479099" y="3566144"/>
+              <a:ext cx="238623" cy="182880"/>
+            </a:xfrm>
+            <a:prstGeom prst="rect">
+              <a:avLst/>
+            </a:prstGeom>
+            <a:noFill/>
+          </p:spPr>
+          <p:txBody>
+            <a:bodyPr wrap="none" lIns="0" tIns="0" rIns="0" bIns="0" rtlCol="0" anchor="ctr" anchorCtr="1">
+              <a:noAutofit/>
+            </a:bodyPr>
+            <a:lstStyle/>
+            <a:p>
+              <a:pPr algn="ctr">
+                <a:lnSpc>
+                  <a:spcPts val="1400"/>
+                </a:lnSpc>
+              </a:pPr>
+              <a:r>
+                <a:rPr lang="en-US" altLang="zh-TW" sz="1400" b="1" dirty="0">
+                  <a:solidFill>
+                    <a:schemeClr val="accent4">
+                      <a:lumMod val="60000"/>
+                      <a:lumOff val="40000"/>
+                    </a:schemeClr>
+                  </a:solidFill>
+                  <a:ea typeface="ADLaM Display" panose="02010000000000000000" pitchFamily="2" charset="0"/>
+                  <a:cs typeface="ADLaM Display" panose="02010000000000000000" pitchFamily="2" charset="0"/>
+                </a:rPr>
+                <a:t> </a:t>
+              </a:r>
+              <a:r>
+                <a:rPr lang="en-US" altLang="zh-TW" sz="1400" b="1" dirty="0">
+                  <a:solidFill>
+                    <a:schemeClr val="accent4"/>
+                  </a:solidFill>
+                  <a:latin typeface="Calibri" panose="020F0502020204030204" pitchFamily="34" charset="0"/>
+                  <a:ea typeface="Calibri" panose="020F0502020204030204" pitchFamily="34" charset="0"/>
+                  <a:cs typeface="Calibri" panose="020F0502020204030204" pitchFamily="34" charset="0"/>
+                </a:rPr>
+                <a:t>€</a:t>
+              </a:r>
+              <a:r>
+                <a:rPr lang="en-US" altLang="zh-TW" sz="1400" b="1" dirty="0">
+                  <a:solidFill>
+                    <a:schemeClr val="accent4"/>
+                  </a:solidFill>
+                  <a:ea typeface="ADLaM Display" panose="02010000000000000000" pitchFamily="2" charset="0"/>
+                  <a:cs typeface="ADLaM Display" panose="02010000000000000000" pitchFamily="2" charset="0"/>
+                </a:rPr>
+                <a:t>4</a:t>
+              </a:r>
+              <a:endParaRPr lang="zh-TW" altLang="en-US" sz="1400" b="1" baseline="-25000" dirty="0">
+                <a:solidFill>
+                  <a:schemeClr val="accent4"/>
+                </a:solidFill>
+              </a:endParaRPr>
+            </a:p>
+          </p:txBody>
+        </p:sp>
+        <p:sp>
+          <p:nvSpPr>
+            <p:cNvPr id="333" name="文字方塊 332">
+              <a:extLst>
+                <a:ext uri="{FF2B5EF4-FFF2-40B4-BE49-F238E27FC236}">
+                  <a16:creationId xmlns:a16="http://schemas.microsoft.com/office/drawing/2014/main" id="{335FF69B-A873-42BA-973E-F11253D9A9AD}"/>
+                </a:ext>
+              </a:extLst>
+            </p:cNvPr>
+            <p:cNvSpPr txBox="1"/>
+            <p:nvPr/>
+          </p:nvSpPr>
+          <p:spPr>
+            <a:xfrm>
+              <a:off x="2277562" y="3566144"/>
+              <a:ext cx="312122" cy="182880"/>
+            </a:xfrm>
+            <a:prstGeom prst="rect">
+              <a:avLst/>
+            </a:prstGeom>
+            <a:noFill/>
+          </p:spPr>
+          <p:txBody>
+            <a:bodyPr wrap="none" lIns="0" tIns="0" rIns="0" bIns="0" rtlCol="0" anchor="ctr" anchorCtr="1">
+              <a:noAutofit/>
+            </a:bodyPr>
+            <a:lstStyle/>
+            <a:p>
+              <a:pPr algn="ctr">
+                <a:lnSpc>
+                  <a:spcPts val="1400"/>
+                </a:lnSpc>
+              </a:pPr>
+              <a:r>
+                <a:rPr lang="en-US" altLang="zh-TW" sz="1400" b="1" dirty="0">
+                  <a:solidFill>
+                    <a:schemeClr val="accent4"/>
+                  </a:solidFill>
+                </a:rPr>
+                <a:t>f4</a:t>
+              </a:r>
+              <a:endParaRPr lang="zh-TW" altLang="en-US" sz="1400" b="1" baseline="-25000" dirty="0">
+                <a:solidFill>
+                  <a:schemeClr val="accent4">
+                    <a:lumMod val="60000"/>
+                    <a:lumOff val="40000"/>
+                  </a:schemeClr>
+                </a:solidFill>
+              </a:endParaRPr>
+            </a:p>
+          </p:txBody>
+        </p:sp>
+        <p:sp>
+          <p:nvSpPr>
+            <p:cNvPr id="361" name="文字方塊 360">
+              <a:extLst>
+                <a:ext uri="{FF2B5EF4-FFF2-40B4-BE49-F238E27FC236}">
+                  <a16:creationId xmlns:a16="http://schemas.microsoft.com/office/drawing/2014/main" id="{89E2B554-1E9D-542F-320A-5113401505CF}"/>
+                </a:ext>
+              </a:extLst>
+            </p:cNvPr>
+            <p:cNvSpPr txBox="1"/>
+            <p:nvPr/>
+          </p:nvSpPr>
+          <p:spPr>
+            <a:xfrm>
+              <a:off x="3314303" y="3566144"/>
+              <a:ext cx="187395" cy="182880"/>
+            </a:xfrm>
+            <a:prstGeom prst="rect">
+              <a:avLst/>
+            </a:prstGeom>
+            <a:noFill/>
+          </p:spPr>
+          <p:txBody>
+            <a:bodyPr wrap="none" lIns="0" tIns="0" rIns="0" bIns="0" rtlCol="0" anchor="ctr" anchorCtr="1">
+              <a:noAutofit/>
+            </a:bodyPr>
+            <a:lstStyle/>
+            <a:p>
+              <a:pPr algn="ctr">
+                <a:lnSpc>
+                  <a:spcPts val="1400"/>
+                </a:lnSpc>
+              </a:pPr>
+              <a:r>
+                <a:rPr lang="az-Cyrl-AZ" altLang="zh-TW" sz="1400" b="1" dirty="0">
+                  <a:solidFill>
+                    <a:schemeClr val="accent4">
+                      <a:lumMod val="60000"/>
+                      <a:lumOff val="40000"/>
+                    </a:schemeClr>
+                  </a:solidFill>
+                  <a:latin typeface="Calibri" panose="020F0502020204030204" pitchFamily="34" charset="0"/>
+                  <a:ea typeface="Calibri" panose="020F0502020204030204" pitchFamily="34" charset="0"/>
+                  <a:cs typeface="Calibri" panose="020F0502020204030204" pitchFamily="34" charset="0"/>
+                </a:rPr>
+                <a:t>Ꙩ</a:t>
+              </a:r>
+              <a:endParaRPr lang="zh-TW" altLang="en-US" sz="1400" b="1" baseline="-25000" dirty="0">
+                <a:solidFill>
+                  <a:schemeClr val="accent4"/>
+                </a:solidFill>
+              </a:endParaRPr>
+            </a:p>
+          </p:txBody>
+        </p:sp>
+      </p:grpSp>
+      <p:grpSp>
+        <p:nvGrpSpPr>
+          <p:cNvPr id="400" name="群組 399">
+            <a:extLst>
+              <a:ext uri="{FF2B5EF4-FFF2-40B4-BE49-F238E27FC236}">
+                <a16:creationId xmlns:a16="http://schemas.microsoft.com/office/drawing/2014/main" id="{678B9CFC-5C6F-CD91-2BD7-7779CABCD7C0}"/>
+              </a:ext>
+            </a:extLst>
+          </p:cNvPr>
+          <p:cNvGrpSpPr/>
+          <p:nvPr/>
+        </p:nvGrpSpPr>
+        <p:grpSpPr>
+          <a:xfrm>
+            <a:off x="2627784" y="4725144"/>
+            <a:ext cx="1608266" cy="182880"/>
+            <a:chOff x="2516143" y="4590653"/>
+            <a:chExt cx="1608266" cy="182880"/>
+          </a:xfrm>
+        </p:grpSpPr>
+        <p:sp>
+          <p:nvSpPr>
+            <p:cNvPr id="380" name="文字方塊 379">
+              <a:extLst>
+                <a:ext uri="{FF2B5EF4-FFF2-40B4-BE49-F238E27FC236}">
+                  <a16:creationId xmlns:a16="http://schemas.microsoft.com/office/drawing/2014/main" id="{3013227B-A0B4-E97B-5F66-456084D82003}"/>
+                </a:ext>
+              </a:extLst>
+            </p:cNvPr>
+            <p:cNvSpPr txBox="1"/>
+            <p:nvPr/>
+          </p:nvSpPr>
+          <p:spPr>
+            <a:xfrm>
+              <a:off x="3733239" y="4590653"/>
+              <a:ext cx="391170" cy="182880"/>
+            </a:xfrm>
+            <a:prstGeom prst="rect">
+              <a:avLst/>
+            </a:prstGeom>
+            <a:noFill/>
+          </p:spPr>
+          <p:txBody>
+            <a:bodyPr wrap="none" lIns="0" tIns="0" rIns="0" bIns="0" rtlCol="0" anchor="ctr" anchorCtr="1">
+              <a:noAutofit/>
+            </a:bodyPr>
+            <a:lstStyle/>
+            <a:p>
+              <a:pPr algn="ctr">
+                <a:lnSpc>
+                  <a:spcPts val="1400"/>
+                </a:lnSpc>
+              </a:pPr>
+              <a:r>
+                <a:rPr lang="en-US" altLang="zh-TW" sz="1400" b="1" dirty="0">
+                  <a:solidFill>
+                    <a:schemeClr val="accent4"/>
+                  </a:solidFill>
+                  <a:ea typeface="ADLaM Display" panose="02010000000000000000" pitchFamily="2" charset="0"/>
+                  <a:cs typeface="ADLaM Display" panose="02010000000000000000" pitchFamily="2" charset="0"/>
+                </a:rPr>
+                <a:t>= </a:t>
+              </a:r>
+              <a:r>
+                <a:rPr lang="en-US" altLang="zh-TW" sz="1400" b="1" dirty="0">
+                  <a:solidFill>
+                    <a:schemeClr val="accent4">
+                      <a:lumMod val="60000"/>
+                      <a:lumOff val="40000"/>
+                    </a:schemeClr>
+                  </a:solidFill>
+                  <a:ea typeface="ADLaM Display" panose="02010000000000000000" pitchFamily="2" charset="0"/>
+                  <a:cs typeface="ADLaM Display" panose="02010000000000000000" pitchFamily="2" charset="0"/>
+                </a:rPr>
+                <a:t>h(4)</a:t>
+              </a:r>
+              <a:endParaRPr lang="zh-TW" altLang="en-US" sz="1400" b="1" baseline="-25000" dirty="0">
+                <a:solidFill>
+                  <a:schemeClr val="accent4">
+                    <a:lumMod val="60000"/>
+                    <a:lumOff val="40000"/>
+                  </a:schemeClr>
+                </a:solidFill>
+              </a:endParaRPr>
+            </a:p>
+          </p:txBody>
+        </p:sp>
+        <p:sp>
+          <p:nvSpPr>
+            <p:cNvPr id="384" name="文字方塊 383">
+              <a:extLst>
+                <a:ext uri="{FF2B5EF4-FFF2-40B4-BE49-F238E27FC236}">
+                  <a16:creationId xmlns:a16="http://schemas.microsoft.com/office/drawing/2014/main" id="{D9E098ED-B1A0-4BB9-A0AB-BB889550DB95}"/>
+                </a:ext>
+              </a:extLst>
+            </p:cNvPr>
+            <p:cNvSpPr txBox="1"/>
+            <p:nvPr/>
+          </p:nvSpPr>
+          <p:spPr>
+            <a:xfrm>
+              <a:off x="2937434" y="4590653"/>
+              <a:ext cx="733204" cy="182880"/>
+            </a:xfrm>
+            <a:prstGeom prst="rect">
+              <a:avLst/>
+            </a:prstGeom>
+            <a:noFill/>
+          </p:spPr>
+          <p:txBody>
+            <a:bodyPr wrap="none" lIns="0" tIns="0" rIns="0" bIns="0" rtlCol="0" anchor="ctr" anchorCtr="1">
+              <a:noAutofit/>
+            </a:bodyPr>
+            <a:lstStyle/>
+            <a:p>
+              <a:pPr algn="ctr">
+                <a:lnSpc>
+                  <a:spcPts val="1400"/>
+                </a:lnSpc>
+              </a:pPr>
+              <a:r>
+                <a:rPr lang="en-US" altLang="zh-TW" sz="1400" b="1" dirty="0">
+                  <a:solidFill>
+                    <a:schemeClr val="accent4">
+                      <a:lumMod val="60000"/>
+                      <a:lumOff val="40000"/>
+                    </a:schemeClr>
+                  </a:solidFill>
+                  <a:ea typeface="ADLaM Display" panose="02010000000000000000" pitchFamily="2" charset="0"/>
+                  <a:cs typeface="ADLaM Display" panose="02010000000000000000" pitchFamily="2" charset="0"/>
+                </a:rPr>
+                <a:t> </a:t>
+              </a:r>
+              <a:r>
+                <a:rPr lang="en-US" altLang="zh-TW" sz="1400" b="1" dirty="0">
+                  <a:solidFill>
+                    <a:schemeClr val="accent4"/>
+                  </a:solidFill>
+                  <a:ea typeface="Calibri" panose="020F0502020204030204" pitchFamily="34" charset="0"/>
+                  <a:cs typeface="Calibri" panose="020F0502020204030204" pitchFamily="34" charset="0"/>
+                </a:rPr>
+                <a:t>tanh</a:t>
+              </a:r>
+              <a:r>
+                <a:rPr lang="en-US" altLang="zh-TW" sz="1400" b="1" dirty="0">
+                  <a:solidFill>
+                    <a:schemeClr val="accent4"/>
+                  </a:solidFill>
+                  <a:ea typeface="ADLaM Display" panose="02010000000000000000" pitchFamily="2" charset="0"/>
+                  <a:cs typeface="ADLaM Display" panose="02010000000000000000" pitchFamily="2" charset="0"/>
+                </a:rPr>
+                <a:t>( C4 )</a:t>
+              </a:r>
+              <a:endParaRPr lang="zh-TW" altLang="en-US" sz="1400" b="1" baseline="-25000" dirty="0">
+                <a:solidFill>
+                  <a:schemeClr val="accent4"/>
+                </a:solidFill>
+              </a:endParaRPr>
+            </a:p>
+          </p:txBody>
+        </p:sp>
+        <p:sp>
+          <p:nvSpPr>
+            <p:cNvPr id="385" name="文字方塊 384">
+              <a:extLst>
+                <a:ext uri="{FF2B5EF4-FFF2-40B4-BE49-F238E27FC236}">
+                  <a16:creationId xmlns:a16="http://schemas.microsoft.com/office/drawing/2014/main" id="{B9032771-847E-7D05-A59B-E10CFADBB86E}"/>
+                </a:ext>
+              </a:extLst>
+            </p:cNvPr>
+            <p:cNvSpPr txBox="1"/>
+            <p:nvPr/>
+          </p:nvSpPr>
+          <p:spPr>
+            <a:xfrm>
+              <a:off x="2516143" y="4590653"/>
+              <a:ext cx="312122" cy="182880"/>
+            </a:xfrm>
+            <a:prstGeom prst="rect">
+              <a:avLst/>
+            </a:prstGeom>
+            <a:noFill/>
+          </p:spPr>
+          <p:txBody>
+            <a:bodyPr wrap="none" lIns="0" tIns="0" rIns="0" bIns="0" rtlCol="0" anchor="ctr" anchorCtr="1">
+              <a:noAutofit/>
+            </a:bodyPr>
+            <a:lstStyle/>
+            <a:p>
+              <a:pPr algn="ctr">
+                <a:lnSpc>
+                  <a:spcPts val="1400"/>
+                </a:lnSpc>
+              </a:pPr>
+              <a:r>
+                <a:rPr lang="en-US" altLang="zh-TW" sz="1400" b="1" dirty="0">
+                  <a:solidFill>
+                    <a:schemeClr val="accent4"/>
+                  </a:solidFill>
+                </a:rPr>
+                <a:t>O4</a:t>
+              </a:r>
+              <a:endParaRPr lang="zh-TW" altLang="en-US" sz="1400" b="1" baseline="-25000" dirty="0">
+                <a:solidFill>
+                  <a:schemeClr val="accent4">
+                    <a:lumMod val="60000"/>
+                    <a:lumOff val="40000"/>
+                  </a:schemeClr>
+                </a:solidFill>
+              </a:endParaRPr>
+            </a:p>
+          </p:txBody>
+        </p:sp>
+        <p:sp>
+          <p:nvSpPr>
+            <p:cNvPr id="386" name="文字方塊 385">
+              <a:extLst>
+                <a:ext uri="{FF2B5EF4-FFF2-40B4-BE49-F238E27FC236}">
+                  <a16:creationId xmlns:a16="http://schemas.microsoft.com/office/drawing/2014/main" id="{BEF18A3B-6F2A-C7EB-ABC2-B56A88322765}"/>
+                </a:ext>
+              </a:extLst>
+            </p:cNvPr>
+            <p:cNvSpPr txBox="1"/>
+            <p:nvPr/>
+          </p:nvSpPr>
+          <p:spPr>
+            <a:xfrm>
+              <a:off x="2784886" y="4590653"/>
+              <a:ext cx="187395" cy="182880"/>
+            </a:xfrm>
+            <a:prstGeom prst="rect">
+              <a:avLst/>
+            </a:prstGeom>
+            <a:noFill/>
+          </p:spPr>
+          <p:txBody>
+            <a:bodyPr wrap="none" lIns="0" tIns="0" rIns="0" bIns="0" rtlCol="0" anchor="ctr" anchorCtr="1">
+              <a:noAutofit/>
+            </a:bodyPr>
+            <a:lstStyle/>
+            <a:p>
+              <a:pPr algn="ctr">
+                <a:lnSpc>
+                  <a:spcPts val="1400"/>
+                </a:lnSpc>
+              </a:pPr>
+              <a:r>
+                <a:rPr lang="az-Cyrl-AZ" altLang="zh-TW" sz="1400" b="1" dirty="0">
+                  <a:solidFill>
+                    <a:schemeClr val="accent4">
+                      <a:lumMod val="60000"/>
+                      <a:lumOff val="40000"/>
+                    </a:schemeClr>
+                  </a:solidFill>
+                  <a:ea typeface="Calibri" panose="020F0502020204030204" pitchFamily="34" charset="0"/>
+                  <a:cs typeface="Calibri" panose="020F0502020204030204" pitchFamily="34" charset="0"/>
+                </a:rPr>
+                <a:t>Ꙩ</a:t>
+              </a:r>
+              <a:endParaRPr lang="zh-TW" altLang="en-US" sz="1400" b="1" baseline="-25000" dirty="0">
+                <a:solidFill>
+                  <a:schemeClr val="accent4"/>
+                </a:solidFill>
+              </a:endParaRPr>
+            </a:p>
+          </p:txBody>
+        </p:sp>
+      </p:grpSp>
+      <p:sp>
+        <p:nvSpPr>
+          <p:cNvPr id="394" name="文字方塊 393">
+            <a:extLst>
+              <a:ext uri="{FF2B5EF4-FFF2-40B4-BE49-F238E27FC236}">
+                <a16:creationId xmlns:a16="http://schemas.microsoft.com/office/drawing/2014/main" id="{05AB4175-609F-2C99-587F-458524FC6275}"/>
+              </a:ext>
+            </a:extLst>
+          </p:cNvPr>
+          <p:cNvSpPr txBox="1"/>
+          <p:nvPr/>
+        </p:nvSpPr>
+        <p:spPr>
+          <a:xfrm>
+            <a:off x="2957751" y="4218243"/>
+            <a:ext cx="339942" cy="192518"/>
+          </a:xfrm>
+          <a:prstGeom prst="rect">
+            <a:avLst/>
+          </a:prstGeom>
+          <a:noFill/>
+        </p:spPr>
+        <p:txBody>
+          <a:bodyPr wrap="none" lIns="0" tIns="0" rIns="0" bIns="0" rtlCol="0" anchor="ctr" anchorCtr="1">
+            <a:noAutofit/>
+          </a:bodyPr>
+          <a:lstStyle/>
+          <a:p>
+            <a:pPr marL="0" marR="0" lvl="0" indent="0" algn="ctr" defTabSz="914400" rtl="0" eaLnBrk="1" fontAlgn="auto" latinLnBrk="0" hangingPunct="1">
+              <a:lnSpc>
+                <a:spcPts val="1400"/>
+              </a:lnSpc>
+              <a:spcBef>
+                <a:spcPts val="0"/>
+              </a:spcBef>
+              <a:spcAft>
+                <a:spcPts val="0"/>
+              </a:spcAft>
+              <a:buClrTx/>
+              <a:buSzTx/>
+              <a:buFontTx/>
+              <a:buNone/>
+              <a:tabLst/>
+              <a:defRPr/>
+            </a:pPr>
+            <a:r>
+              <a:rPr lang="en-US" altLang="zh-TW" sz="1400" b="1" dirty="0">
+                <a:solidFill>
+                  <a:schemeClr val="accent4"/>
+                </a:solidFill>
+                <a:sym typeface="Wingdings" panose="05000000000000000000" pitchFamily="2" charset="2"/>
+              </a:rPr>
+              <a:t>= </a:t>
+            </a:r>
+            <a:r>
+              <a:rPr lang="en-US" altLang="zh-TW" sz="1400" b="1" dirty="0">
+                <a:solidFill>
+                  <a:schemeClr val="accent4"/>
+                </a:solidFill>
+              </a:rPr>
+              <a:t>O4</a:t>
+            </a:r>
+            <a:endParaRPr lang="zh-TW" altLang="en-US" sz="1400" b="1" baseline="-25000" dirty="0">
+              <a:solidFill>
+                <a:schemeClr val="accent4"/>
+              </a:solidFill>
+            </a:endParaRPr>
+          </a:p>
+        </p:txBody>
+      </p:sp>
+      <p:cxnSp>
+        <p:nvCxnSpPr>
+          <p:cNvPr id="401" name="接點: 肘形 400">
+            <a:extLst>
+              <a:ext uri="{FF2B5EF4-FFF2-40B4-BE49-F238E27FC236}">
+                <a16:creationId xmlns:a16="http://schemas.microsoft.com/office/drawing/2014/main" id="{5DC1FA8A-A973-2818-A492-E778176837C0}"/>
+              </a:ext>
+            </a:extLst>
+          </p:cNvPr>
+          <p:cNvCxnSpPr>
+            <a:cxnSpLocks/>
+            <a:stCxn id="394" idx="2"/>
+            <a:endCxn id="385" idx="0"/>
+          </p:cNvCxnSpPr>
+          <p:nvPr/>
+        </p:nvCxnSpPr>
+        <p:spPr>
+          <a:xfrm rot="5400000">
+            <a:off x="2798593" y="4396014"/>
+            <a:ext cx="314383" cy="343877"/>
+          </a:xfrm>
+          <a:prstGeom prst="bentConnector3">
+            <a:avLst>
+              <a:gd name="adj1" fmla="val 50000"/>
+            </a:avLst>
+          </a:prstGeom>
+          <a:ln w="15875">
+            <a:solidFill>
+              <a:schemeClr val="accent4"/>
             </a:solidFill>
             <a:prstDash val="sysDot"/>
             <a:tailEnd type="triangle" w="sm" len="med"/>
